--- a/presentation/1nsight Presentation - olist.pptx
+++ b/presentation/1nsight Presentation - olist.pptx
@@ -5,39 +5,49 @@
     <p:sldMasterId id="2147483666" r:id="rId4"/>
   </p:sldMasterIdLst>
   <p:notesMasterIdLst>
-    <p:notesMasterId r:id="rId32"/>
+    <p:notesMasterId r:id="rId42"/>
   </p:notesMasterIdLst>
   <p:handoutMasterIdLst>
-    <p:handoutMasterId r:id="rId33"/>
+    <p:handoutMasterId r:id="rId43"/>
   </p:handoutMasterIdLst>
   <p:sldIdLst>
     <p:sldId id="256" r:id="rId5"/>
-    <p:sldId id="297" r:id="rId6"/>
-    <p:sldId id="261" r:id="rId7"/>
-    <p:sldId id="298" r:id="rId8"/>
-    <p:sldId id="295" r:id="rId9"/>
-    <p:sldId id="289" r:id="rId10"/>
-    <p:sldId id="296" r:id="rId11"/>
-    <p:sldId id="299" r:id="rId12"/>
-    <p:sldId id="300" r:id="rId13"/>
-    <p:sldId id="275" r:id="rId14"/>
-    <p:sldId id="302" r:id="rId15"/>
-    <p:sldId id="277" r:id="rId16"/>
-    <p:sldId id="262" r:id="rId17"/>
-    <p:sldId id="264" r:id="rId18"/>
-    <p:sldId id="258" r:id="rId19"/>
-    <p:sldId id="278" r:id="rId20"/>
-    <p:sldId id="266" r:id="rId21"/>
-    <p:sldId id="292" r:id="rId22"/>
-    <p:sldId id="268" r:id="rId23"/>
-    <p:sldId id="280" r:id="rId24"/>
-    <p:sldId id="270" r:id="rId25"/>
-    <p:sldId id="293" r:id="rId26"/>
-    <p:sldId id="294" r:id="rId27"/>
-    <p:sldId id="260" r:id="rId28"/>
-    <p:sldId id="282" r:id="rId29"/>
-    <p:sldId id="283" r:id="rId30"/>
-    <p:sldId id="290" r:id="rId31"/>
+    <p:sldId id="304" r:id="rId6"/>
+    <p:sldId id="305" r:id="rId7"/>
+    <p:sldId id="297" r:id="rId8"/>
+    <p:sldId id="306" r:id="rId9"/>
+    <p:sldId id="261" r:id="rId10"/>
+    <p:sldId id="307" r:id="rId11"/>
+    <p:sldId id="298" r:id="rId12"/>
+    <p:sldId id="303" r:id="rId13"/>
+    <p:sldId id="308" r:id="rId14"/>
+    <p:sldId id="295" r:id="rId15"/>
+    <p:sldId id="289" r:id="rId16"/>
+    <p:sldId id="312" r:id="rId17"/>
+    <p:sldId id="296" r:id="rId18"/>
+    <p:sldId id="309" r:id="rId19"/>
+    <p:sldId id="299" r:id="rId20"/>
+    <p:sldId id="310" r:id="rId21"/>
+    <p:sldId id="300" r:id="rId22"/>
+    <p:sldId id="275" r:id="rId23"/>
+    <p:sldId id="311" r:id="rId24"/>
+    <p:sldId id="302" r:id="rId25"/>
+    <p:sldId id="277" r:id="rId26"/>
+    <p:sldId id="262" r:id="rId27"/>
+    <p:sldId id="264" r:id="rId28"/>
+    <p:sldId id="258" r:id="rId29"/>
+    <p:sldId id="278" r:id="rId30"/>
+    <p:sldId id="266" r:id="rId31"/>
+    <p:sldId id="292" r:id="rId32"/>
+    <p:sldId id="268" r:id="rId33"/>
+    <p:sldId id="280" r:id="rId34"/>
+    <p:sldId id="270" r:id="rId35"/>
+    <p:sldId id="293" r:id="rId36"/>
+    <p:sldId id="294" r:id="rId37"/>
+    <p:sldId id="260" r:id="rId38"/>
+    <p:sldId id="282" r:id="rId39"/>
+    <p:sldId id="283" r:id="rId40"/>
+    <p:sldId id="290" r:id="rId41"/>
   </p:sldIdLst>
   <p:sldSz cx="12192000" cy="6858000"/>
   <p:notesSz cx="6858000" cy="9144000"/>
@@ -1921,7 +1931,7 @@
           <a:p>
             <a:fld id="{F352A77B-D33C-49B3-A83C-450AA2ED72B3}" type="datetimeFigureOut">
               <a:rPr lang="en-US" smtClean="0"/>
-              <a:t>6/10/2026</a:t>
+              <a:t>6/19/2026</a:t>
             </a:fld>
             <a:endParaRPr lang="en-US" dirty="0"/>
           </a:p>
@@ -2098,7 +2108,7 @@
           <a:p>
             <a:fld id="{E38D8F9A-F5CB-4EF8-A859-ED5E107B9763}" type="datetimeFigureOut">
               <a:rPr lang="en-US" smtClean="0"/>
-              <a:t>6/10/2026</a:t>
+              <a:t>6/19/2026</a:t>
             </a:fld>
             <a:endParaRPr lang="en-US" dirty="0"/>
           </a:p>
@@ -2433,7 +2443,7 @@
           <a:p>
             <a:fld id="{D4B9A9E5-4F7F-4A7D-9DE1-899232329269}" type="slidenum">
               <a:rPr lang="en-US" smtClean="0"/>
-              <a:t>3</a:t>
+              <a:t>6</a:t>
             </a:fld>
             <a:endParaRPr lang="en-US" dirty="0"/>
           </a:p>
@@ -2517,7 +2527,7 @@
           <a:p>
             <a:fld id="{D4B9A9E5-4F7F-4A7D-9DE1-899232329269}" type="slidenum">
               <a:rPr lang="en-US" smtClean="0"/>
-              <a:t>7</a:t>
+              <a:t>14</a:t>
             </a:fld>
             <a:endParaRPr lang="en-US" dirty="0"/>
           </a:p>
@@ -2625,7 +2635,7 @@
           <a:p>
             <a:fld id="{D4B9A9E5-4F7F-4A7D-9DE1-899232329269}" type="slidenum">
               <a:rPr lang="en-US" smtClean="0"/>
-              <a:t>8</a:t>
+              <a:t>16</a:t>
             </a:fld>
             <a:endParaRPr lang="en-US" dirty="0"/>
           </a:p>
@@ -2733,7 +2743,7 @@
           <a:p>
             <a:fld id="{D4B9A9E5-4F7F-4A7D-9DE1-899232329269}" type="slidenum">
               <a:rPr lang="en-US" smtClean="0"/>
-              <a:t>9</a:t>
+              <a:t>18</a:t>
             </a:fld>
             <a:endParaRPr lang="en-US" dirty="0"/>
           </a:p>
@@ -19393,6 +19403,606 @@
   <p:cSld>
     <p:spTree>
       <p:nvGrpSpPr>
+        <p:cNvPr id="1" name="">
+          <a:extLst>
+            <a:ext uri="{FF2B5EF4-FFF2-40B4-BE49-F238E27FC236}">
+              <a16:creationId xmlns:a16="http://schemas.microsoft.com/office/drawing/2014/main" id="{416B2006-7118-B257-82E8-446FFD54064F}"/>
+            </a:ext>
+          </a:extLst>
+        </p:cNvPr>
+        <p:cNvGrpSpPr/>
+        <p:nvPr/>
+      </p:nvGrpSpPr>
+      <p:grpSpPr>
+        <a:xfrm>
+          <a:off x="0" y="0"/>
+          <a:ext cx="0" cy="0"/>
+          <a:chOff x="0" y="0"/>
+          <a:chExt cx="0" cy="0"/>
+        </a:xfrm>
+      </p:grpSpPr>
+      <p:sp>
+        <p:nvSpPr>
+          <p:cNvPr id="2" name="Title 1">
+            <a:extLst>
+              <a:ext uri="{FF2B5EF4-FFF2-40B4-BE49-F238E27FC236}">
+                <a16:creationId xmlns:a16="http://schemas.microsoft.com/office/drawing/2014/main" id="{4C0E95BA-D0B3-A7C3-FDA0-7E156DD31860}"/>
+              </a:ext>
+            </a:extLst>
+          </p:cNvPr>
+          <p:cNvSpPr>
+            <a:spLocks noGrp="1"/>
+          </p:cNvSpPr>
+          <p:nvPr>
+            <p:ph type="ctrTitle"/>
+          </p:nvPr>
+        </p:nvSpPr>
+        <p:spPr>
+          <a:xfrm>
+            <a:off x="6304547" y="2165685"/>
+            <a:ext cx="5370897" cy="2121082"/>
+          </a:xfrm>
+        </p:spPr>
+        <p:txBody>
+          <a:bodyPr/>
+          <a:lstStyle/>
+          <a:p>
+            <a:r>
+              <a:rPr lang="en-US" dirty="0"/>
+              <a:t>DELIVERY PERFORMANCE</a:t>
+            </a:r>
+            <a:br>
+              <a:rPr lang="en-US" dirty="0"/>
+            </a:br>
+            <a:br>
+              <a:rPr lang="en-US" dirty="0"/>
+            </a:br>
+            <a:r>
+              <a:rPr lang="en-US" sz="2400" i="1" dirty="0"/>
+              <a:t>Improving Customer Satisfaction</a:t>
+            </a:r>
+            <a:endParaRPr lang="en-US" i="1" dirty="0"/>
+          </a:p>
+        </p:txBody>
+      </p:sp>
+    </p:spTree>
+    <p:extLst>
+      <p:ext uri="{BB962C8B-B14F-4D97-AF65-F5344CB8AC3E}">
+        <p14:creationId xmlns:p14="http://schemas.microsoft.com/office/powerpoint/2010/main" val="3904358749"/>
+      </p:ext>
+    </p:extLst>
+  </p:cSld>
+  <p:clrMapOvr>
+    <a:masterClrMapping/>
+  </p:clrMapOvr>
+</p:sld>
+</file>
+
+<file path=ppt/slides/slide11.xml><?xml version="1.0" encoding="utf-8"?>
+<p:sld xmlns:a="http://schemas.openxmlformats.org/drawingml/2006/main" xmlns:r="http://schemas.openxmlformats.org/officeDocument/2006/relationships" xmlns:p="http://schemas.openxmlformats.org/presentationml/2006/main">
+  <p:cSld>
+    <p:spTree>
+      <p:nvGrpSpPr>
+        <p:cNvPr id="1" name="">
+          <a:extLst>
+            <a:ext uri="{FF2B5EF4-FFF2-40B4-BE49-F238E27FC236}">
+              <a16:creationId xmlns:a16="http://schemas.microsoft.com/office/drawing/2014/main" id="{45C63BA7-2EE6-DF51-0B29-1AE9373E03E9}"/>
+            </a:ext>
+          </a:extLst>
+        </p:cNvPr>
+        <p:cNvGrpSpPr/>
+        <p:nvPr/>
+      </p:nvGrpSpPr>
+      <p:grpSpPr>
+        <a:xfrm>
+          <a:off x="0" y="0"/>
+          <a:ext cx="0" cy="0"/>
+          <a:chOff x="0" y="0"/>
+          <a:chExt cx="0" cy="0"/>
+        </a:xfrm>
+      </p:grpSpPr>
+      <p:pic>
+        <p:nvPicPr>
+          <p:cNvPr id="4" name="Picture 3">
+            <a:extLst>
+              <a:ext uri="{FF2B5EF4-FFF2-40B4-BE49-F238E27FC236}">
+                <a16:creationId xmlns:a16="http://schemas.microsoft.com/office/drawing/2014/main" id="{4A102ED6-AE59-92F0-6968-4FBE8E51913C}"/>
+              </a:ext>
+            </a:extLst>
+          </p:cNvPr>
+          <p:cNvPicPr>
+            <a:picLocks noChangeAspect="1"/>
+          </p:cNvPicPr>
+          <p:nvPr/>
+        </p:nvPicPr>
+        <p:blipFill>
+          <a:blip r:embed="rId2"/>
+          <a:stretch>
+            <a:fillRect/>
+          </a:stretch>
+        </p:blipFill>
+        <p:spPr>
+          <a:xfrm>
+            <a:off x="488698" y="564909"/>
+            <a:ext cx="10861964" cy="5311806"/>
+          </a:xfrm>
+          <a:prstGeom prst="rect">
+            <a:avLst/>
+          </a:prstGeom>
+        </p:spPr>
+      </p:pic>
+      <p:sp>
+        <p:nvSpPr>
+          <p:cNvPr id="2" name="Title 1">
+            <a:extLst>
+              <a:ext uri="{FF2B5EF4-FFF2-40B4-BE49-F238E27FC236}">
+                <a16:creationId xmlns:a16="http://schemas.microsoft.com/office/drawing/2014/main" id="{100036D3-56D5-33D2-80A1-D6143031B9A0}"/>
+              </a:ext>
+            </a:extLst>
+          </p:cNvPr>
+          <p:cNvSpPr>
+            <a:spLocks noGrp="1"/>
+          </p:cNvSpPr>
+          <p:nvPr>
+            <p:ph type="title"/>
+          </p:nvPr>
+        </p:nvSpPr>
+        <p:spPr>
+          <a:xfrm>
+            <a:off x="401473" y="201086"/>
+            <a:ext cx="10952326" cy="929779"/>
+          </a:xfrm>
+        </p:spPr>
+        <p:txBody>
+          <a:bodyPr>
+            <a:normAutofit/>
+          </a:bodyPr>
+          <a:lstStyle/>
+          <a:p>
+            <a:r>
+              <a:rPr lang="en-US" dirty="0"/>
+              <a:t>A majority of items sold are fulfilled by External Sellers Instead of local sellers…</a:t>
+            </a:r>
+          </a:p>
+        </p:txBody>
+      </p:sp>
+      <p:sp>
+        <p:nvSpPr>
+          <p:cNvPr id="29" name="Text Placeholder 28">
+            <a:extLst>
+              <a:ext uri="{FF2B5EF4-FFF2-40B4-BE49-F238E27FC236}">
+                <a16:creationId xmlns:a16="http://schemas.microsoft.com/office/drawing/2014/main" id="{A8963ECA-990C-7640-80EC-8A8C30E94DAE}"/>
+              </a:ext>
+            </a:extLst>
+          </p:cNvPr>
+          <p:cNvSpPr>
+            <a:spLocks noGrp="1"/>
+          </p:cNvSpPr>
+          <p:nvPr>
+            <p:ph type="body" sz="quarter" idx="28"/>
+          </p:nvPr>
+        </p:nvSpPr>
+        <p:spPr>
+          <a:xfrm>
+            <a:off x="838201" y="5602406"/>
+            <a:ext cx="10550420" cy="753944"/>
+          </a:xfrm>
+        </p:spPr>
+        <p:txBody>
+          <a:bodyPr/>
+          <a:lstStyle/>
+          <a:p>
+            <a:r>
+              <a:rPr lang="en-SG" dirty="0"/>
+              <a:t>The Average Delivery Time for orders is significantly longer when they are fulfilled by External Sellers. There is opportunity to reduce Delivery Times by bringing orders closer to the respective markets.</a:t>
+            </a:r>
+          </a:p>
+        </p:txBody>
+      </p:sp>
+      <p:sp>
+        <p:nvSpPr>
+          <p:cNvPr id="3" name="Date Placeholder 10">
+            <a:extLst>
+              <a:ext uri="{FF2B5EF4-FFF2-40B4-BE49-F238E27FC236}">
+                <a16:creationId xmlns:a16="http://schemas.microsoft.com/office/drawing/2014/main" id="{5AD5EFA2-DD9C-6EEA-2160-0CC9D8AA6050}"/>
+              </a:ext>
+            </a:extLst>
+          </p:cNvPr>
+          <p:cNvSpPr txBox="1">
+            <a:spLocks/>
+          </p:cNvSpPr>
+          <p:nvPr/>
+        </p:nvSpPr>
+        <p:spPr>
+          <a:xfrm>
+            <a:off x="838200" y="6356350"/>
+            <a:ext cx="2743200" cy="365125"/>
+          </a:xfrm>
+          <a:prstGeom prst="rect">
+            <a:avLst/>
+          </a:prstGeom>
+        </p:spPr>
+        <p:txBody>
+          <a:bodyPr/>
+          <a:lstStyle>
+            <a:defPPr>
+              <a:defRPr lang="en-US"/>
+            </a:defPPr>
+            <a:lvl1pPr marL="0" algn="l" defTabSz="914400" rtl="0" eaLnBrk="1" latinLnBrk="0" hangingPunct="1">
+              <a:defRPr sz="1800" kern="1200">
+                <a:solidFill>
+                  <a:schemeClr val="tx1"/>
+                </a:solidFill>
+                <a:latin typeface="+mn-lt"/>
+                <a:ea typeface="+mn-ea"/>
+                <a:cs typeface="+mn-cs"/>
+              </a:defRPr>
+            </a:lvl1pPr>
+            <a:lvl2pPr marL="457200" algn="l" defTabSz="914400" rtl="0" eaLnBrk="1" latinLnBrk="0" hangingPunct="1">
+              <a:defRPr sz="1800" kern="1200">
+                <a:solidFill>
+                  <a:schemeClr val="tx1"/>
+                </a:solidFill>
+                <a:latin typeface="+mn-lt"/>
+                <a:ea typeface="+mn-ea"/>
+                <a:cs typeface="+mn-cs"/>
+              </a:defRPr>
+            </a:lvl2pPr>
+            <a:lvl3pPr marL="914400" algn="l" defTabSz="914400" rtl="0" eaLnBrk="1" latinLnBrk="0" hangingPunct="1">
+              <a:defRPr sz="1800" kern="1200">
+                <a:solidFill>
+                  <a:schemeClr val="tx1"/>
+                </a:solidFill>
+                <a:latin typeface="+mn-lt"/>
+                <a:ea typeface="+mn-ea"/>
+                <a:cs typeface="+mn-cs"/>
+              </a:defRPr>
+            </a:lvl3pPr>
+            <a:lvl4pPr marL="1371600" algn="l" defTabSz="914400" rtl="0" eaLnBrk="1" latinLnBrk="0" hangingPunct="1">
+              <a:defRPr sz="1800" kern="1200">
+                <a:solidFill>
+                  <a:schemeClr val="tx1"/>
+                </a:solidFill>
+                <a:latin typeface="+mn-lt"/>
+                <a:ea typeface="+mn-ea"/>
+                <a:cs typeface="+mn-cs"/>
+              </a:defRPr>
+            </a:lvl4pPr>
+            <a:lvl5pPr marL="1828800" algn="l" defTabSz="914400" rtl="0" eaLnBrk="1" latinLnBrk="0" hangingPunct="1">
+              <a:defRPr sz="1800" kern="1200">
+                <a:solidFill>
+                  <a:schemeClr val="tx1"/>
+                </a:solidFill>
+                <a:latin typeface="+mn-lt"/>
+                <a:ea typeface="+mn-ea"/>
+                <a:cs typeface="+mn-cs"/>
+              </a:defRPr>
+            </a:lvl5pPr>
+            <a:lvl6pPr marL="2286000" algn="l" defTabSz="914400" rtl="0" eaLnBrk="1" latinLnBrk="0" hangingPunct="1">
+              <a:defRPr sz="1800" kern="1200">
+                <a:solidFill>
+                  <a:schemeClr val="tx1"/>
+                </a:solidFill>
+                <a:latin typeface="+mn-lt"/>
+                <a:ea typeface="+mn-ea"/>
+                <a:cs typeface="+mn-cs"/>
+              </a:defRPr>
+            </a:lvl6pPr>
+            <a:lvl7pPr marL="2743200" algn="l" defTabSz="914400" rtl="0" eaLnBrk="1" latinLnBrk="0" hangingPunct="1">
+              <a:defRPr sz="1800" kern="1200">
+                <a:solidFill>
+                  <a:schemeClr val="tx1"/>
+                </a:solidFill>
+                <a:latin typeface="+mn-lt"/>
+                <a:ea typeface="+mn-ea"/>
+                <a:cs typeface="+mn-cs"/>
+              </a:defRPr>
+            </a:lvl7pPr>
+            <a:lvl8pPr marL="3200400" algn="l" defTabSz="914400" rtl="0" eaLnBrk="1" latinLnBrk="0" hangingPunct="1">
+              <a:defRPr sz="1800" kern="1200">
+                <a:solidFill>
+                  <a:schemeClr val="tx1"/>
+                </a:solidFill>
+                <a:latin typeface="+mn-lt"/>
+                <a:ea typeface="+mn-ea"/>
+                <a:cs typeface="+mn-cs"/>
+              </a:defRPr>
+            </a:lvl8pPr>
+            <a:lvl9pPr marL="3657600" algn="l" defTabSz="914400" rtl="0" eaLnBrk="1" latinLnBrk="0" hangingPunct="1">
+              <a:defRPr sz="1800" kern="1200">
+                <a:solidFill>
+                  <a:schemeClr val="tx1"/>
+                </a:solidFill>
+                <a:latin typeface="+mn-lt"/>
+                <a:ea typeface="+mn-ea"/>
+                <a:cs typeface="+mn-cs"/>
+              </a:defRPr>
+            </a:lvl9pPr>
+          </a:lstStyle>
+          <a:p>
+            <a:r>
+              <a:rPr lang="en-US" sz="900" dirty="0"/>
+              <a:t>1nsight</a:t>
+            </a:r>
+          </a:p>
+        </p:txBody>
+      </p:sp>
+      <p:sp>
+        <p:nvSpPr>
+          <p:cNvPr id="5" name="Footer Placeholder 11">
+            <a:extLst>
+              <a:ext uri="{FF2B5EF4-FFF2-40B4-BE49-F238E27FC236}">
+                <a16:creationId xmlns:a16="http://schemas.microsoft.com/office/drawing/2014/main" id="{DBDDFDF6-8C4C-92AD-70BD-D51ED7ADDDF4}"/>
+              </a:ext>
+            </a:extLst>
+          </p:cNvPr>
+          <p:cNvSpPr txBox="1">
+            <a:spLocks/>
+          </p:cNvSpPr>
+          <p:nvPr/>
+        </p:nvSpPr>
+        <p:spPr>
+          <a:xfrm>
+            <a:off x="6155823" y="6356350"/>
+            <a:ext cx="1808712" cy="365125"/>
+          </a:xfrm>
+          <a:prstGeom prst="rect">
+            <a:avLst/>
+          </a:prstGeom>
+        </p:spPr>
+        <p:txBody>
+          <a:bodyPr/>
+          <a:lstStyle>
+            <a:defPPr>
+              <a:defRPr lang="en-US"/>
+            </a:defPPr>
+            <a:lvl1pPr marL="0" algn="l" defTabSz="914400" rtl="0" eaLnBrk="1" latinLnBrk="0" hangingPunct="1">
+              <a:defRPr sz="1800" kern="1200">
+                <a:solidFill>
+                  <a:schemeClr val="tx1"/>
+                </a:solidFill>
+                <a:latin typeface="+mn-lt"/>
+                <a:ea typeface="+mn-ea"/>
+                <a:cs typeface="+mn-cs"/>
+              </a:defRPr>
+            </a:lvl1pPr>
+            <a:lvl2pPr marL="457200" algn="l" defTabSz="914400" rtl="0" eaLnBrk="1" latinLnBrk="0" hangingPunct="1">
+              <a:defRPr sz="1800" kern="1200">
+                <a:solidFill>
+                  <a:schemeClr val="tx1"/>
+                </a:solidFill>
+                <a:latin typeface="+mn-lt"/>
+                <a:ea typeface="+mn-ea"/>
+                <a:cs typeface="+mn-cs"/>
+              </a:defRPr>
+            </a:lvl2pPr>
+            <a:lvl3pPr marL="914400" algn="l" defTabSz="914400" rtl="0" eaLnBrk="1" latinLnBrk="0" hangingPunct="1">
+              <a:defRPr sz="1800" kern="1200">
+                <a:solidFill>
+                  <a:schemeClr val="tx1"/>
+                </a:solidFill>
+                <a:latin typeface="+mn-lt"/>
+                <a:ea typeface="+mn-ea"/>
+                <a:cs typeface="+mn-cs"/>
+              </a:defRPr>
+            </a:lvl3pPr>
+            <a:lvl4pPr marL="1371600" algn="l" defTabSz="914400" rtl="0" eaLnBrk="1" latinLnBrk="0" hangingPunct="1">
+              <a:defRPr sz="1800" kern="1200">
+                <a:solidFill>
+                  <a:schemeClr val="tx1"/>
+                </a:solidFill>
+                <a:latin typeface="+mn-lt"/>
+                <a:ea typeface="+mn-ea"/>
+                <a:cs typeface="+mn-cs"/>
+              </a:defRPr>
+            </a:lvl4pPr>
+            <a:lvl5pPr marL="1828800" algn="l" defTabSz="914400" rtl="0" eaLnBrk="1" latinLnBrk="0" hangingPunct="1">
+              <a:defRPr sz="1800" kern="1200">
+                <a:solidFill>
+                  <a:schemeClr val="tx1"/>
+                </a:solidFill>
+                <a:latin typeface="+mn-lt"/>
+                <a:ea typeface="+mn-ea"/>
+                <a:cs typeface="+mn-cs"/>
+              </a:defRPr>
+            </a:lvl5pPr>
+            <a:lvl6pPr marL="2286000" algn="l" defTabSz="914400" rtl="0" eaLnBrk="1" latinLnBrk="0" hangingPunct="1">
+              <a:defRPr sz="1800" kern="1200">
+                <a:solidFill>
+                  <a:schemeClr val="tx1"/>
+                </a:solidFill>
+                <a:latin typeface="+mn-lt"/>
+                <a:ea typeface="+mn-ea"/>
+                <a:cs typeface="+mn-cs"/>
+              </a:defRPr>
+            </a:lvl6pPr>
+            <a:lvl7pPr marL="2743200" algn="l" defTabSz="914400" rtl="0" eaLnBrk="1" latinLnBrk="0" hangingPunct="1">
+              <a:defRPr sz="1800" kern="1200">
+                <a:solidFill>
+                  <a:schemeClr val="tx1"/>
+                </a:solidFill>
+                <a:latin typeface="+mn-lt"/>
+                <a:ea typeface="+mn-ea"/>
+                <a:cs typeface="+mn-cs"/>
+              </a:defRPr>
+            </a:lvl7pPr>
+            <a:lvl8pPr marL="3200400" algn="l" defTabSz="914400" rtl="0" eaLnBrk="1" latinLnBrk="0" hangingPunct="1">
+              <a:defRPr sz="1800" kern="1200">
+                <a:solidFill>
+                  <a:schemeClr val="tx1"/>
+                </a:solidFill>
+                <a:latin typeface="+mn-lt"/>
+                <a:ea typeface="+mn-ea"/>
+                <a:cs typeface="+mn-cs"/>
+              </a:defRPr>
+            </a:lvl8pPr>
+            <a:lvl9pPr marL="3657600" algn="l" defTabSz="914400" rtl="0" eaLnBrk="1" latinLnBrk="0" hangingPunct="1">
+              <a:defRPr sz="1800" kern="1200">
+                <a:solidFill>
+                  <a:schemeClr val="tx1"/>
+                </a:solidFill>
+                <a:latin typeface="+mn-lt"/>
+                <a:ea typeface="+mn-ea"/>
+                <a:cs typeface="+mn-cs"/>
+              </a:defRPr>
+            </a:lvl9pPr>
+          </a:lstStyle>
+          <a:p>
+            <a:r>
+              <a:rPr lang="en-US" sz="900" dirty="0"/>
+              <a:t>DELIVERY PERFORMANCE</a:t>
+            </a:r>
+          </a:p>
+        </p:txBody>
+      </p:sp>
+      <p:sp>
+        <p:nvSpPr>
+          <p:cNvPr id="6" name="Slide Number Placeholder 12">
+            <a:extLst>
+              <a:ext uri="{FF2B5EF4-FFF2-40B4-BE49-F238E27FC236}">
+                <a16:creationId xmlns:a16="http://schemas.microsoft.com/office/drawing/2014/main" id="{BAB1A8FD-B59F-CCF0-8197-AC110A216F4A}"/>
+              </a:ext>
+            </a:extLst>
+          </p:cNvPr>
+          <p:cNvSpPr txBox="1">
+            <a:spLocks/>
+          </p:cNvSpPr>
+          <p:nvPr/>
+        </p:nvSpPr>
+        <p:spPr>
+          <a:xfrm>
+            <a:off x="10810874" y="6356350"/>
+            <a:ext cx="542925" cy="365125"/>
+          </a:xfrm>
+          <a:prstGeom prst="rect">
+            <a:avLst/>
+          </a:prstGeom>
+        </p:spPr>
+        <p:txBody>
+          <a:bodyPr/>
+          <a:lstStyle>
+            <a:defPPr>
+              <a:defRPr lang="en-US"/>
+            </a:defPPr>
+            <a:lvl1pPr marL="0" algn="l" defTabSz="914400" rtl="0" eaLnBrk="1" latinLnBrk="0" hangingPunct="1">
+              <a:defRPr sz="1800" kern="1200">
+                <a:solidFill>
+                  <a:schemeClr val="tx1"/>
+                </a:solidFill>
+                <a:latin typeface="+mn-lt"/>
+                <a:ea typeface="+mn-ea"/>
+                <a:cs typeface="+mn-cs"/>
+              </a:defRPr>
+            </a:lvl1pPr>
+            <a:lvl2pPr marL="457200" algn="l" defTabSz="914400" rtl="0" eaLnBrk="1" latinLnBrk="0" hangingPunct="1">
+              <a:defRPr sz="1800" kern="1200">
+                <a:solidFill>
+                  <a:schemeClr val="tx1"/>
+                </a:solidFill>
+                <a:latin typeface="+mn-lt"/>
+                <a:ea typeface="+mn-ea"/>
+                <a:cs typeface="+mn-cs"/>
+              </a:defRPr>
+            </a:lvl2pPr>
+            <a:lvl3pPr marL="914400" algn="l" defTabSz="914400" rtl="0" eaLnBrk="1" latinLnBrk="0" hangingPunct="1">
+              <a:defRPr sz="1800" kern="1200">
+                <a:solidFill>
+                  <a:schemeClr val="tx1"/>
+                </a:solidFill>
+                <a:latin typeface="+mn-lt"/>
+                <a:ea typeface="+mn-ea"/>
+                <a:cs typeface="+mn-cs"/>
+              </a:defRPr>
+            </a:lvl3pPr>
+            <a:lvl4pPr marL="1371600" algn="l" defTabSz="914400" rtl="0" eaLnBrk="1" latinLnBrk="0" hangingPunct="1">
+              <a:defRPr sz="1800" kern="1200">
+                <a:solidFill>
+                  <a:schemeClr val="tx1"/>
+                </a:solidFill>
+                <a:latin typeface="+mn-lt"/>
+                <a:ea typeface="+mn-ea"/>
+                <a:cs typeface="+mn-cs"/>
+              </a:defRPr>
+            </a:lvl4pPr>
+            <a:lvl5pPr marL="1828800" algn="l" defTabSz="914400" rtl="0" eaLnBrk="1" latinLnBrk="0" hangingPunct="1">
+              <a:defRPr sz="1800" kern="1200">
+                <a:solidFill>
+                  <a:schemeClr val="tx1"/>
+                </a:solidFill>
+                <a:latin typeface="+mn-lt"/>
+                <a:ea typeface="+mn-ea"/>
+                <a:cs typeface="+mn-cs"/>
+              </a:defRPr>
+            </a:lvl5pPr>
+            <a:lvl6pPr marL="2286000" algn="l" defTabSz="914400" rtl="0" eaLnBrk="1" latinLnBrk="0" hangingPunct="1">
+              <a:defRPr sz="1800" kern="1200">
+                <a:solidFill>
+                  <a:schemeClr val="tx1"/>
+                </a:solidFill>
+                <a:latin typeface="+mn-lt"/>
+                <a:ea typeface="+mn-ea"/>
+                <a:cs typeface="+mn-cs"/>
+              </a:defRPr>
+            </a:lvl6pPr>
+            <a:lvl7pPr marL="2743200" algn="l" defTabSz="914400" rtl="0" eaLnBrk="1" latinLnBrk="0" hangingPunct="1">
+              <a:defRPr sz="1800" kern="1200">
+                <a:solidFill>
+                  <a:schemeClr val="tx1"/>
+                </a:solidFill>
+                <a:latin typeface="+mn-lt"/>
+                <a:ea typeface="+mn-ea"/>
+                <a:cs typeface="+mn-cs"/>
+              </a:defRPr>
+            </a:lvl7pPr>
+            <a:lvl8pPr marL="3200400" algn="l" defTabSz="914400" rtl="0" eaLnBrk="1" latinLnBrk="0" hangingPunct="1">
+              <a:defRPr sz="1800" kern="1200">
+                <a:solidFill>
+                  <a:schemeClr val="tx1"/>
+                </a:solidFill>
+                <a:latin typeface="+mn-lt"/>
+                <a:ea typeface="+mn-ea"/>
+                <a:cs typeface="+mn-cs"/>
+              </a:defRPr>
+            </a:lvl8pPr>
+            <a:lvl9pPr marL="3657600" algn="l" defTabSz="914400" rtl="0" eaLnBrk="1" latinLnBrk="0" hangingPunct="1">
+              <a:defRPr sz="1800" kern="1200">
+                <a:solidFill>
+                  <a:schemeClr val="tx1"/>
+                </a:solidFill>
+                <a:latin typeface="+mn-lt"/>
+                <a:ea typeface="+mn-ea"/>
+                <a:cs typeface="+mn-cs"/>
+              </a:defRPr>
+            </a:lvl9pPr>
+          </a:lstStyle>
+          <a:p>
+            <a:fld id="{B5CEABB6-07DC-46E8-9B57-56EC44A396E5}" type="slidenum">
+              <a:rPr lang="en-US" sz="900" smtClean="0"/>
+              <a:pPr/>
+              <a:t>11</a:t>
+            </a:fld>
+            <a:endParaRPr lang="en-US" sz="900" dirty="0"/>
+          </a:p>
+        </p:txBody>
+      </p:sp>
+    </p:spTree>
+    <p:extLst>
+      <p:ext uri="{BB962C8B-B14F-4D97-AF65-F5344CB8AC3E}">
+        <p14:creationId xmlns:p14="http://schemas.microsoft.com/office/powerpoint/2010/main" val="3566629918"/>
+      </p:ext>
+    </p:extLst>
+  </p:cSld>
+  <p:clrMapOvr>
+    <a:masterClrMapping/>
+  </p:clrMapOvr>
+</p:sld>
+</file>
+
+<file path=ppt/slides/slide12.xml><?xml version="1.0" encoding="utf-8"?>
+<p:sld xmlns:a="http://schemas.openxmlformats.org/drawingml/2006/main" xmlns:r="http://schemas.openxmlformats.org/officeDocument/2006/relationships" xmlns:p="http://schemas.openxmlformats.org/presentationml/2006/main">
+  <p:cSld>
+    <p:spTree>
+      <p:nvGrpSpPr>
         <p:cNvPr id="1" name=""/>
         <p:cNvGrpSpPr/>
         <p:nvPr/>
@@ -19405,6 +20015,2678 @@
           <a:chExt cx="0" cy="0"/>
         </a:xfrm>
       </p:grpSpPr>
+      <p:pic>
+        <p:nvPicPr>
+          <p:cNvPr id="31" name="Picture 30">
+            <a:extLst>
+              <a:ext uri="{FF2B5EF4-FFF2-40B4-BE49-F238E27FC236}">
+                <a16:creationId xmlns:a16="http://schemas.microsoft.com/office/drawing/2014/main" id="{0CCE44BD-5945-188D-9A28-9DA7BCA38187}"/>
+              </a:ext>
+            </a:extLst>
+          </p:cNvPr>
+          <p:cNvPicPr>
+            <a:picLocks noChangeAspect="1"/>
+          </p:cNvPicPr>
+          <p:nvPr/>
+        </p:nvPicPr>
+        <p:blipFill>
+          <a:blip r:embed="rId2"/>
+          <a:stretch>
+            <a:fillRect/>
+          </a:stretch>
+        </p:blipFill>
+        <p:spPr>
+          <a:xfrm>
+            <a:off x="838201" y="566211"/>
+            <a:ext cx="10298372" cy="5036195"/>
+          </a:xfrm>
+          <a:prstGeom prst="rect">
+            <a:avLst/>
+          </a:prstGeom>
+        </p:spPr>
+      </p:pic>
+      <p:sp>
+        <p:nvSpPr>
+          <p:cNvPr id="2" name="Title 1">
+            <a:extLst>
+              <a:ext uri="{FF2B5EF4-FFF2-40B4-BE49-F238E27FC236}">
+                <a16:creationId xmlns:a16="http://schemas.microsoft.com/office/drawing/2014/main" id="{75031FE9-9059-4FE8-B4AC-9771F23A1B89}"/>
+              </a:ext>
+            </a:extLst>
+          </p:cNvPr>
+          <p:cNvSpPr>
+            <a:spLocks noGrp="1"/>
+          </p:cNvSpPr>
+          <p:nvPr>
+            <p:ph type="title"/>
+          </p:nvPr>
+        </p:nvSpPr>
+        <p:spPr>
+          <a:xfrm>
+            <a:off x="401473" y="201086"/>
+            <a:ext cx="10952326" cy="929779"/>
+          </a:xfrm>
+        </p:spPr>
+        <p:txBody>
+          <a:bodyPr/>
+          <a:lstStyle/>
+          <a:p>
+            <a:r>
+              <a:rPr lang="en-US" dirty="0"/>
+              <a:t>Customer Review Scores can be significantly improved by reducing Actual Delivery Times…</a:t>
+            </a:r>
+          </a:p>
+        </p:txBody>
+      </p:sp>
+      <p:sp>
+        <p:nvSpPr>
+          <p:cNvPr id="29" name="Text Placeholder 28">
+            <a:extLst>
+              <a:ext uri="{FF2B5EF4-FFF2-40B4-BE49-F238E27FC236}">
+                <a16:creationId xmlns:a16="http://schemas.microsoft.com/office/drawing/2014/main" id="{751FB17E-9A26-76C5-FB3D-2ED2297C28C4}"/>
+              </a:ext>
+            </a:extLst>
+          </p:cNvPr>
+          <p:cNvSpPr>
+            <a:spLocks noGrp="1"/>
+          </p:cNvSpPr>
+          <p:nvPr>
+            <p:ph type="body" sz="quarter" idx="28"/>
+          </p:nvPr>
+        </p:nvSpPr>
+        <p:spPr>
+          <a:xfrm>
+            <a:off x="838201" y="5602406"/>
+            <a:ext cx="10550420" cy="753944"/>
+          </a:xfrm>
+        </p:spPr>
+        <p:txBody>
+          <a:bodyPr/>
+          <a:lstStyle/>
+          <a:p>
+            <a:r>
+              <a:rPr lang="en-SG" dirty="0"/>
+              <a:t>Customer Review Scores are negatively-correlated with the Actual Delivery Time, which varies from city to city. Rio De Janeiro is the most sensitive to reductions in Delivery Time, followed by </a:t>
+            </a:r>
+            <a:r>
+              <a:rPr lang="en-SG" dirty="0" err="1"/>
+              <a:t>Brasillia</a:t>
+            </a:r>
+            <a:r>
+              <a:rPr lang="en-SG" dirty="0"/>
+              <a:t>, Belo Horizonte, </a:t>
+            </a:r>
+            <a:r>
+              <a:rPr lang="en-SG" dirty="0" err="1"/>
+              <a:t>Curibata</a:t>
+            </a:r>
+            <a:r>
+              <a:rPr lang="en-SG" dirty="0"/>
+              <a:t>, and Sao Paulo.</a:t>
+            </a:r>
+          </a:p>
+        </p:txBody>
+      </p:sp>
+      <p:sp>
+        <p:nvSpPr>
+          <p:cNvPr id="3" name="Date Placeholder 10">
+            <a:extLst>
+              <a:ext uri="{FF2B5EF4-FFF2-40B4-BE49-F238E27FC236}">
+                <a16:creationId xmlns:a16="http://schemas.microsoft.com/office/drawing/2014/main" id="{1DF3594B-EFB5-14C1-CAA0-3B0428B55DE0}"/>
+              </a:ext>
+            </a:extLst>
+          </p:cNvPr>
+          <p:cNvSpPr txBox="1">
+            <a:spLocks/>
+          </p:cNvSpPr>
+          <p:nvPr/>
+        </p:nvSpPr>
+        <p:spPr>
+          <a:xfrm>
+            <a:off x="838200" y="6356350"/>
+            <a:ext cx="2743200" cy="365125"/>
+          </a:xfrm>
+          <a:prstGeom prst="rect">
+            <a:avLst/>
+          </a:prstGeom>
+        </p:spPr>
+        <p:txBody>
+          <a:bodyPr/>
+          <a:lstStyle>
+            <a:defPPr>
+              <a:defRPr lang="en-US"/>
+            </a:defPPr>
+            <a:lvl1pPr marL="0" algn="l" defTabSz="914400" rtl="0" eaLnBrk="1" latinLnBrk="0" hangingPunct="1">
+              <a:defRPr sz="1800" kern="1200">
+                <a:solidFill>
+                  <a:schemeClr val="tx1"/>
+                </a:solidFill>
+                <a:latin typeface="+mn-lt"/>
+                <a:ea typeface="+mn-ea"/>
+                <a:cs typeface="+mn-cs"/>
+              </a:defRPr>
+            </a:lvl1pPr>
+            <a:lvl2pPr marL="457200" algn="l" defTabSz="914400" rtl="0" eaLnBrk="1" latinLnBrk="0" hangingPunct="1">
+              <a:defRPr sz="1800" kern="1200">
+                <a:solidFill>
+                  <a:schemeClr val="tx1"/>
+                </a:solidFill>
+                <a:latin typeface="+mn-lt"/>
+                <a:ea typeface="+mn-ea"/>
+                <a:cs typeface="+mn-cs"/>
+              </a:defRPr>
+            </a:lvl2pPr>
+            <a:lvl3pPr marL="914400" algn="l" defTabSz="914400" rtl="0" eaLnBrk="1" latinLnBrk="0" hangingPunct="1">
+              <a:defRPr sz="1800" kern="1200">
+                <a:solidFill>
+                  <a:schemeClr val="tx1"/>
+                </a:solidFill>
+                <a:latin typeface="+mn-lt"/>
+                <a:ea typeface="+mn-ea"/>
+                <a:cs typeface="+mn-cs"/>
+              </a:defRPr>
+            </a:lvl3pPr>
+            <a:lvl4pPr marL="1371600" algn="l" defTabSz="914400" rtl="0" eaLnBrk="1" latinLnBrk="0" hangingPunct="1">
+              <a:defRPr sz="1800" kern="1200">
+                <a:solidFill>
+                  <a:schemeClr val="tx1"/>
+                </a:solidFill>
+                <a:latin typeface="+mn-lt"/>
+                <a:ea typeface="+mn-ea"/>
+                <a:cs typeface="+mn-cs"/>
+              </a:defRPr>
+            </a:lvl4pPr>
+            <a:lvl5pPr marL="1828800" algn="l" defTabSz="914400" rtl="0" eaLnBrk="1" latinLnBrk="0" hangingPunct="1">
+              <a:defRPr sz="1800" kern="1200">
+                <a:solidFill>
+                  <a:schemeClr val="tx1"/>
+                </a:solidFill>
+                <a:latin typeface="+mn-lt"/>
+                <a:ea typeface="+mn-ea"/>
+                <a:cs typeface="+mn-cs"/>
+              </a:defRPr>
+            </a:lvl5pPr>
+            <a:lvl6pPr marL="2286000" algn="l" defTabSz="914400" rtl="0" eaLnBrk="1" latinLnBrk="0" hangingPunct="1">
+              <a:defRPr sz="1800" kern="1200">
+                <a:solidFill>
+                  <a:schemeClr val="tx1"/>
+                </a:solidFill>
+                <a:latin typeface="+mn-lt"/>
+                <a:ea typeface="+mn-ea"/>
+                <a:cs typeface="+mn-cs"/>
+              </a:defRPr>
+            </a:lvl6pPr>
+            <a:lvl7pPr marL="2743200" algn="l" defTabSz="914400" rtl="0" eaLnBrk="1" latinLnBrk="0" hangingPunct="1">
+              <a:defRPr sz="1800" kern="1200">
+                <a:solidFill>
+                  <a:schemeClr val="tx1"/>
+                </a:solidFill>
+                <a:latin typeface="+mn-lt"/>
+                <a:ea typeface="+mn-ea"/>
+                <a:cs typeface="+mn-cs"/>
+              </a:defRPr>
+            </a:lvl7pPr>
+            <a:lvl8pPr marL="3200400" algn="l" defTabSz="914400" rtl="0" eaLnBrk="1" latinLnBrk="0" hangingPunct="1">
+              <a:defRPr sz="1800" kern="1200">
+                <a:solidFill>
+                  <a:schemeClr val="tx1"/>
+                </a:solidFill>
+                <a:latin typeface="+mn-lt"/>
+                <a:ea typeface="+mn-ea"/>
+                <a:cs typeface="+mn-cs"/>
+              </a:defRPr>
+            </a:lvl8pPr>
+            <a:lvl9pPr marL="3657600" algn="l" defTabSz="914400" rtl="0" eaLnBrk="1" latinLnBrk="0" hangingPunct="1">
+              <a:defRPr sz="1800" kern="1200">
+                <a:solidFill>
+                  <a:schemeClr val="tx1"/>
+                </a:solidFill>
+                <a:latin typeface="+mn-lt"/>
+                <a:ea typeface="+mn-ea"/>
+                <a:cs typeface="+mn-cs"/>
+              </a:defRPr>
+            </a:lvl9pPr>
+          </a:lstStyle>
+          <a:p>
+            <a:r>
+              <a:rPr lang="en-US" sz="900" dirty="0"/>
+              <a:t>1nsight</a:t>
+            </a:r>
+          </a:p>
+        </p:txBody>
+      </p:sp>
+      <p:sp>
+        <p:nvSpPr>
+          <p:cNvPr id="4" name="Footer Placeholder 11">
+            <a:extLst>
+              <a:ext uri="{FF2B5EF4-FFF2-40B4-BE49-F238E27FC236}">
+                <a16:creationId xmlns:a16="http://schemas.microsoft.com/office/drawing/2014/main" id="{417A3E7C-6238-93C9-8FF4-F14DEF495BF3}"/>
+              </a:ext>
+            </a:extLst>
+          </p:cNvPr>
+          <p:cNvSpPr txBox="1">
+            <a:spLocks/>
+          </p:cNvSpPr>
+          <p:nvPr/>
+        </p:nvSpPr>
+        <p:spPr>
+          <a:xfrm>
+            <a:off x="6155823" y="6356350"/>
+            <a:ext cx="1808712" cy="365125"/>
+          </a:xfrm>
+          <a:prstGeom prst="rect">
+            <a:avLst/>
+          </a:prstGeom>
+        </p:spPr>
+        <p:txBody>
+          <a:bodyPr/>
+          <a:lstStyle>
+            <a:defPPr>
+              <a:defRPr lang="en-US"/>
+            </a:defPPr>
+            <a:lvl1pPr marL="0" algn="l" defTabSz="914400" rtl="0" eaLnBrk="1" latinLnBrk="0" hangingPunct="1">
+              <a:defRPr sz="1800" kern="1200">
+                <a:solidFill>
+                  <a:schemeClr val="tx1"/>
+                </a:solidFill>
+                <a:latin typeface="+mn-lt"/>
+                <a:ea typeface="+mn-ea"/>
+                <a:cs typeface="+mn-cs"/>
+              </a:defRPr>
+            </a:lvl1pPr>
+            <a:lvl2pPr marL="457200" algn="l" defTabSz="914400" rtl="0" eaLnBrk="1" latinLnBrk="0" hangingPunct="1">
+              <a:defRPr sz="1800" kern="1200">
+                <a:solidFill>
+                  <a:schemeClr val="tx1"/>
+                </a:solidFill>
+                <a:latin typeface="+mn-lt"/>
+                <a:ea typeface="+mn-ea"/>
+                <a:cs typeface="+mn-cs"/>
+              </a:defRPr>
+            </a:lvl2pPr>
+            <a:lvl3pPr marL="914400" algn="l" defTabSz="914400" rtl="0" eaLnBrk="1" latinLnBrk="0" hangingPunct="1">
+              <a:defRPr sz="1800" kern="1200">
+                <a:solidFill>
+                  <a:schemeClr val="tx1"/>
+                </a:solidFill>
+                <a:latin typeface="+mn-lt"/>
+                <a:ea typeface="+mn-ea"/>
+                <a:cs typeface="+mn-cs"/>
+              </a:defRPr>
+            </a:lvl3pPr>
+            <a:lvl4pPr marL="1371600" algn="l" defTabSz="914400" rtl="0" eaLnBrk="1" latinLnBrk="0" hangingPunct="1">
+              <a:defRPr sz="1800" kern="1200">
+                <a:solidFill>
+                  <a:schemeClr val="tx1"/>
+                </a:solidFill>
+                <a:latin typeface="+mn-lt"/>
+                <a:ea typeface="+mn-ea"/>
+                <a:cs typeface="+mn-cs"/>
+              </a:defRPr>
+            </a:lvl4pPr>
+            <a:lvl5pPr marL="1828800" algn="l" defTabSz="914400" rtl="0" eaLnBrk="1" latinLnBrk="0" hangingPunct="1">
+              <a:defRPr sz="1800" kern="1200">
+                <a:solidFill>
+                  <a:schemeClr val="tx1"/>
+                </a:solidFill>
+                <a:latin typeface="+mn-lt"/>
+                <a:ea typeface="+mn-ea"/>
+                <a:cs typeface="+mn-cs"/>
+              </a:defRPr>
+            </a:lvl5pPr>
+            <a:lvl6pPr marL="2286000" algn="l" defTabSz="914400" rtl="0" eaLnBrk="1" latinLnBrk="0" hangingPunct="1">
+              <a:defRPr sz="1800" kern="1200">
+                <a:solidFill>
+                  <a:schemeClr val="tx1"/>
+                </a:solidFill>
+                <a:latin typeface="+mn-lt"/>
+                <a:ea typeface="+mn-ea"/>
+                <a:cs typeface="+mn-cs"/>
+              </a:defRPr>
+            </a:lvl6pPr>
+            <a:lvl7pPr marL="2743200" algn="l" defTabSz="914400" rtl="0" eaLnBrk="1" latinLnBrk="0" hangingPunct="1">
+              <a:defRPr sz="1800" kern="1200">
+                <a:solidFill>
+                  <a:schemeClr val="tx1"/>
+                </a:solidFill>
+                <a:latin typeface="+mn-lt"/>
+                <a:ea typeface="+mn-ea"/>
+                <a:cs typeface="+mn-cs"/>
+              </a:defRPr>
+            </a:lvl7pPr>
+            <a:lvl8pPr marL="3200400" algn="l" defTabSz="914400" rtl="0" eaLnBrk="1" latinLnBrk="0" hangingPunct="1">
+              <a:defRPr sz="1800" kern="1200">
+                <a:solidFill>
+                  <a:schemeClr val="tx1"/>
+                </a:solidFill>
+                <a:latin typeface="+mn-lt"/>
+                <a:ea typeface="+mn-ea"/>
+                <a:cs typeface="+mn-cs"/>
+              </a:defRPr>
+            </a:lvl8pPr>
+            <a:lvl9pPr marL="3657600" algn="l" defTabSz="914400" rtl="0" eaLnBrk="1" latinLnBrk="0" hangingPunct="1">
+              <a:defRPr sz="1800" kern="1200">
+                <a:solidFill>
+                  <a:schemeClr val="tx1"/>
+                </a:solidFill>
+                <a:latin typeface="+mn-lt"/>
+                <a:ea typeface="+mn-ea"/>
+                <a:cs typeface="+mn-cs"/>
+              </a:defRPr>
+            </a:lvl9pPr>
+          </a:lstStyle>
+          <a:p>
+            <a:r>
+              <a:rPr lang="en-US" sz="900" dirty="0"/>
+              <a:t>DELIVERY PERFORMANCE</a:t>
+            </a:r>
+          </a:p>
+        </p:txBody>
+      </p:sp>
+      <p:sp>
+        <p:nvSpPr>
+          <p:cNvPr id="5" name="Slide Number Placeholder 12">
+            <a:extLst>
+              <a:ext uri="{FF2B5EF4-FFF2-40B4-BE49-F238E27FC236}">
+                <a16:creationId xmlns:a16="http://schemas.microsoft.com/office/drawing/2014/main" id="{E2069B56-883C-ECC9-CAB1-A9263420F49E}"/>
+              </a:ext>
+            </a:extLst>
+          </p:cNvPr>
+          <p:cNvSpPr txBox="1">
+            <a:spLocks/>
+          </p:cNvSpPr>
+          <p:nvPr/>
+        </p:nvSpPr>
+        <p:spPr>
+          <a:xfrm>
+            <a:off x="10810874" y="6356350"/>
+            <a:ext cx="542925" cy="365125"/>
+          </a:xfrm>
+          <a:prstGeom prst="rect">
+            <a:avLst/>
+          </a:prstGeom>
+        </p:spPr>
+        <p:txBody>
+          <a:bodyPr/>
+          <a:lstStyle>
+            <a:defPPr>
+              <a:defRPr lang="en-US"/>
+            </a:defPPr>
+            <a:lvl1pPr marL="0" algn="l" defTabSz="914400" rtl="0" eaLnBrk="1" latinLnBrk="0" hangingPunct="1">
+              <a:defRPr sz="1800" kern="1200">
+                <a:solidFill>
+                  <a:schemeClr val="tx1"/>
+                </a:solidFill>
+                <a:latin typeface="+mn-lt"/>
+                <a:ea typeface="+mn-ea"/>
+                <a:cs typeface="+mn-cs"/>
+              </a:defRPr>
+            </a:lvl1pPr>
+            <a:lvl2pPr marL="457200" algn="l" defTabSz="914400" rtl="0" eaLnBrk="1" latinLnBrk="0" hangingPunct="1">
+              <a:defRPr sz="1800" kern="1200">
+                <a:solidFill>
+                  <a:schemeClr val="tx1"/>
+                </a:solidFill>
+                <a:latin typeface="+mn-lt"/>
+                <a:ea typeface="+mn-ea"/>
+                <a:cs typeface="+mn-cs"/>
+              </a:defRPr>
+            </a:lvl2pPr>
+            <a:lvl3pPr marL="914400" algn="l" defTabSz="914400" rtl="0" eaLnBrk="1" latinLnBrk="0" hangingPunct="1">
+              <a:defRPr sz="1800" kern="1200">
+                <a:solidFill>
+                  <a:schemeClr val="tx1"/>
+                </a:solidFill>
+                <a:latin typeface="+mn-lt"/>
+                <a:ea typeface="+mn-ea"/>
+                <a:cs typeface="+mn-cs"/>
+              </a:defRPr>
+            </a:lvl3pPr>
+            <a:lvl4pPr marL="1371600" algn="l" defTabSz="914400" rtl="0" eaLnBrk="1" latinLnBrk="0" hangingPunct="1">
+              <a:defRPr sz="1800" kern="1200">
+                <a:solidFill>
+                  <a:schemeClr val="tx1"/>
+                </a:solidFill>
+                <a:latin typeface="+mn-lt"/>
+                <a:ea typeface="+mn-ea"/>
+                <a:cs typeface="+mn-cs"/>
+              </a:defRPr>
+            </a:lvl4pPr>
+            <a:lvl5pPr marL="1828800" algn="l" defTabSz="914400" rtl="0" eaLnBrk="1" latinLnBrk="0" hangingPunct="1">
+              <a:defRPr sz="1800" kern="1200">
+                <a:solidFill>
+                  <a:schemeClr val="tx1"/>
+                </a:solidFill>
+                <a:latin typeface="+mn-lt"/>
+                <a:ea typeface="+mn-ea"/>
+                <a:cs typeface="+mn-cs"/>
+              </a:defRPr>
+            </a:lvl5pPr>
+            <a:lvl6pPr marL="2286000" algn="l" defTabSz="914400" rtl="0" eaLnBrk="1" latinLnBrk="0" hangingPunct="1">
+              <a:defRPr sz="1800" kern="1200">
+                <a:solidFill>
+                  <a:schemeClr val="tx1"/>
+                </a:solidFill>
+                <a:latin typeface="+mn-lt"/>
+                <a:ea typeface="+mn-ea"/>
+                <a:cs typeface="+mn-cs"/>
+              </a:defRPr>
+            </a:lvl6pPr>
+            <a:lvl7pPr marL="2743200" algn="l" defTabSz="914400" rtl="0" eaLnBrk="1" latinLnBrk="0" hangingPunct="1">
+              <a:defRPr sz="1800" kern="1200">
+                <a:solidFill>
+                  <a:schemeClr val="tx1"/>
+                </a:solidFill>
+                <a:latin typeface="+mn-lt"/>
+                <a:ea typeface="+mn-ea"/>
+                <a:cs typeface="+mn-cs"/>
+              </a:defRPr>
+            </a:lvl7pPr>
+            <a:lvl8pPr marL="3200400" algn="l" defTabSz="914400" rtl="0" eaLnBrk="1" latinLnBrk="0" hangingPunct="1">
+              <a:defRPr sz="1800" kern="1200">
+                <a:solidFill>
+                  <a:schemeClr val="tx1"/>
+                </a:solidFill>
+                <a:latin typeface="+mn-lt"/>
+                <a:ea typeface="+mn-ea"/>
+                <a:cs typeface="+mn-cs"/>
+              </a:defRPr>
+            </a:lvl8pPr>
+            <a:lvl9pPr marL="3657600" algn="l" defTabSz="914400" rtl="0" eaLnBrk="1" latinLnBrk="0" hangingPunct="1">
+              <a:defRPr sz="1800" kern="1200">
+                <a:solidFill>
+                  <a:schemeClr val="tx1"/>
+                </a:solidFill>
+                <a:latin typeface="+mn-lt"/>
+                <a:ea typeface="+mn-ea"/>
+                <a:cs typeface="+mn-cs"/>
+              </a:defRPr>
+            </a:lvl9pPr>
+          </a:lstStyle>
+          <a:p>
+            <a:fld id="{B5CEABB6-07DC-46E8-9B57-56EC44A396E5}" type="slidenum">
+              <a:rPr lang="en-US" sz="900" smtClean="0"/>
+              <a:pPr/>
+              <a:t>12</a:t>
+            </a:fld>
+            <a:endParaRPr lang="en-US" sz="900" dirty="0"/>
+          </a:p>
+        </p:txBody>
+      </p:sp>
+    </p:spTree>
+    <p:extLst>
+      <p:ext uri="{BB962C8B-B14F-4D97-AF65-F5344CB8AC3E}">
+        <p14:creationId xmlns:p14="http://schemas.microsoft.com/office/powerpoint/2010/main" val="1844941827"/>
+      </p:ext>
+    </p:extLst>
+  </p:cSld>
+  <p:clrMapOvr>
+    <a:masterClrMapping/>
+  </p:clrMapOvr>
+</p:sld>
+</file>
+
+<file path=ppt/slides/slide13.xml><?xml version="1.0" encoding="utf-8"?>
+<p:sld xmlns:a="http://schemas.openxmlformats.org/drawingml/2006/main" xmlns:r="http://schemas.openxmlformats.org/officeDocument/2006/relationships" xmlns:p="http://schemas.openxmlformats.org/presentationml/2006/main">
+  <p:cSld>
+    <p:spTree>
+      <p:nvGrpSpPr>
+        <p:cNvPr id="1" name="">
+          <a:extLst>
+            <a:ext uri="{FF2B5EF4-FFF2-40B4-BE49-F238E27FC236}">
+              <a16:creationId xmlns:a16="http://schemas.microsoft.com/office/drawing/2014/main" id="{D29AE1C3-B935-A5EF-4E75-7E1F729553AD}"/>
+            </a:ext>
+          </a:extLst>
+        </p:cNvPr>
+        <p:cNvGrpSpPr/>
+        <p:nvPr/>
+      </p:nvGrpSpPr>
+      <p:grpSpPr>
+        <a:xfrm>
+          <a:off x="0" y="0"/>
+          <a:ext cx="0" cy="0"/>
+          <a:chOff x="0" y="0"/>
+          <a:chExt cx="0" cy="0"/>
+        </a:xfrm>
+      </p:grpSpPr>
+      <p:sp>
+        <p:nvSpPr>
+          <p:cNvPr id="2" name="Title 1">
+            <a:extLst>
+              <a:ext uri="{FF2B5EF4-FFF2-40B4-BE49-F238E27FC236}">
+                <a16:creationId xmlns:a16="http://schemas.microsoft.com/office/drawing/2014/main" id="{E6BC94DD-7081-5807-DEC7-E3CFDA0B04F1}"/>
+              </a:ext>
+            </a:extLst>
+          </p:cNvPr>
+          <p:cNvSpPr>
+            <a:spLocks noGrp="1"/>
+          </p:cNvSpPr>
+          <p:nvPr>
+            <p:ph type="title"/>
+          </p:nvPr>
+        </p:nvSpPr>
+        <p:spPr>
+          <a:xfrm>
+            <a:off x="401473" y="201086"/>
+            <a:ext cx="10952326" cy="929779"/>
+          </a:xfrm>
+        </p:spPr>
+        <p:txBody>
+          <a:bodyPr/>
+          <a:lstStyle/>
+          <a:p>
+            <a:r>
+              <a:rPr lang="en-US" dirty="0"/>
+              <a:t>Recommended Interventions</a:t>
+            </a:r>
+          </a:p>
+        </p:txBody>
+      </p:sp>
+      <p:sp>
+        <p:nvSpPr>
+          <p:cNvPr id="29" name="Text Placeholder 28">
+            <a:extLst>
+              <a:ext uri="{FF2B5EF4-FFF2-40B4-BE49-F238E27FC236}">
+                <a16:creationId xmlns:a16="http://schemas.microsoft.com/office/drawing/2014/main" id="{64394A7B-1B2E-983F-726C-458678381BB9}"/>
+              </a:ext>
+            </a:extLst>
+          </p:cNvPr>
+          <p:cNvSpPr>
+            <a:spLocks noGrp="1"/>
+          </p:cNvSpPr>
+          <p:nvPr>
+            <p:ph type="body" sz="quarter" idx="28"/>
+          </p:nvPr>
+        </p:nvSpPr>
+        <p:spPr>
+          <a:xfrm>
+            <a:off x="838201" y="5602406"/>
+            <a:ext cx="10550420" cy="753944"/>
+          </a:xfrm>
+        </p:spPr>
+        <p:txBody>
+          <a:bodyPr/>
+          <a:lstStyle/>
+          <a:p>
+            <a:r>
+              <a:rPr lang="en-SG" dirty="0"/>
+              <a:t>Use Gemini to generate some suggestions on interventions that can be made to significantly reduce actual delivery times by bringing Sellers closer to Buyers in each market.</a:t>
+            </a:r>
+          </a:p>
+        </p:txBody>
+      </p:sp>
+      <p:sp>
+        <p:nvSpPr>
+          <p:cNvPr id="3" name="Date Placeholder 10">
+            <a:extLst>
+              <a:ext uri="{FF2B5EF4-FFF2-40B4-BE49-F238E27FC236}">
+                <a16:creationId xmlns:a16="http://schemas.microsoft.com/office/drawing/2014/main" id="{9C58F326-3701-7797-6B91-2558B446302A}"/>
+              </a:ext>
+            </a:extLst>
+          </p:cNvPr>
+          <p:cNvSpPr txBox="1">
+            <a:spLocks/>
+          </p:cNvSpPr>
+          <p:nvPr/>
+        </p:nvSpPr>
+        <p:spPr>
+          <a:xfrm>
+            <a:off x="838200" y="6356350"/>
+            <a:ext cx="2743200" cy="365125"/>
+          </a:xfrm>
+          <a:prstGeom prst="rect">
+            <a:avLst/>
+          </a:prstGeom>
+        </p:spPr>
+        <p:txBody>
+          <a:bodyPr/>
+          <a:lstStyle>
+            <a:defPPr>
+              <a:defRPr lang="en-US"/>
+            </a:defPPr>
+            <a:lvl1pPr marL="0" algn="l" defTabSz="914400" rtl="0" eaLnBrk="1" latinLnBrk="0" hangingPunct="1">
+              <a:defRPr sz="1800" kern="1200">
+                <a:solidFill>
+                  <a:schemeClr val="tx1"/>
+                </a:solidFill>
+                <a:latin typeface="+mn-lt"/>
+                <a:ea typeface="+mn-ea"/>
+                <a:cs typeface="+mn-cs"/>
+              </a:defRPr>
+            </a:lvl1pPr>
+            <a:lvl2pPr marL="457200" algn="l" defTabSz="914400" rtl="0" eaLnBrk="1" latinLnBrk="0" hangingPunct="1">
+              <a:defRPr sz="1800" kern="1200">
+                <a:solidFill>
+                  <a:schemeClr val="tx1"/>
+                </a:solidFill>
+                <a:latin typeface="+mn-lt"/>
+                <a:ea typeface="+mn-ea"/>
+                <a:cs typeface="+mn-cs"/>
+              </a:defRPr>
+            </a:lvl2pPr>
+            <a:lvl3pPr marL="914400" algn="l" defTabSz="914400" rtl="0" eaLnBrk="1" latinLnBrk="0" hangingPunct="1">
+              <a:defRPr sz="1800" kern="1200">
+                <a:solidFill>
+                  <a:schemeClr val="tx1"/>
+                </a:solidFill>
+                <a:latin typeface="+mn-lt"/>
+                <a:ea typeface="+mn-ea"/>
+                <a:cs typeface="+mn-cs"/>
+              </a:defRPr>
+            </a:lvl3pPr>
+            <a:lvl4pPr marL="1371600" algn="l" defTabSz="914400" rtl="0" eaLnBrk="1" latinLnBrk="0" hangingPunct="1">
+              <a:defRPr sz="1800" kern="1200">
+                <a:solidFill>
+                  <a:schemeClr val="tx1"/>
+                </a:solidFill>
+                <a:latin typeface="+mn-lt"/>
+                <a:ea typeface="+mn-ea"/>
+                <a:cs typeface="+mn-cs"/>
+              </a:defRPr>
+            </a:lvl4pPr>
+            <a:lvl5pPr marL="1828800" algn="l" defTabSz="914400" rtl="0" eaLnBrk="1" latinLnBrk="0" hangingPunct="1">
+              <a:defRPr sz="1800" kern="1200">
+                <a:solidFill>
+                  <a:schemeClr val="tx1"/>
+                </a:solidFill>
+                <a:latin typeface="+mn-lt"/>
+                <a:ea typeface="+mn-ea"/>
+                <a:cs typeface="+mn-cs"/>
+              </a:defRPr>
+            </a:lvl5pPr>
+            <a:lvl6pPr marL="2286000" algn="l" defTabSz="914400" rtl="0" eaLnBrk="1" latinLnBrk="0" hangingPunct="1">
+              <a:defRPr sz="1800" kern="1200">
+                <a:solidFill>
+                  <a:schemeClr val="tx1"/>
+                </a:solidFill>
+                <a:latin typeface="+mn-lt"/>
+                <a:ea typeface="+mn-ea"/>
+                <a:cs typeface="+mn-cs"/>
+              </a:defRPr>
+            </a:lvl6pPr>
+            <a:lvl7pPr marL="2743200" algn="l" defTabSz="914400" rtl="0" eaLnBrk="1" latinLnBrk="0" hangingPunct="1">
+              <a:defRPr sz="1800" kern="1200">
+                <a:solidFill>
+                  <a:schemeClr val="tx1"/>
+                </a:solidFill>
+                <a:latin typeface="+mn-lt"/>
+                <a:ea typeface="+mn-ea"/>
+                <a:cs typeface="+mn-cs"/>
+              </a:defRPr>
+            </a:lvl7pPr>
+            <a:lvl8pPr marL="3200400" algn="l" defTabSz="914400" rtl="0" eaLnBrk="1" latinLnBrk="0" hangingPunct="1">
+              <a:defRPr sz="1800" kern="1200">
+                <a:solidFill>
+                  <a:schemeClr val="tx1"/>
+                </a:solidFill>
+                <a:latin typeface="+mn-lt"/>
+                <a:ea typeface="+mn-ea"/>
+                <a:cs typeface="+mn-cs"/>
+              </a:defRPr>
+            </a:lvl8pPr>
+            <a:lvl9pPr marL="3657600" algn="l" defTabSz="914400" rtl="0" eaLnBrk="1" latinLnBrk="0" hangingPunct="1">
+              <a:defRPr sz="1800" kern="1200">
+                <a:solidFill>
+                  <a:schemeClr val="tx1"/>
+                </a:solidFill>
+                <a:latin typeface="+mn-lt"/>
+                <a:ea typeface="+mn-ea"/>
+                <a:cs typeface="+mn-cs"/>
+              </a:defRPr>
+            </a:lvl9pPr>
+          </a:lstStyle>
+          <a:p>
+            <a:r>
+              <a:rPr lang="en-US" sz="900" dirty="0"/>
+              <a:t>1nsight</a:t>
+            </a:r>
+          </a:p>
+        </p:txBody>
+      </p:sp>
+      <p:sp>
+        <p:nvSpPr>
+          <p:cNvPr id="4" name="Footer Placeholder 11">
+            <a:extLst>
+              <a:ext uri="{FF2B5EF4-FFF2-40B4-BE49-F238E27FC236}">
+                <a16:creationId xmlns:a16="http://schemas.microsoft.com/office/drawing/2014/main" id="{583AF7D3-BA70-AE2D-AFD7-664246FC754F}"/>
+              </a:ext>
+            </a:extLst>
+          </p:cNvPr>
+          <p:cNvSpPr txBox="1">
+            <a:spLocks/>
+          </p:cNvSpPr>
+          <p:nvPr/>
+        </p:nvSpPr>
+        <p:spPr>
+          <a:xfrm>
+            <a:off x="6155823" y="6356350"/>
+            <a:ext cx="1808712" cy="365125"/>
+          </a:xfrm>
+          <a:prstGeom prst="rect">
+            <a:avLst/>
+          </a:prstGeom>
+        </p:spPr>
+        <p:txBody>
+          <a:bodyPr/>
+          <a:lstStyle>
+            <a:defPPr>
+              <a:defRPr lang="en-US"/>
+            </a:defPPr>
+            <a:lvl1pPr marL="0" algn="l" defTabSz="914400" rtl="0" eaLnBrk="1" latinLnBrk="0" hangingPunct="1">
+              <a:defRPr sz="1800" kern="1200">
+                <a:solidFill>
+                  <a:schemeClr val="tx1"/>
+                </a:solidFill>
+                <a:latin typeface="+mn-lt"/>
+                <a:ea typeface="+mn-ea"/>
+                <a:cs typeface="+mn-cs"/>
+              </a:defRPr>
+            </a:lvl1pPr>
+            <a:lvl2pPr marL="457200" algn="l" defTabSz="914400" rtl="0" eaLnBrk="1" latinLnBrk="0" hangingPunct="1">
+              <a:defRPr sz="1800" kern="1200">
+                <a:solidFill>
+                  <a:schemeClr val="tx1"/>
+                </a:solidFill>
+                <a:latin typeface="+mn-lt"/>
+                <a:ea typeface="+mn-ea"/>
+                <a:cs typeface="+mn-cs"/>
+              </a:defRPr>
+            </a:lvl2pPr>
+            <a:lvl3pPr marL="914400" algn="l" defTabSz="914400" rtl="0" eaLnBrk="1" latinLnBrk="0" hangingPunct="1">
+              <a:defRPr sz="1800" kern="1200">
+                <a:solidFill>
+                  <a:schemeClr val="tx1"/>
+                </a:solidFill>
+                <a:latin typeface="+mn-lt"/>
+                <a:ea typeface="+mn-ea"/>
+                <a:cs typeface="+mn-cs"/>
+              </a:defRPr>
+            </a:lvl3pPr>
+            <a:lvl4pPr marL="1371600" algn="l" defTabSz="914400" rtl="0" eaLnBrk="1" latinLnBrk="0" hangingPunct="1">
+              <a:defRPr sz="1800" kern="1200">
+                <a:solidFill>
+                  <a:schemeClr val="tx1"/>
+                </a:solidFill>
+                <a:latin typeface="+mn-lt"/>
+                <a:ea typeface="+mn-ea"/>
+                <a:cs typeface="+mn-cs"/>
+              </a:defRPr>
+            </a:lvl4pPr>
+            <a:lvl5pPr marL="1828800" algn="l" defTabSz="914400" rtl="0" eaLnBrk="1" latinLnBrk="0" hangingPunct="1">
+              <a:defRPr sz="1800" kern="1200">
+                <a:solidFill>
+                  <a:schemeClr val="tx1"/>
+                </a:solidFill>
+                <a:latin typeface="+mn-lt"/>
+                <a:ea typeface="+mn-ea"/>
+                <a:cs typeface="+mn-cs"/>
+              </a:defRPr>
+            </a:lvl5pPr>
+            <a:lvl6pPr marL="2286000" algn="l" defTabSz="914400" rtl="0" eaLnBrk="1" latinLnBrk="0" hangingPunct="1">
+              <a:defRPr sz="1800" kern="1200">
+                <a:solidFill>
+                  <a:schemeClr val="tx1"/>
+                </a:solidFill>
+                <a:latin typeface="+mn-lt"/>
+                <a:ea typeface="+mn-ea"/>
+                <a:cs typeface="+mn-cs"/>
+              </a:defRPr>
+            </a:lvl6pPr>
+            <a:lvl7pPr marL="2743200" algn="l" defTabSz="914400" rtl="0" eaLnBrk="1" latinLnBrk="0" hangingPunct="1">
+              <a:defRPr sz="1800" kern="1200">
+                <a:solidFill>
+                  <a:schemeClr val="tx1"/>
+                </a:solidFill>
+                <a:latin typeface="+mn-lt"/>
+                <a:ea typeface="+mn-ea"/>
+                <a:cs typeface="+mn-cs"/>
+              </a:defRPr>
+            </a:lvl7pPr>
+            <a:lvl8pPr marL="3200400" algn="l" defTabSz="914400" rtl="0" eaLnBrk="1" latinLnBrk="0" hangingPunct="1">
+              <a:defRPr sz="1800" kern="1200">
+                <a:solidFill>
+                  <a:schemeClr val="tx1"/>
+                </a:solidFill>
+                <a:latin typeface="+mn-lt"/>
+                <a:ea typeface="+mn-ea"/>
+                <a:cs typeface="+mn-cs"/>
+              </a:defRPr>
+            </a:lvl8pPr>
+            <a:lvl9pPr marL="3657600" algn="l" defTabSz="914400" rtl="0" eaLnBrk="1" latinLnBrk="0" hangingPunct="1">
+              <a:defRPr sz="1800" kern="1200">
+                <a:solidFill>
+                  <a:schemeClr val="tx1"/>
+                </a:solidFill>
+                <a:latin typeface="+mn-lt"/>
+                <a:ea typeface="+mn-ea"/>
+                <a:cs typeface="+mn-cs"/>
+              </a:defRPr>
+            </a:lvl9pPr>
+          </a:lstStyle>
+          <a:p>
+            <a:r>
+              <a:rPr lang="en-US" sz="900" dirty="0"/>
+              <a:t>DELIVERY PERFORMANCE</a:t>
+            </a:r>
+          </a:p>
+        </p:txBody>
+      </p:sp>
+      <p:sp>
+        <p:nvSpPr>
+          <p:cNvPr id="5" name="Slide Number Placeholder 12">
+            <a:extLst>
+              <a:ext uri="{FF2B5EF4-FFF2-40B4-BE49-F238E27FC236}">
+                <a16:creationId xmlns:a16="http://schemas.microsoft.com/office/drawing/2014/main" id="{4993A6FC-4EF7-C1B5-374A-F84DF8365FBD}"/>
+              </a:ext>
+            </a:extLst>
+          </p:cNvPr>
+          <p:cNvSpPr txBox="1">
+            <a:spLocks/>
+          </p:cNvSpPr>
+          <p:nvPr/>
+        </p:nvSpPr>
+        <p:spPr>
+          <a:xfrm>
+            <a:off x="10810874" y="6356350"/>
+            <a:ext cx="542925" cy="365125"/>
+          </a:xfrm>
+          <a:prstGeom prst="rect">
+            <a:avLst/>
+          </a:prstGeom>
+        </p:spPr>
+        <p:txBody>
+          <a:bodyPr/>
+          <a:lstStyle>
+            <a:defPPr>
+              <a:defRPr lang="en-US"/>
+            </a:defPPr>
+            <a:lvl1pPr marL="0" algn="l" defTabSz="914400" rtl="0" eaLnBrk="1" latinLnBrk="0" hangingPunct="1">
+              <a:defRPr sz="1800" kern="1200">
+                <a:solidFill>
+                  <a:schemeClr val="tx1"/>
+                </a:solidFill>
+                <a:latin typeface="+mn-lt"/>
+                <a:ea typeface="+mn-ea"/>
+                <a:cs typeface="+mn-cs"/>
+              </a:defRPr>
+            </a:lvl1pPr>
+            <a:lvl2pPr marL="457200" algn="l" defTabSz="914400" rtl="0" eaLnBrk="1" latinLnBrk="0" hangingPunct="1">
+              <a:defRPr sz="1800" kern="1200">
+                <a:solidFill>
+                  <a:schemeClr val="tx1"/>
+                </a:solidFill>
+                <a:latin typeface="+mn-lt"/>
+                <a:ea typeface="+mn-ea"/>
+                <a:cs typeface="+mn-cs"/>
+              </a:defRPr>
+            </a:lvl2pPr>
+            <a:lvl3pPr marL="914400" algn="l" defTabSz="914400" rtl="0" eaLnBrk="1" latinLnBrk="0" hangingPunct="1">
+              <a:defRPr sz="1800" kern="1200">
+                <a:solidFill>
+                  <a:schemeClr val="tx1"/>
+                </a:solidFill>
+                <a:latin typeface="+mn-lt"/>
+                <a:ea typeface="+mn-ea"/>
+                <a:cs typeface="+mn-cs"/>
+              </a:defRPr>
+            </a:lvl3pPr>
+            <a:lvl4pPr marL="1371600" algn="l" defTabSz="914400" rtl="0" eaLnBrk="1" latinLnBrk="0" hangingPunct="1">
+              <a:defRPr sz="1800" kern="1200">
+                <a:solidFill>
+                  <a:schemeClr val="tx1"/>
+                </a:solidFill>
+                <a:latin typeface="+mn-lt"/>
+                <a:ea typeface="+mn-ea"/>
+                <a:cs typeface="+mn-cs"/>
+              </a:defRPr>
+            </a:lvl4pPr>
+            <a:lvl5pPr marL="1828800" algn="l" defTabSz="914400" rtl="0" eaLnBrk="1" latinLnBrk="0" hangingPunct="1">
+              <a:defRPr sz="1800" kern="1200">
+                <a:solidFill>
+                  <a:schemeClr val="tx1"/>
+                </a:solidFill>
+                <a:latin typeface="+mn-lt"/>
+                <a:ea typeface="+mn-ea"/>
+                <a:cs typeface="+mn-cs"/>
+              </a:defRPr>
+            </a:lvl5pPr>
+            <a:lvl6pPr marL="2286000" algn="l" defTabSz="914400" rtl="0" eaLnBrk="1" latinLnBrk="0" hangingPunct="1">
+              <a:defRPr sz="1800" kern="1200">
+                <a:solidFill>
+                  <a:schemeClr val="tx1"/>
+                </a:solidFill>
+                <a:latin typeface="+mn-lt"/>
+                <a:ea typeface="+mn-ea"/>
+                <a:cs typeface="+mn-cs"/>
+              </a:defRPr>
+            </a:lvl6pPr>
+            <a:lvl7pPr marL="2743200" algn="l" defTabSz="914400" rtl="0" eaLnBrk="1" latinLnBrk="0" hangingPunct="1">
+              <a:defRPr sz="1800" kern="1200">
+                <a:solidFill>
+                  <a:schemeClr val="tx1"/>
+                </a:solidFill>
+                <a:latin typeface="+mn-lt"/>
+                <a:ea typeface="+mn-ea"/>
+                <a:cs typeface="+mn-cs"/>
+              </a:defRPr>
+            </a:lvl7pPr>
+            <a:lvl8pPr marL="3200400" algn="l" defTabSz="914400" rtl="0" eaLnBrk="1" latinLnBrk="0" hangingPunct="1">
+              <a:defRPr sz="1800" kern="1200">
+                <a:solidFill>
+                  <a:schemeClr val="tx1"/>
+                </a:solidFill>
+                <a:latin typeface="+mn-lt"/>
+                <a:ea typeface="+mn-ea"/>
+                <a:cs typeface="+mn-cs"/>
+              </a:defRPr>
+            </a:lvl8pPr>
+            <a:lvl9pPr marL="3657600" algn="l" defTabSz="914400" rtl="0" eaLnBrk="1" latinLnBrk="0" hangingPunct="1">
+              <a:defRPr sz="1800" kern="1200">
+                <a:solidFill>
+                  <a:schemeClr val="tx1"/>
+                </a:solidFill>
+                <a:latin typeface="+mn-lt"/>
+                <a:ea typeface="+mn-ea"/>
+                <a:cs typeface="+mn-cs"/>
+              </a:defRPr>
+            </a:lvl9pPr>
+          </a:lstStyle>
+          <a:p>
+            <a:fld id="{B5CEABB6-07DC-46E8-9B57-56EC44A396E5}" type="slidenum">
+              <a:rPr lang="en-US" sz="900" smtClean="0"/>
+              <a:pPr/>
+              <a:t>13</a:t>
+            </a:fld>
+            <a:endParaRPr lang="en-US" sz="900" dirty="0"/>
+          </a:p>
+        </p:txBody>
+      </p:sp>
+    </p:spTree>
+    <p:extLst>
+      <p:ext uri="{BB962C8B-B14F-4D97-AF65-F5344CB8AC3E}">
+        <p14:creationId xmlns:p14="http://schemas.microsoft.com/office/powerpoint/2010/main" val="649456048"/>
+      </p:ext>
+    </p:extLst>
+  </p:cSld>
+  <p:clrMapOvr>
+    <a:masterClrMapping/>
+  </p:clrMapOvr>
+</p:sld>
+</file>
+
+<file path=ppt/slides/slide14.xml><?xml version="1.0" encoding="utf-8"?>
+<p:sld xmlns:a="http://schemas.openxmlformats.org/drawingml/2006/main" xmlns:r="http://schemas.openxmlformats.org/officeDocument/2006/relationships" xmlns:p="http://schemas.openxmlformats.org/presentationml/2006/main">
+  <p:cSld>
+    <p:spTree>
+      <p:nvGrpSpPr>
+        <p:cNvPr id="1" name="">
+          <a:extLst>
+            <a:ext uri="{FF2B5EF4-FFF2-40B4-BE49-F238E27FC236}">
+              <a16:creationId xmlns:a16="http://schemas.microsoft.com/office/drawing/2014/main" id="{1E97480F-E86E-80FD-6BF2-C57429CFCBDC}"/>
+            </a:ext>
+          </a:extLst>
+        </p:cNvPr>
+        <p:cNvGrpSpPr/>
+        <p:nvPr/>
+      </p:nvGrpSpPr>
+      <p:grpSpPr>
+        <a:xfrm>
+          <a:off x="0" y="0"/>
+          <a:ext cx="0" cy="0"/>
+          <a:chOff x="0" y="0"/>
+          <a:chExt cx="0" cy="0"/>
+        </a:xfrm>
+      </p:grpSpPr>
+      <p:pic>
+        <p:nvPicPr>
+          <p:cNvPr id="4" name="Picture 3">
+            <a:extLst>
+              <a:ext uri="{FF2B5EF4-FFF2-40B4-BE49-F238E27FC236}">
+                <a16:creationId xmlns:a16="http://schemas.microsoft.com/office/drawing/2014/main" id="{695EB976-4B76-EE79-92CC-4334A0956045}"/>
+              </a:ext>
+            </a:extLst>
+          </p:cNvPr>
+          <p:cNvPicPr>
+            <a:picLocks noChangeAspect="1"/>
+          </p:cNvPicPr>
+          <p:nvPr/>
+        </p:nvPicPr>
+        <p:blipFill>
+          <a:blip r:embed="rId3"/>
+          <a:stretch>
+            <a:fillRect/>
+          </a:stretch>
+        </p:blipFill>
+        <p:spPr>
+          <a:xfrm>
+            <a:off x="1303989" y="1028759"/>
+            <a:ext cx="9147293" cy="4573647"/>
+          </a:xfrm>
+          <a:prstGeom prst="rect">
+            <a:avLst/>
+          </a:prstGeom>
+        </p:spPr>
+      </p:pic>
+      <p:sp>
+        <p:nvSpPr>
+          <p:cNvPr id="2" name="Title 1">
+            <a:extLst>
+              <a:ext uri="{FF2B5EF4-FFF2-40B4-BE49-F238E27FC236}">
+                <a16:creationId xmlns:a16="http://schemas.microsoft.com/office/drawing/2014/main" id="{3C09E37F-F394-15D9-D9F9-F97FFD05A591}"/>
+              </a:ext>
+            </a:extLst>
+          </p:cNvPr>
+          <p:cNvSpPr>
+            <a:spLocks noGrp="1"/>
+          </p:cNvSpPr>
+          <p:nvPr>
+            <p:ph type="title"/>
+          </p:nvPr>
+        </p:nvSpPr>
+        <p:spPr>
+          <a:xfrm>
+            <a:off x="401473" y="201086"/>
+            <a:ext cx="10952326" cy="929779"/>
+          </a:xfrm>
+        </p:spPr>
+        <p:txBody>
+          <a:bodyPr/>
+          <a:lstStyle/>
+          <a:p>
+            <a:r>
+              <a:rPr lang="en-US" dirty="0"/>
+              <a:t>Delivery Time Improvements will be targeted at The top 3 products in sales Revenue for the Top 3 cities…</a:t>
+            </a:r>
+          </a:p>
+        </p:txBody>
+      </p:sp>
+      <p:sp>
+        <p:nvSpPr>
+          <p:cNvPr id="29" name="Text Placeholder 28">
+            <a:extLst>
+              <a:ext uri="{FF2B5EF4-FFF2-40B4-BE49-F238E27FC236}">
+                <a16:creationId xmlns:a16="http://schemas.microsoft.com/office/drawing/2014/main" id="{C74FF9E0-07F8-CBD4-B784-75250CA0A946}"/>
+              </a:ext>
+            </a:extLst>
+          </p:cNvPr>
+          <p:cNvSpPr>
+            <a:spLocks noGrp="1"/>
+          </p:cNvSpPr>
+          <p:nvPr>
+            <p:ph type="body" sz="quarter" idx="28"/>
+          </p:nvPr>
+        </p:nvSpPr>
+        <p:spPr>
+          <a:xfrm>
+            <a:off x="838201" y="5602406"/>
+            <a:ext cx="10550420" cy="753944"/>
+          </a:xfrm>
+        </p:spPr>
+        <p:txBody>
+          <a:bodyPr/>
+          <a:lstStyle/>
+          <a:p>
+            <a:r>
+              <a:rPr lang="en-SG" dirty="0"/>
+              <a:t>The product categories that had the highest sales in the top 3 cities were Health and Beauty, Bedroom and Bathroom Accessories, and Watches and Gifts (??)</a:t>
+            </a:r>
+          </a:p>
+        </p:txBody>
+      </p:sp>
+      <p:sp>
+        <p:nvSpPr>
+          <p:cNvPr id="3" name="Date Placeholder 10">
+            <a:extLst>
+              <a:ext uri="{FF2B5EF4-FFF2-40B4-BE49-F238E27FC236}">
+                <a16:creationId xmlns:a16="http://schemas.microsoft.com/office/drawing/2014/main" id="{1548D219-C3C9-2E9B-3DC9-F6C3EA9A0C06}"/>
+              </a:ext>
+            </a:extLst>
+          </p:cNvPr>
+          <p:cNvSpPr txBox="1">
+            <a:spLocks/>
+          </p:cNvSpPr>
+          <p:nvPr/>
+        </p:nvSpPr>
+        <p:spPr>
+          <a:xfrm>
+            <a:off x="838200" y="6356350"/>
+            <a:ext cx="2743200" cy="365125"/>
+          </a:xfrm>
+          <a:prstGeom prst="rect">
+            <a:avLst/>
+          </a:prstGeom>
+        </p:spPr>
+        <p:txBody>
+          <a:bodyPr/>
+          <a:lstStyle>
+            <a:defPPr>
+              <a:defRPr lang="en-US"/>
+            </a:defPPr>
+            <a:lvl1pPr marL="0" algn="l" defTabSz="914400" rtl="0" eaLnBrk="1" latinLnBrk="0" hangingPunct="1">
+              <a:defRPr sz="1800" kern="1200">
+                <a:solidFill>
+                  <a:schemeClr val="tx1"/>
+                </a:solidFill>
+                <a:latin typeface="+mn-lt"/>
+                <a:ea typeface="+mn-ea"/>
+                <a:cs typeface="+mn-cs"/>
+              </a:defRPr>
+            </a:lvl1pPr>
+            <a:lvl2pPr marL="457200" algn="l" defTabSz="914400" rtl="0" eaLnBrk="1" latinLnBrk="0" hangingPunct="1">
+              <a:defRPr sz="1800" kern="1200">
+                <a:solidFill>
+                  <a:schemeClr val="tx1"/>
+                </a:solidFill>
+                <a:latin typeface="+mn-lt"/>
+                <a:ea typeface="+mn-ea"/>
+                <a:cs typeface="+mn-cs"/>
+              </a:defRPr>
+            </a:lvl2pPr>
+            <a:lvl3pPr marL="914400" algn="l" defTabSz="914400" rtl="0" eaLnBrk="1" latinLnBrk="0" hangingPunct="1">
+              <a:defRPr sz="1800" kern="1200">
+                <a:solidFill>
+                  <a:schemeClr val="tx1"/>
+                </a:solidFill>
+                <a:latin typeface="+mn-lt"/>
+                <a:ea typeface="+mn-ea"/>
+                <a:cs typeface="+mn-cs"/>
+              </a:defRPr>
+            </a:lvl3pPr>
+            <a:lvl4pPr marL="1371600" algn="l" defTabSz="914400" rtl="0" eaLnBrk="1" latinLnBrk="0" hangingPunct="1">
+              <a:defRPr sz="1800" kern="1200">
+                <a:solidFill>
+                  <a:schemeClr val="tx1"/>
+                </a:solidFill>
+                <a:latin typeface="+mn-lt"/>
+                <a:ea typeface="+mn-ea"/>
+                <a:cs typeface="+mn-cs"/>
+              </a:defRPr>
+            </a:lvl4pPr>
+            <a:lvl5pPr marL="1828800" algn="l" defTabSz="914400" rtl="0" eaLnBrk="1" latinLnBrk="0" hangingPunct="1">
+              <a:defRPr sz="1800" kern="1200">
+                <a:solidFill>
+                  <a:schemeClr val="tx1"/>
+                </a:solidFill>
+                <a:latin typeface="+mn-lt"/>
+                <a:ea typeface="+mn-ea"/>
+                <a:cs typeface="+mn-cs"/>
+              </a:defRPr>
+            </a:lvl5pPr>
+            <a:lvl6pPr marL="2286000" algn="l" defTabSz="914400" rtl="0" eaLnBrk="1" latinLnBrk="0" hangingPunct="1">
+              <a:defRPr sz="1800" kern="1200">
+                <a:solidFill>
+                  <a:schemeClr val="tx1"/>
+                </a:solidFill>
+                <a:latin typeface="+mn-lt"/>
+                <a:ea typeface="+mn-ea"/>
+                <a:cs typeface="+mn-cs"/>
+              </a:defRPr>
+            </a:lvl6pPr>
+            <a:lvl7pPr marL="2743200" algn="l" defTabSz="914400" rtl="0" eaLnBrk="1" latinLnBrk="0" hangingPunct="1">
+              <a:defRPr sz="1800" kern="1200">
+                <a:solidFill>
+                  <a:schemeClr val="tx1"/>
+                </a:solidFill>
+                <a:latin typeface="+mn-lt"/>
+                <a:ea typeface="+mn-ea"/>
+                <a:cs typeface="+mn-cs"/>
+              </a:defRPr>
+            </a:lvl7pPr>
+            <a:lvl8pPr marL="3200400" algn="l" defTabSz="914400" rtl="0" eaLnBrk="1" latinLnBrk="0" hangingPunct="1">
+              <a:defRPr sz="1800" kern="1200">
+                <a:solidFill>
+                  <a:schemeClr val="tx1"/>
+                </a:solidFill>
+                <a:latin typeface="+mn-lt"/>
+                <a:ea typeface="+mn-ea"/>
+                <a:cs typeface="+mn-cs"/>
+              </a:defRPr>
+            </a:lvl8pPr>
+            <a:lvl9pPr marL="3657600" algn="l" defTabSz="914400" rtl="0" eaLnBrk="1" latinLnBrk="0" hangingPunct="1">
+              <a:defRPr sz="1800" kern="1200">
+                <a:solidFill>
+                  <a:schemeClr val="tx1"/>
+                </a:solidFill>
+                <a:latin typeface="+mn-lt"/>
+                <a:ea typeface="+mn-ea"/>
+                <a:cs typeface="+mn-cs"/>
+              </a:defRPr>
+            </a:lvl9pPr>
+          </a:lstStyle>
+          <a:p>
+            <a:r>
+              <a:rPr lang="en-US" sz="900" dirty="0"/>
+              <a:t>1nsight</a:t>
+            </a:r>
+          </a:p>
+        </p:txBody>
+      </p:sp>
+      <p:sp>
+        <p:nvSpPr>
+          <p:cNvPr id="5" name="Footer Placeholder 11">
+            <a:extLst>
+              <a:ext uri="{FF2B5EF4-FFF2-40B4-BE49-F238E27FC236}">
+                <a16:creationId xmlns:a16="http://schemas.microsoft.com/office/drawing/2014/main" id="{AAB17C6D-9206-C204-4B44-9DC7821EB8E6}"/>
+              </a:ext>
+            </a:extLst>
+          </p:cNvPr>
+          <p:cNvSpPr txBox="1">
+            <a:spLocks/>
+          </p:cNvSpPr>
+          <p:nvPr/>
+        </p:nvSpPr>
+        <p:spPr>
+          <a:xfrm>
+            <a:off x="6155823" y="6356350"/>
+            <a:ext cx="1808712" cy="365125"/>
+          </a:xfrm>
+          <a:prstGeom prst="rect">
+            <a:avLst/>
+          </a:prstGeom>
+        </p:spPr>
+        <p:txBody>
+          <a:bodyPr/>
+          <a:lstStyle>
+            <a:defPPr>
+              <a:defRPr lang="en-US"/>
+            </a:defPPr>
+            <a:lvl1pPr marL="0" algn="l" defTabSz="914400" rtl="0" eaLnBrk="1" latinLnBrk="0" hangingPunct="1">
+              <a:defRPr sz="1800" kern="1200">
+                <a:solidFill>
+                  <a:schemeClr val="tx1"/>
+                </a:solidFill>
+                <a:latin typeface="+mn-lt"/>
+                <a:ea typeface="+mn-ea"/>
+                <a:cs typeface="+mn-cs"/>
+              </a:defRPr>
+            </a:lvl1pPr>
+            <a:lvl2pPr marL="457200" algn="l" defTabSz="914400" rtl="0" eaLnBrk="1" latinLnBrk="0" hangingPunct="1">
+              <a:defRPr sz="1800" kern="1200">
+                <a:solidFill>
+                  <a:schemeClr val="tx1"/>
+                </a:solidFill>
+                <a:latin typeface="+mn-lt"/>
+                <a:ea typeface="+mn-ea"/>
+                <a:cs typeface="+mn-cs"/>
+              </a:defRPr>
+            </a:lvl2pPr>
+            <a:lvl3pPr marL="914400" algn="l" defTabSz="914400" rtl="0" eaLnBrk="1" latinLnBrk="0" hangingPunct="1">
+              <a:defRPr sz="1800" kern="1200">
+                <a:solidFill>
+                  <a:schemeClr val="tx1"/>
+                </a:solidFill>
+                <a:latin typeface="+mn-lt"/>
+                <a:ea typeface="+mn-ea"/>
+                <a:cs typeface="+mn-cs"/>
+              </a:defRPr>
+            </a:lvl3pPr>
+            <a:lvl4pPr marL="1371600" algn="l" defTabSz="914400" rtl="0" eaLnBrk="1" latinLnBrk="0" hangingPunct="1">
+              <a:defRPr sz="1800" kern="1200">
+                <a:solidFill>
+                  <a:schemeClr val="tx1"/>
+                </a:solidFill>
+                <a:latin typeface="+mn-lt"/>
+                <a:ea typeface="+mn-ea"/>
+                <a:cs typeface="+mn-cs"/>
+              </a:defRPr>
+            </a:lvl4pPr>
+            <a:lvl5pPr marL="1828800" algn="l" defTabSz="914400" rtl="0" eaLnBrk="1" latinLnBrk="0" hangingPunct="1">
+              <a:defRPr sz="1800" kern="1200">
+                <a:solidFill>
+                  <a:schemeClr val="tx1"/>
+                </a:solidFill>
+                <a:latin typeface="+mn-lt"/>
+                <a:ea typeface="+mn-ea"/>
+                <a:cs typeface="+mn-cs"/>
+              </a:defRPr>
+            </a:lvl5pPr>
+            <a:lvl6pPr marL="2286000" algn="l" defTabSz="914400" rtl="0" eaLnBrk="1" latinLnBrk="0" hangingPunct="1">
+              <a:defRPr sz="1800" kern="1200">
+                <a:solidFill>
+                  <a:schemeClr val="tx1"/>
+                </a:solidFill>
+                <a:latin typeface="+mn-lt"/>
+                <a:ea typeface="+mn-ea"/>
+                <a:cs typeface="+mn-cs"/>
+              </a:defRPr>
+            </a:lvl6pPr>
+            <a:lvl7pPr marL="2743200" algn="l" defTabSz="914400" rtl="0" eaLnBrk="1" latinLnBrk="0" hangingPunct="1">
+              <a:defRPr sz="1800" kern="1200">
+                <a:solidFill>
+                  <a:schemeClr val="tx1"/>
+                </a:solidFill>
+                <a:latin typeface="+mn-lt"/>
+                <a:ea typeface="+mn-ea"/>
+                <a:cs typeface="+mn-cs"/>
+              </a:defRPr>
+            </a:lvl7pPr>
+            <a:lvl8pPr marL="3200400" algn="l" defTabSz="914400" rtl="0" eaLnBrk="1" latinLnBrk="0" hangingPunct="1">
+              <a:defRPr sz="1800" kern="1200">
+                <a:solidFill>
+                  <a:schemeClr val="tx1"/>
+                </a:solidFill>
+                <a:latin typeface="+mn-lt"/>
+                <a:ea typeface="+mn-ea"/>
+                <a:cs typeface="+mn-cs"/>
+              </a:defRPr>
+            </a:lvl8pPr>
+            <a:lvl9pPr marL="3657600" algn="l" defTabSz="914400" rtl="0" eaLnBrk="1" latinLnBrk="0" hangingPunct="1">
+              <a:defRPr sz="1800" kern="1200">
+                <a:solidFill>
+                  <a:schemeClr val="tx1"/>
+                </a:solidFill>
+                <a:latin typeface="+mn-lt"/>
+                <a:ea typeface="+mn-ea"/>
+                <a:cs typeface="+mn-cs"/>
+              </a:defRPr>
+            </a:lvl9pPr>
+          </a:lstStyle>
+          <a:p>
+            <a:r>
+              <a:rPr lang="en-US" sz="900" dirty="0"/>
+              <a:t>DELIVERY PERFORMANCE</a:t>
+            </a:r>
+          </a:p>
+        </p:txBody>
+      </p:sp>
+      <p:sp>
+        <p:nvSpPr>
+          <p:cNvPr id="6" name="Slide Number Placeholder 12">
+            <a:extLst>
+              <a:ext uri="{FF2B5EF4-FFF2-40B4-BE49-F238E27FC236}">
+                <a16:creationId xmlns:a16="http://schemas.microsoft.com/office/drawing/2014/main" id="{C24D4B7A-35A4-EFFA-A37A-5A30BB5FE893}"/>
+              </a:ext>
+            </a:extLst>
+          </p:cNvPr>
+          <p:cNvSpPr txBox="1">
+            <a:spLocks/>
+          </p:cNvSpPr>
+          <p:nvPr/>
+        </p:nvSpPr>
+        <p:spPr>
+          <a:xfrm>
+            <a:off x="10810874" y="6356350"/>
+            <a:ext cx="542925" cy="365125"/>
+          </a:xfrm>
+          <a:prstGeom prst="rect">
+            <a:avLst/>
+          </a:prstGeom>
+        </p:spPr>
+        <p:txBody>
+          <a:bodyPr/>
+          <a:lstStyle>
+            <a:defPPr>
+              <a:defRPr lang="en-US"/>
+            </a:defPPr>
+            <a:lvl1pPr marL="0" algn="l" defTabSz="914400" rtl="0" eaLnBrk="1" latinLnBrk="0" hangingPunct="1">
+              <a:defRPr sz="1800" kern="1200">
+                <a:solidFill>
+                  <a:schemeClr val="tx1"/>
+                </a:solidFill>
+                <a:latin typeface="+mn-lt"/>
+                <a:ea typeface="+mn-ea"/>
+                <a:cs typeface="+mn-cs"/>
+              </a:defRPr>
+            </a:lvl1pPr>
+            <a:lvl2pPr marL="457200" algn="l" defTabSz="914400" rtl="0" eaLnBrk="1" latinLnBrk="0" hangingPunct="1">
+              <a:defRPr sz="1800" kern="1200">
+                <a:solidFill>
+                  <a:schemeClr val="tx1"/>
+                </a:solidFill>
+                <a:latin typeface="+mn-lt"/>
+                <a:ea typeface="+mn-ea"/>
+                <a:cs typeface="+mn-cs"/>
+              </a:defRPr>
+            </a:lvl2pPr>
+            <a:lvl3pPr marL="914400" algn="l" defTabSz="914400" rtl="0" eaLnBrk="1" latinLnBrk="0" hangingPunct="1">
+              <a:defRPr sz="1800" kern="1200">
+                <a:solidFill>
+                  <a:schemeClr val="tx1"/>
+                </a:solidFill>
+                <a:latin typeface="+mn-lt"/>
+                <a:ea typeface="+mn-ea"/>
+                <a:cs typeface="+mn-cs"/>
+              </a:defRPr>
+            </a:lvl3pPr>
+            <a:lvl4pPr marL="1371600" algn="l" defTabSz="914400" rtl="0" eaLnBrk="1" latinLnBrk="0" hangingPunct="1">
+              <a:defRPr sz="1800" kern="1200">
+                <a:solidFill>
+                  <a:schemeClr val="tx1"/>
+                </a:solidFill>
+                <a:latin typeface="+mn-lt"/>
+                <a:ea typeface="+mn-ea"/>
+                <a:cs typeface="+mn-cs"/>
+              </a:defRPr>
+            </a:lvl4pPr>
+            <a:lvl5pPr marL="1828800" algn="l" defTabSz="914400" rtl="0" eaLnBrk="1" latinLnBrk="0" hangingPunct="1">
+              <a:defRPr sz="1800" kern="1200">
+                <a:solidFill>
+                  <a:schemeClr val="tx1"/>
+                </a:solidFill>
+                <a:latin typeface="+mn-lt"/>
+                <a:ea typeface="+mn-ea"/>
+                <a:cs typeface="+mn-cs"/>
+              </a:defRPr>
+            </a:lvl5pPr>
+            <a:lvl6pPr marL="2286000" algn="l" defTabSz="914400" rtl="0" eaLnBrk="1" latinLnBrk="0" hangingPunct="1">
+              <a:defRPr sz="1800" kern="1200">
+                <a:solidFill>
+                  <a:schemeClr val="tx1"/>
+                </a:solidFill>
+                <a:latin typeface="+mn-lt"/>
+                <a:ea typeface="+mn-ea"/>
+                <a:cs typeface="+mn-cs"/>
+              </a:defRPr>
+            </a:lvl6pPr>
+            <a:lvl7pPr marL="2743200" algn="l" defTabSz="914400" rtl="0" eaLnBrk="1" latinLnBrk="0" hangingPunct="1">
+              <a:defRPr sz="1800" kern="1200">
+                <a:solidFill>
+                  <a:schemeClr val="tx1"/>
+                </a:solidFill>
+                <a:latin typeface="+mn-lt"/>
+                <a:ea typeface="+mn-ea"/>
+                <a:cs typeface="+mn-cs"/>
+              </a:defRPr>
+            </a:lvl7pPr>
+            <a:lvl8pPr marL="3200400" algn="l" defTabSz="914400" rtl="0" eaLnBrk="1" latinLnBrk="0" hangingPunct="1">
+              <a:defRPr sz="1800" kern="1200">
+                <a:solidFill>
+                  <a:schemeClr val="tx1"/>
+                </a:solidFill>
+                <a:latin typeface="+mn-lt"/>
+                <a:ea typeface="+mn-ea"/>
+                <a:cs typeface="+mn-cs"/>
+              </a:defRPr>
+            </a:lvl8pPr>
+            <a:lvl9pPr marL="3657600" algn="l" defTabSz="914400" rtl="0" eaLnBrk="1" latinLnBrk="0" hangingPunct="1">
+              <a:defRPr sz="1800" kern="1200">
+                <a:solidFill>
+                  <a:schemeClr val="tx1"/>
+                </a:solidFill>
+                <a:latin typeface="+mn-lt"/>
+                <a:ea typeface="+mn-ea"/>
+                <a:cs typeface="+mn-cs"/>
+              </a:defRPr>
+            </a:lvl9pPr>
+          </a:lstStyle>
+          <a:p>
+            <a:fld id="{B5CEABB6-07DC-46E8-9B57-56EC44A396E5}" type="slidenum">
+              <a:rPr lang="en-US" sz="900" smtClean="0"/>
+              <a:pPr/>
+              <a:t>14</a:t>
+            </a:fld>
+            <a:endParaRPr lang="en-US" sz="900" dirty="0"/>
+          </a:p>
+        </p:txBody>
+      </p:sp>
+    </p:spTree>
+    <p:extLst>
+      <p:ext uri="{BB962C8B-B14F-4D97-AF65-F5344CB8AC3E}">
+        <p14:creationId xmlns:p14="http://schemas.microsoft.com/office/powerpoint/2010/main" val="3899709938"/>
+      </p:ext>
+    </p:extLst>
+  </p:cSld>
+  <p:clrMapOvr>
+    <a:masterClrMapping/>
+  </p:clrMapOvr>
+</p:sld>
+</file>
+
+<file path=ppt/slides/slide15.xml><?xml version="1.0" encoding="utf-8"?>
+<p:sld xmlns:a="http://schemas.openxmlformats.org/drawingml/2006/main" xmlns:r="http://schemas.openxmlformats.org/officeDocument/2006/relationships" xmlns:p="http://schemas.openxmlformats.org/presentationml/2006/main">
+  <p:cSld>
+    <p:spTree>
+      <p:nvGrpSpPr>
+        <p:cNvPr id="1" name="">
+          <a:extLst>
+            <a:ext uri="{FF2B5EF4-FFF2-40B4-BE49-F238E27FC236}">
+              <a16:creationId xmlns:a16="http://schemas.microsoft.com/office/drawing/2014/main" id="{5D929420-5658-A4BE-918B-47F253CC3385}"/>
+            </a:ext>
+          </a:extLst>
+        </p:cNvPr>
+        <p:cNvGrpSpPr/>
+        <p:nvPr/>
+      </p:nvGrpSpPr>
+      <p:grpSpPr>
+        <a:xfrm>
+          <a:off x="0" y="0"/>
+          <a:ext cx="0" cy="0"/>
+          <a:chOff x="0" y="0"/>
+          <a:chExt cx="0" cy="0"/>
+        </a:xfrm>
+      </p:grpSpPr>
+      <p:sp>
+        <p:nvSpPr>
+          <p:cNvPr id="2" name="Title 1">
+            <a:extLst>
+              <a:ext uri="{FF2B5EF4-FFF2-40B4-BE49-F238E27FC236}">
+                <a16:creationId xmlns:a16="http://schemas.microsoft.com/office/drawing/2014/main" id="{4CD8E983-FAA6-EA97-5556-A608DDECA2FB}"/>
+              </a:ext>
+            </a:extLst>
+          </p:cNvPr>
+          <p:cNvSpPr>
+            <a:spLocks noGrp="1"/>
+          </p:cNvSpPr>
+          <p:nvPr>
+            <p:ph type="ctrTitle"/>
+          </p:nvPr>
+        </p:nvSpPr>
+        <p:spPr>
+          <a:xfrm>
+            <a:off x="6304547" y="2165685"/>
+            <a:ext cx="5370897" cy="2121082"/>
+          </a:xfrm>
+        </p:spPr>
+        <p:txBody>
+          <a:bodyPr/>
+          <a:lstStyle/>
+          <a:p>
+            <a:r>
+              <a:rPr lang="en-US" dirty="0"/>
+              <a:t>CUSTOMER SEGMENTATION</a:t>
+            </a:r>
+            <a:br>
+              <a:rPr lang="en-US" dirty="0"/>
+            </a:br>
+            <a:br>
+              <a:rPr lang="en-US" dirty="0"/>
+            </a:br>
+            <a:r>
+              <a:rPr lang="en-US" sz="2400" i="1" dirty="0"/>
+              <a:t>Increasing Seller Revenue</a:t>
+            </a:r>
+            <a:endParaRPr lang="en-US" i="1" dirty="0"/>
+          </a:p>
+        </p:txBody>
+      </p:sp>
+    </p:spTree>
+    <p:extLst>
+      <p:ext uri="{BB962C8B-B14F-4D97-AF65-F5344CB8AC3E}">
+        <p14:creationId xmlns:p14="http://schemas.microsoft.com/office/powerpoint/2010/main" val="3249687862"/>
+      </p:ext>
+    </p:extLst>
+  </p:cSld>
+  <p:clrMapOvr>
+    <a:masterClrMapping/>
+  </p:clrMapOvr>
+</p:sld>
+</file>
+
+<file path=ppt/slides/slide16.xml><?xml version="1.0" encoding="utf-8"?>
+<p:sld xmlns:a="http://schemas.openxmlformats.org/drawingml/2006/main" xmlns:r="http://schemas.openxmlformats.org/officeDocument/2006/relationships" xmlns:p="http://schemas.openxmlformats.org/presentationml/2006/main">
+  <p:cSld>
+    <p:spTree>
+      <p:nvGrpSpPr>
+        <p:cNvPr id="1" name="">
+          <a:extLst>
+            <a:ext uri="{FF2B5EF4-FFF2-40B4-BE49-F238E27FC236}">
+              <a16:creationId xmlns:a16="http://schemas.microsoft.com/office/drawing/2014/main" id="{75EF1B6B-C88F-6E6B-F678-21F2E45EFA79}"/>
+            </a:ext>
+          </a:extLst>
+        </p:cNvPr>
+        <p:cNvGrpSpPr/>
+        <p:nvPr/>
+      </p:nvGrpSpPr>
+      <p:grpSpPr>
+        <a:xfrm>
+          <a:off x="0" y="0"/>
+          <a:ext cx="0" cy="0"/>
+          <a:chOff x="0" y="0"/>
+          <a:chExt cx="0" cy="0"/>
+        </a:xfrm>
+      </p:grpSpPr>
+      <p:sp>
+        <p:nvSpPr>
+          <p:cNvPr id="2" name="Title 1">
+            <a:extLst>
+              <a:ext uri="{FF2B5EF4-FFF2-40B4-BE49-F238E27FC236}">
+                <a16:creationId xmlns:a16="http://schemas.microsoft.com/office/drawing/2014/main" id="{A99285B8-BA11-2B0B-2E85-CB32783D605F}"/>
+              </a:ext>
+            </a:extLst>
+          </p:cNvPr>
+          <p:cNvSpPr>
+            <a:spLocks noGrp="1"/>
+          </p:cNvSpPr>
+          <p:nvPr>
+            <p:ph type="title"/>
+          </p:nvPr>
+        </p:nvSpPr>
+        <p:spPr>
+          <a:xfrm>
+            <a:off x="401473" y="201086"/>
+            <a:ext cx="10952326" cy="929779"/>
+          </a:xfrm>
+        </p:spPr>
+        <p:txBody>
+          <a:bodyPr/>
+          <a:lstStyle/>
+          <a:p>
+            <a:r>
+              <a:rPr lang="en-US" dirty="0"/>
+              <a:t>SLIDES ON CUSTOMER SEGMENTATION HERE…</a:t>
+            </a:r>
+          </a:p>
+        </p:txBody>
+      </p:sp>
+      <p:sp>
+        <p:nvSpPr>
+          <p:cNvPr id="29" name="Text Placeholder 28">
+            <a:extLst>
+              <a:ext uri="{FF2B5EF4-FFF2-40B4-BE49-F238E27FC236}">
+                <a16:creationId xmlns:a16="http://schemas.microsoft.com/office/drawing/2014/main" id="{FB50434A-AD39-65C4-8EDE-29571A3AC279}"/>
+              </a:ext>
+            </a:extLst>
+          </p:cNvPr>
+          <p:cNvSpPr>
+            <a:spLocks noGrp="1"/>
+          </p:cNvSpPr>
+          <p:nvPr>
+            <p:ph type="body" sz="quarter" idx="28"/>
+          </p:nvPr>
+        </p:nvSpPr>
+        <p:spPr>
+          <a:xfrm>
+            <a:off x="838201" y="5602406"/>
+            <a:ext cx="10550420" cy="753944"/>
+          </a:xfrm>
+        </p:spPr>
+        <p:txBody>
+          <a:bodyPr/>
+          <a:lstStyle/>
+          <a:p>
+            <a:r>
+              <a:rPr lang="en-SG" dirty="0" err="1"/>
+              <a:t>xxxx</a:t>
+            </a:r>
+            <a:endParaRPr lang="en-SG" dirty="0"/>
+          </a:p>
+        </p:txBody>
+      </p:sp>
+      <p:sp>
+        <p:nvSpPr>
+          <p:cNvPr id="3" name="Date Placeholder 10">
+            <a:extLst>
+              <a:ext uri="{FF2B5EF4-FFF2-40B4-BE49-F238E27FC236}">
+                <a16:creationId xmlns:a16="http://schemas.microsoft.com/office/drawing/2014/main" id="{E04DFB6D-4926-3BD7-55C0-87FCEBDB7785}"/>
+              </a:ext>
+            </a:extLst>
+          </p:cNvPr>
+          <p:cNvSpPr txBox="1">
+            <a:spLocks/>
+          </p:cNvSpPr>
+          <p:nvPr/>
+        </p:nvSpPr>
+        <p:spPr>
+          <a:xfrm>
+            <a:off x="838200" y="6356350"/>
+            <a:ext cx="2743200" cy="365125"/>
+          </a:xfrm>
+          <a:prstGeom prst="rect">
+            <a:avLst/>
+          </a:prstGeom>
+        </p:spPr>
+        <p:txBody>
+          <a:bodyPr/>
+          <a:lstStyle>
+            <a:defPPr>
+              <a:defRPr lang="en-US"/>
+            </a:defPPr>
+            <a:lvl1pPr marL="0" algn="l" defTabSz="914400" rtl="0" eaLnBrk="1" latinLnBrk="0" hangingPunct="1">
+              <a:defRPr sz="1800" kern="1200">
+                <a:solidFill>
+                  <a:schemeClr val="tx1"/>
+                </a:solidFill>
+                <a:latin typeface="+mn-lt"/>
+                <a:ea typeface="+mn-ea"/>
+                <a:cs typeface="+mn-cs"/>
+              </a:defRPr>
+            </a:lvl1pPr>
+            <a:lvl2pPr marL="457200" algn="l" defTabSz="914400" rtl="0" eaLnBrk="1" latinLnBrk="0" hangingPunct="1">
+              <a:defRPr sz="1800" kern="1200">
+                <a:solidFill>
+                  <a:schemeClr val="tx1"/>
+                </a:solidFill>
+                <a:latin typeface="+mn-lt"/>
+                <a:ea typeface="+mn-ea"/>
+                <a:cs typeface="+mn-cs"/>
+              </a:defRPr>
+            </a:lvl2pPr>
+            <a:lvl3pPr marL="914400" algn="l" defTabSz="914400" rtl="0" eaLnBrk="1" latinLnBrk="0" hangingPunct="1">
+              <a:defRPr sz="1800" kern="1200">
+                <a:solidFill>
+                  <a:schemeClr val="tx1"/>
+                </a:solidFill>
+                <a:latin typeface="+mn-lt"/>
+                <a:ea typeface="+mn-ea"/>
+                <a:cs typeface="+mn-cs"/>
+              </a:defRPr>
+            </a:lvl3pPr>
+            <a:lvl4pPr marL="1371600" algn="l" defTabSz="914400" rtl="0" eaLnBrk="1" latinLnBrk="0" hangingPunct="1">
+              <a:defRPr sz="1800" kern="1200">
+                <a:solidFill>
+                  <a:schemeClr val="tx1"/>
+                </a:solidFill>
+                <a:latin typeface="+mn-lt"/>
+                <a:ea typeface="+mn-ea"/>
+                <a:cs typeface="+mn-cs"/>
+              </a:defRPr>
+            </a:lvl4pPr>
+            <a:lvl5pPr marL="1828800" algn="l" defTabSz="914400" rtl="0" eaLnBrk="1" latinLnBrk="0" hangingPunct="1">
+              <a:defRPr sz="1800" kern="1200">
+                <a:solidFill>
+                  <a:schemeClr val="tx1"/>
+                </a:solidFill>
+                <a:latin typeface="+mn-lt"/>
+                <a:ea typeface="+mn-ea"/>
+                <a:cs typeface="+mn-cs"/>
+              </a:defRPr>
+            </a:lvl5pPr>
+            <a:lvl6pPr marL="2286000" algn="l" defTabSz="914400" rtl="0" eaLnBrk="1" latinLnBrk="0" hangingPunct="1">
+              <a:defRPr sz="1800" kern="1200">
+                <a:solidFill>
+                  <a:schemeClr val="tx1"/>
+                </a:solidFill>
+                <a:latin typeface="+mn-lt"/>
+                <a:ea typeface="+mn-ea"/>
+                <a:cs typeface="+mn-cs"/>
+              </a:defRPr>
+            </a:lvl6pPr>
+            <a:lvl7pPr marL="2743200" algn="l" defTabSz="914400" rtl="0" eaLnBrk="1" latinLnBrk="0" hangingPunct="1">
+              <a:defRPr sz="1800" kern="1200">
+                <a:solidFill>
+                  <a:schemeClr val="tx1"/>
+                </a:solidFill>
+                <a:latin typeface="+mn-lt"/>
+                <a:ea typeface="+mn-ea"/>
+                <a:cs typeface="+mn-cs"/>
+              </a:defRPr>
+            </a:lvl7pPr>
+            <a:lvl8pPr marL="3200400" algn="l" defTabSz="914400" rtl="0" eaLnBrk="1" latinLnBrk="0" hangingPunct="1">
+              <a:defRPr sz="1800" kern="1200">
+                <a:solidFill>
+                  <a:schemeClr val="tx1"/>
+                </a:solidFill>
+                <a:latin typeface="+mn-lt"/>
+                <a:ea typeface="+mn-ea"/>
+                <a:cs typeface="+mn-cs"/>
+              </a:defRPr>
+            </a:lvl8pPr>
+            <a:lvl9pPr marL="3657600" algn="l" defTabSz="914400" rtl="0" eaLnBrk="1" latinLnBrk="0" hangingPunct="1">
+              <a:defRPr sz="1800" kern="1200">
+                <a:solidFill>
+                  <a:schemeClr val="tx1"/>
+                </a:solidFill>
+                <a:latin typeface="+mn-lt"/>
+                <a:ea typeface="+mn-ea"/>
+                <a:cs typeface="+mn-cs"/>
+              </a:defRPr>
+            </a:lvl9pPr>
+          </a:lstStyle>
+          <a:p>
+            <a:r>
+              <a:rPr lang="en-US" sz="900" dirty="0"/>
+              <a:t>1nsight</a:t>
+            </a:r>
+          </a:p>
+        </p:txBody>
+      </p:sp>
+      <p:sp>
+        <p:nvSpPr>
+          <p:cNvPr id="4" name="Footer Placeholder 11">
+            <a:extLst>
+              <a:ext uri="{FF2B5EF4-FFF2-40B4-BE49-F238E27FC236}">
+                <a16:creationId xmlns:a16="http://schemas.microsoft.com/office/drawing/2014/main" id="{99D06181-1083-7D73-7A57-55E4F2171777}"/>
+              </a:ext>
+            </a:extLst>
+          </p:cNvPr>
+          <p:cNvSpPr txBox="1">
+            <a:spLocks/>
+          </p:cNvSpPr>
+          <p:nvPr/>
+        </p:nvSpPr>
+        <p:spPr>
+          <a:xfrm>
+            <a:off x="6155823" y="6356350"/>
+            <a:ext cx="1808712" cy="365125"/>
+          </a:xfrm>
+          <a:prstGeom prst="rect">
+            <a:avLst/>
+          </a:prstGeom>
+        </p:spPr>
+        <p:txBody>
+          <a:bodyPr/>
+          <a:lstStyle>
+            <a:defPPr>
+              <a:defRPr lang="en-US"/>
+            </a:defPPr>
+            <a:lvl1pPr marL="0" algn="l" defTabSz="914400" rtl="0" eaLnBrk="1" latinLnBrk="0" hangingPunct="1">
+              <a:defRPr sz="1800" kern="1200">
+                <a:solidFill>
+                  <a:schemeClr val="tx1"/>
+                </a:solidFill>
+                <a:latin typeface="+mn-lt"/>
+                <a:ea typeface="+mn-ea"/>
+                <a:cs typeface="+mn-cs"/>
+              </a:defRPr>
+            </a:lvl1pPr>
+            <a:lvl2pPr marL="457200" algn="l" defTabSz="914400" rtl="0" eaLnBrk="1" latinLnBrk="0" hangingPunct="1">
+              <a:defRPr sz="1800" kern="1200">
+                <a:solidFill>
+                  <a:schemeClr val="tx1"/>
+                </a:solidFill>
+                <a:latin typeface="+mn-lt"/>
+                <a:ea typeface="+mn-ea"/>
+                <a:cs typeface="+mn-cs"/>
+              </a:defRPr>
+            </a:lvl2pPr>
+            <a:lvl3pPr marL="914400" algn="l" defTabSz="914400" rtl="0" eaLnBrk="1" latinLnBrk="0" hangingPunct="1">
+              <a:defRPr sz="1800" kern="1200">
+                <a:solidFill>
+                  <a:schemeClr val="tx1"/>
+                </a:solidFill>
+                <a:latin typeface="+mn-lt"/>
+                <a:ea typeface="+mn-ea"/>
+                <a:cs typeface="+mn-cs"/>
+              </a:defRPr>
+            </a:lvl3pPr>
+            <a:lvl4pPr marL="1371600" algn="l" defTabSz="914400" rtl="0" eaLnBrk="1" latinLnBrk="0" hangingPunct="1">
+              <a:defRPr sz="1800" kern="1200">
+                <a:solidFill>
+                  <a:schemeClr val="tx1"/>
+                </a:solidFill>
+                <a:latin typeface="+mn-lt"/>
+                <a:ea typeface="+mn-ea"/>
+                <a:cs typeface="+mn-cs"/>
+              </a:defRPr>
+            </a:lvl4pPr>
+            <a:lvl5pPr marL="1828800" algn="l" defTabSz="914400" rtl="0" eaLnBrk="1" latinLnBrk="0" hangingPunct="1">
+              <a:defRPr sz="1800" kern="1200">
+                <a:solidFill>
+                  <a:schemeClr val="tx1"/>
+                </a:solidFill>
+                <a:latin typeface="+mn-lt"/>
+                <a:ea typeface="+mn-ea"/>
+                <a:cs typeface="+mn-cs"/>
+              </a:defRPr>
+            </a:lvl5pPr>
+            <a:lvl6pPr marL="2286000" algn="l" defTabSz="914400" rtl="0" eaLnBrk="1" latinLnBrk="0" hangingPunct="1">
+              <a:defRPr sz="1800" kern="1200">
+                <a:solidFill>
+                  <a:schemeClr val="tx1"/>
+                </a:solidFill>
+                <a:latin typeface="+mn-lt"/>
+                <a:ea typeface="+mn-ea"/>
+                <a:cs typeface="+mn-cs"/>
+              </a:defRPr>
+            </a:lvl6pPr>
+            <a:lvl7pPr marL="2743200" algn="l" defTabSz="914400" rtl="0" eaLnBrk="1" latinLnBrk="0" hangingPunct="1">
+              <a:defRPr sz="1800" kern="1200">
+                <a:solidFill>
+                  <a:schemeClr val="tx1"/>
+                </a:solidFill>
+                <a:latin typeface="+mn-lt"/>
+                <a:ea typeface="+mn-ea"/>
+                <a:cs typeface="+mn-cs"/>
+              </a:defRPr>
+            </a:lvl7pPr>
+            <a:lvl8pPr marL="3200400" algn="l" defTabSz="914400" rtl="0" eaLnBrk="1" latinLnBrk="0" hangingPunct="1">
+              <a:defRPr sz="1800" kern="1200">
+                <a:solidFill>
+                  <a:schemeClr val="tx1"/>
+                </a:solidFill>
+                <a:latin typeface="+mn-lt"/>
+                <a:ea typeface="+mn-ea"/>
+                <a:cs typeface="+mn-cs"/>
+              </a:defRPr>
+            </a:lvl8pPr>
+            <a:lvl9pPr marL="3657600" algn="l" defTabSz="914400" rtl="0" eaLnBrk="1" latinLnBrk="0" hangingPunct="1">
+              <a:defRPr sz="1800" kern="1200">
+                <a:solidFill>
+                  <a:schemeClr val="tx1"/>
+                </a:solidFill>
+                <a:latin typeface="+mn-lt"/>
+                <a:ea typeface="+mn-ea"/>
+                <a:cs typeface="+mn-cs"/>
+              </a:defRPr>
+            </a:lvl9pPr>
+          </a:lstStyle>
+          <a:p>
+            <a:r>
+              <a:rPr lang="en-US" sz="900" dirty="0"/>
+              <a:t>CUSTOMER SEGMENTATION</a:t>
+            </a:r>
+          </a:p>
+        </p:txBody>
+      </p:sp>
+      <p:sp>
+        <p:nvSpPr>
+          <p:cNvPr id="5" name="Slide Number Placeholder 12">
+            <a:extLst>
+              <a:ext uri="{FF2B5EF4-FFF2-40B4-BE49-F238E27FC236}">
+                <a16:creationId xmlns:a16="http://schemas.microsoft.com/office/drawing/2014/main" id="{89F9702B-ECD0-AB99-2DB4-3E2786C3CCB9}"/>
+              </a:ext>
+            </a:extLst>
+          </p:cNvPr>
+          <p:cNvSpPr txBox="1">
+            <a:spLocks/>
+          </p:cNvSpPr>
+          <p:nvPr/>
+        </p:nvSpPr>
+        <p:spPr>
+          <a:xfrm>
+            <a:off x="10810874" y="6356350"/>
+            <a:ext cx="542925" cy="365125"/>
+          </a:xfrm>
+          <a:prstGeom prst="rect">
+            <a:avLst/>
+          </a:prstGeom>
+        </p:spPr>
+        <p:txBody>
+          <a:bodyPr/>
+          <a:lstStyle>
+            <a:defPPr>
+              <a:defRPr lang="en-US"/>
+            </a:defPPr>
+            <a:lvl1pPr marL="0" algn="l" defTabSz="914400" rtl="0" eaLnBrk="1" latinLnBrk="0" hangingPunct="1">
+              <a:defRPr sz="1800" kern="1200">
+                <a:solidFill>
+                  <a:schemeClr val="tx1"/>
+                </a:solidFill>
+                <a:latin typeface="+mn-lt"/>
+                <a:ea typeface="+mn-ea"/>
+                <a:cs typeface="+mn-cs"/>
+              </a:defRPr>
+            </a:lvl1pPr>
+            <a:lvl2pPr marL="457200" algn="l" defTabSz="914400" rtl="0" eaLnBrk="1" latinLnBrk="0" hangingPunct="1">
+              <a:defRPr sz="1800" kern="1200">
+                <a:solidFill>
+                  <a:schemeClr val="tx1"/>
+                </a:solidFill>
+                <a:latin typeface="+mn-lt"/>
+                <a:ea typeface="+mn-ea"/>
+                <a:cs typeface="+mn-cs"/>
+              </a:defRPr>
+            </a:lvl2pPr>
+            <a:lvl3pPr marL="914400" algn="l" defTabSz="914400" rtl="0" eaLnBrk="1" latinLnBrk="0" hangingPunct="1">
+              <a:defRPr sz="1800" kern="1200">
+                <a:solidFill>
+                  <a:schemeClr val="tx1"/>
+                </a:solidFill>
+                <a:latin typeface="+mn-lt"/>
+                <a:ea typeface="+mn-ea"/>
+                <a:cs typeface="+mn-cs"/>
+              </a:defRPr>
+            </a:lvl3pPr>
+            <a:lvl4pPr marL="1371600" algn="l" defTabSz="914400" rtl="0" eaLnBrk="1" latinLnBrk="0" hangingPunct="1">
+              <a:defRPr sz="1800" kern="1200">
+                <a:solidFill>
+                  <a:schemeClr val="tx1"/>
+                </a:solidFill>
+                <a:latin typeface="+mn-lt"/>
+                <a:ea typeface="+mn-ea"/>
+                <a:cs typeface="+mn-cs"/>
+              </a:defRPr>
+            </a:lvl4pPr>
+            <a:lvl5pPr marL="1828800" algn="l" defTabSz="914400" rtl="0" eaLnBrk="1" latinLnBrk="0" hangingPunct="1">
+              <a:defRPr sz="1800" kern="1200">
+                <a:solidFill>
+                  <a:schemeClr val="tx1"/>
+                </a:solidFill>
+                <a:latin typeface="+mn-lt"/>
+                <a:ea typeface="+mn-ea"/>
+                <a:cs typeface="+mn-cs"/>
+              </a:defRPr>
+            </a:lvl5pPr>
+            <a:lvl6pPr marL="2286000" algn="l" defTabSz="914400" rtl="0" eaLnBrk="1" latinLnBrk="0" hangingPunct="1">
+              <a:defRPr sz="1800" kern="1200">
+                <a:solidFill>
+                  <a:schemeClr val="tx1"/>
+                </a:solidFill>
+                <a:latin typeface="+mn-lt"/>
+                <a:ea typeface="+mn-ea"/>
+                <a:cs typeface="+mn-cs"/>
+              </a:defRPr>
+            </a:lvl6pPr>
+            <a:lvl7pPr marL="2743200" algn="l" defTabSz="914400" rtl="0" eaLnBrk="1" latinLnBrk="0" hangingPunct="1">
+              <a:defRPr sz="1800" kern="1200">
+                <a:solidFill>
+                  <a:schemeClr val="tx1"/>
+                </a:solidFill>
+                <a:latin typeface="+mn-lt"/>
+                <a:ea typeface="+mn-ea"/>
+                <a:cs typeface="+mn-cs"/>
+              </a:defRPr>
+            </a:lvl7pPr>
+            <a:lvl8pPr marL="3200400" algn="l" defTabSz="914400" rtl="0" eaLnBrk="1" latinLnBrk="0" hangingPunct="1">
+              <a:defRPr sz="1800" kern="1200">
+                <a:solidFill>
+                  <a:schemeClr val="tx1"/>
+                </a:solidFill>
+                <a:latin typeface="+mn-lt"/>
+                <a:ea typeface="+mn-ea"/>
+                <a:cs typeface="+mn-cs"/>
+              </a:defRPr>
+            </a:lvl8pPr>
+            <a:lvl9pPr marL="3657600" algn="l" defTabSz="914400" rtl="0" eaLnBrk="1" latinLnBrk="0" hangingPunct="1">
+              <a:defRPr sz="1800" kern="1200">
+                <a:solidFill>
+                  <a:schemeClr val="tx1"/>
+                </a:solidFill>
+                <a:latin typeface="+mn-lt"/>
+                <a:ea typeface="+mn-ea"/>
+                <a:cs typeface="+mn-cs"/>
+              </a:defRPr>
+            </a:lvl9pPr>
+          </a:lstStyle>
+          <a:p>
+            <a:fld id="{B5CEABB6-07DC-46E8-9B57-56EC44A396E5}" type="slidenum">
+              <a:rPr lang="en-US" sz="900" smtClean="0"/>
+              <a:pPr/>
+              <a:t>16</a:t>
+            </a:fld>
+            <a:endParaRPr lang="en-US" sz="900" dirty="0"/>
+          </a:p>
+        </p:txBody>
+      </p:sp>
+    </p:spTree>
+    <p:extLst>
+      <p:ext uri="{BB962C8B-B14F-4D97-AF65-F5344CB8AC3E}">
+        <p14:creationId xmlns:p14="http://schemas.microsoft.com/office/powerpoint/2010/main" val="78925653"/>
+      </p:ext>
+    </p:extLst>
+  </p:cSld>
+  <p:clrMapOvr>
+    <a:masterClrMapping/>
+  </p:clrMapOvr>
+</p:sld>
+</file>
+
+<file path=ppt/slides/slide17.xml><?xml version="1.0" encoding="utf-8"?>
+<p:sld xmlns:a="http://schemas.openxmlformats.org/drawingml/2006/main" xmlns:r="http://schemas.openxmlformats.org/officeDocument/2006/relationships" xmlns:p="http://schemas.openxmlformats.org/presentationml/2006/main">
+  <p:cSld>
+    <p:spTree>
+      <p:nvGrpSpPr>
+        <p:cNvPr id="1" name="">
+          <a:extLst>
+            <a:ext uri="{FF2B5EF4-FFF2-40B4-BE49-F238E27FC236}">
+              <a16:creationId xmlns:a16="http://schemas.microsoft.com/office/drawing/2014/main" id="{813AA1A7-0295-8903-CA44-33DDC46D23EB}"/>
+            </a:ext>
+          </a:extLst>
+        </p:cNvPr>
+        <p:cNvGrpSpPr/>
+        <p:nvPr/>
+      </p:nvGrpSpPr>
+      <p:grpSpPr>
+        <a:xfrm>
+          <a:off x="0" y="0"/>
+          <a:ext cx="0" cy="0"/>
+          <a:chOff x="0" y="0"/>
+          <a:chExt cx="0" cy="0"/>
+        </a:xfrm>
+      </p:grpSpPr>
+      <p:sp>
+        <p:nvSpPr>
+          <p:cNvPr id="2" name="Title 1">
+            <a:extLst>
+              <a:ext uri="{FF2B5EF4-FFF2-40B4-BE49-F238E27FC236}">
+                <a16:creationId xmlns:a16="http://schemas.microsoft.com/office/drawing/2014/main" id="{D8365815-A38F-0A5B-EE10-DCCCCAFC311E}"/>
+              </a:ext>
+            </a:extLst>
+          </p:cNvPr>
+          <p:cNvSpPr>
+            <a:spLocks noGrp="1"/>
+          </p:cNvSpPr>
+          <p:nvPr>
+            <p:ph type="ctrTitle"/>
+          </p:nvPr>
+        </p:nvSpPr>
+        <p:spPr>
+          <a:xfrm>
+            <a:off x="6304547" y="2165685"/>
+            <a:ext cx="5370897" cy="2121082"/>
+          </a:xfrm>
+        </p:spPr>
+        <p:txBody>
+          <a:bodyPr/>
+          <a:lstStyle/>
+          <a:p>
+            <a:r>
+              <a:rPr lang="en-US" dirty="0"/>
+              <a:t>Seller Score Card</a:t>
+            </a:r>
+            <a:br>
+              <a:rPr lang="en-US" dirty="0"/>
+            </a:br>
+            <a:br>
+              <a:rPr lang="en-US" dirty="0"/>
+            </a:br>
+            <a:r>
+              <a:rPr lang="en-US" sz="2400" i="1" dirty="0"/>
+              <a:t>Enhancing Platform Quality</a:t>
+            </a:r>
+            <a:endParaRPr lang="en-US" i="1" dirty="0"/>
+          </a:p>
+        </p:txBody>
+      </p:sp>
+    </p:spTree>
+    <p:extLst>
+      <p:ext uri="{BB962C8B-B14F-4D97-AF65-F5344CB8AC3E}">
+        <p14:creationId xmlns:p14="http://schemas.microsoft.com/office/powerpoint/2010/main" val="3054846938"/>
+      </p:ext>
+    </p:extLst>
+  </p:cSld>
+  <p:clrMapOvr>
+    <a:masterClrMapping/>
+  </p:clrMapOvr>
+</p:sld>
+</file>
+
+<file path=ppt/slides/slide18.xml><?xml version="1.0" encoding="utf-8"?>
+<p:sld xmlns:a="http://schemas.openxmlformats.org/drawingml/2006/main" xmlns:r="http://schemas.openxmlformats.org/officeDocument/2006/relationships" xmlns:p="http://schemas.openxmlformats.org/presentationml/2006/main">
+  <p:cSld>
+    <p:spTree>
+      <p:nvGrpSpPr>
+        <p:cNvPr id="1" name="">
+          <a:extLst>
+            <a:ext uri="{FF2B5EF4-FFF2-40B4-BE49-F238E27FC236}">
+              <a16:creationId xmlns:a16="http://schemas.microsoft.com/office/drawing/2014/main" id="{AB6058AC-DE82-4F1F-3CFF-09C7194F796F}"/>
+            </a:ext>
+          </a:extLst>
+        </p:cNvPr>
+        <p:cNvGrpSpPr/>
+        <p:nvPr/>
+      </p:nvGrpSpPr>
+      <p:grpSpPr>
+        <a:xfrm>
+          <a:off x="0" y="0"/>
+          <a:ext cx="0" cy="0"/>
+          <a:chOff x="0" y="0"/>
+          <a:chExt cx="0" cy="0"/>
+        </a:xfrm>
+      </p:grpSpPr>
+      <p:sp>
+        <p:nvSpPr>
+          <p:cNvPr id="2" name="Title 1">
+            <a:extLst>
+              <a:ext uri="{FF2B5EF4-FFF2-40B4-BE49-F238E27FC236}">
+                <a16:creationId xmlns:a16="http://schemas.microsoft.com/office/drawing/2014/main" id="{1FCE6382-DCDD-9225-F5FD-2E470D0F9E93}"/>
+              </a:ext>
+            </a:extLst>
+          </p:cNvPr>
+          <p:cNvSpPr>
+            <a:spLocks noGrp="1"/>
+          </p:cNvSpPr>
+          <p:nvPr>
+            <p:ph type="title"/>
+          </p:nvPr>
+        </p:nvSpPr>
+        <p:spPr>
+          <a:xfrm>
+            <a:off x="401473" y="201086"/>
+            <a:ext cx="10952326" cy="929779"/>
+          </a:xfrm>
+        </p:spPr>
+        <p:txBody>
+          <a:bodyPr/>
+          <a:lstStyle/>
+          <a:p>
+            <a:r>
+              <a:rPr lang="en-US" dirty="0"/>
+              <a:t>SLIDES ON SELLER SCORE CARD HERE…</a:t>
+            </a:r>
+          </a:p>
+        </p:txBody>
+      </p:sp>
+      <p:sp>
+        <p:nvSpPr>
+          <p:cNvPr id="29" name="Text Placeholder 28">
+            <a:extLst>
+              <a:ext uri="{FF2B5EF4-FFF2-40B4-BE49-F238E27FC236}">
+                <a16:creationId xmlns:a16="http://schemas.microsoft.com/office/drawing/2014/main" id="{E8F1E9A8-0CE1-FC59-8CBC-2D4550205CAC}"/>
+              </a:ext>
+            </a:extLst>
+          </p:cNvPr>
+          <p:cNvSpPr>
+            <a:spLocks noGrp="1"/>
+          </p:cNvSpPr>
+          <p:nvPr>
+            <p:ph type="body" sz="quarter" idx="28"/>
+          </p:nvPr>
+        </p:nvSpPr>
+        <p:spPr>
+          <a:xfrm>
+            <a:off x="838201" y="5602406"/>
+            <a:ext cx="10550420" cy="753944"/>
+          </a:xfrm>
+        </p:spPr>
+        <p:txBody>
+          <a:bodyPr/>
+          <a:lstStyle/>
+          <a:p>
+            <a:r>
+              <a:rPr lang="en-SG" dirty="0" err="1"/>
+              <a:t>xxxx</a:t>
+            </a:r>
+            <a:endParaRPr lang="en-SG" dirty="0"/>
+          </a:p>
+        </p:txBody>
+      </p:sp>
+      <p:sp>
+        <p:nvSpPr>
+          <p:cNvPr id="3" name="Date Placeholder 10">
+            <a:extLst>
+              <a:ext uri="{FF2B5EF4-FFF2-40B4-BE49-F238E27FC236}">
+                <a16:creationId xmlns:a16="http://schemas.microsoft.com/office/drawing/2014/main" id="{9CF9744E-A7BE-EDE4-68A3-ACB5048C27B1}"/>
+              </a:ext>
+            </a:extLst>
+          </p:cNvPr>
+          <p:cNvSpPr txBox="1">
+            <a:spLocks/>
+          </p:cNvSpPr>
+          <p:nvPr/>
+        </p:nvSpPr>
+        <p:spPr>
+          <a:xfrm>
+            <a:off x="838200" y="6356350"/>
+            <a:ext cx="2743200" cy="365125"/>
+          </a:xfrm>
+          <a:prstGeom prst="rect">
+            <a:avLst/>
+          </a:prstGeom>
+        </p:spPr>
+        <p:txBody>
+          <a:bodyPr/>
+          <a:lstStyle>
+            <a:defPPr>
+              <a:defRPr lang="en-US"/>
+            </a:defPPr>
+            <a:lvl1pPr marL="0" algn="l" defTabSz="914400" rtl="0" eaLnBrk="1" latinLnBrk="0" hangingPunct="1">
+              <a:defRPr sz="1800" kern="1200">
+                <a:solidFill>
+                  <a:schemeClr val="tx1"/>
+                </a:solidFill>
+                <a:latin typeface="+mn-lt"/>
+                <a:ea typeface="+mn-ea"/>
+                <a:cs typeface="+mn-cs"/>
+              </a:defRPr>
+            </a:lvl1pPr>
+            <a:lvl2pPr marL="457200" algn="l" defTabSz="914400" rtl="0" eaLnBrk="1" latinLnBrk="0" hangingPunct="1">
+              <a:defRPr sz="1800" kern="1200">
+                <a:solidFill>
+                  <a:schemeClr val="tx1"/>
+                </a:solidFill>
+                <a:latin typeface="+mn-lt"/>
+                <a:ea typeface="+mn-ea"/>
+                <a:cs typeface="+mn-cs"/>
+              </a:defRPr>
+            </a:lvl2pPr>
+            <a:lvl3pPr marL="914400" algn="l" defTabSz="914400" rtl="0" eaLnBrk="1" latinLnBrk="0" hangingPunct="1">
+              <a:defRPr sz="1800" kern="1200">
+                <a:solidFill>
+                  <a:schemeClr val="tx1"/>
+                </a:solidFill>
+                <a:latin typeface="+mn-lt"/>
+                <a:ea typeface="+mn-ea"/>
+                <a:cs typeface="+mn-cs"/>
+              </a:defRPr>
+            </a:lvl3pPr>
+            <a:lvl4pPr marL="1371600" algn="l" defTabSz="914400" rtl="0" eaLnBrk="1" latinLnBrk="0" hangingPunct="1">
+              <a:defRPr sz="1800" kern="1200">
+                <a:solidFill>
+                  <a:schemeClr val="tx1"/>
+                </a:solidFill>
+                <a:latin typeface="+mn-lt"/>
+                <a:ea typeface="+mn-ea"/>
+                <a:cs typeface="+mn-cs"/>
+              </a:defRPr>
+            </a:lvl4pPr>
+            <a:lvl5pPr marL="1828800" algn="l" defTabSz="914400" rtl="0" eaLnBrk="1" latinLnBrk="0" hangingPunct="1">
+              <a:defRPr sz="1800" kern="1200">
+                <a:solidFill>
+                  <a:schemeClr val="tx1"/>
+                </a:solidFill>
+                <a:latin typeface="+mn-lt"/>
+                <a:ea typeface="+mn-ea"/>
+                <a:cs typeface="+mn-cs"/>
+              </a:defRPr>
+            </a:lvl5pPr>
+            <a:lvl6pPr marL="2286000" algn="l" defTabSz="914400" rtl="0" eaLnBrk="1" latinLnBrk="0" hangingPunct="1">
+              <a:defRPr sz="1800" kern="1200">
+                <a:solidFill>
+                  <a:schemeClr val="tx1"/>
+                </a:solidFill>
+                <a:latin typeface="+mn-lt"/>
+                <a:ea typeface="+mn-ea"/>
+                <a:cs typeface="+mn-cs"/>
+              </a:defRPr>
+            </a:lvl6pPr>
+            <a:lvl7pPr marL="2743200" algn="l" defTabSz="914400" rtl="0" eaLnBrk="1" latinLnBrk="0" hangingPunct="1">
+              <a:defRPr sz="1800" kern="1200">
+                <a:solidFill>
+                  <a:schemeClr val="tx1"/>
+                </a:solidFill>
+                <a:latin typeface="+mn-lt"/>
+                <a:ea typeface="+mn-ea"/>
+                <a:cs typeface="+mn-cs"/>
+              </a:defRPr>
+            </a:lvl7pPr>
+            <a:lvl8pPr marL="3200400" algn="l" defTabSz="914400" rtl="0" eaLnBrk="1" latinLnBrk="0" hangingPunct="1">
+              <a:defRPr sz="1800" kern="1200">
+                <a:solidFill>
+                  <a:schemeClr val="tx1"/>
+                </a:solidFill>
+                <a:latin typeface="+mn-lt"/>
+                <a:ea typeface="+mn-ea"/>
+                <a:cs typeface="+mn-cs"/>
+              </a:defRPr>
+            </a:lvl8pPr>
+            <a:lvl9pPr marL="3657600" algn="l" defTabSz="914400" rtl="0" eaLnBrk="1" latinLnBrk="0" hangingPunct="1">
+              <a:defRPr sz="1800" kern="1200">
+                <a:solidFill>
+                  <a:schemeClr val="tx1"/>
+                </a:solidFill>
+                <a:latin typeface="+mn-lt"/>
+                <a:ea typeface="+mn-ea"/>
+                <a:cs typeface="+mn-cs"/>
+              </a:defRPr>
+            </a:lvl9pPr>
+          </a:lstStyle>
+          <a:p>
+            <a:r>
+              <a:rPr lang="en-US" sz="900" dirty="0"/>
+              <a:t>1nsight</a:t>
+            </a:r>
+          </a:p>
+        </p:txBody>
+      </p:sp>
+      <p:sp>
+        <p:nvSpPr>
+          <p:cNvPr id="4" name="Footer Placeholder 11">
+            <a:extLst>
+              <a:ext uri="{FF2B5EF4-FFF2-40B4-BE49-F238E27FC236}">
+                <a16:creationId xmlns:a16="http://schemas.microsoft.com/office/drawing/2014/main" id="{FB4DD39C-8243-D256-AC2F-BCCE13F7DE18}"/>
+              </a:ext>
+            </a:extLst>
+          </p:cNvPr>
+          <p:cNvSpPr txBox="1">
+            <a:spLocks/>
+          </p:cNvSpPr>
+          <p:nvPr/>
+        </p:nvSpPr>
+        <p:spPr>
+          <a:xfrm>
+            <a:off x="6155823" y="6356350"/>
+            <a:ext cx="1808712" cy="365125"/>
+          </a:xfrm>
+          <a:prstGeom prst="rect">
+            <a:avLst/>
+          </a:prstGeom>
+        </p:spPr>
+        <p:txBody>
+          <a:bodyPr/>
+          <a:lstStyle>
+            <a:defPPr>
+              <a:defRPr lang="en-US"/>
+            </a:defPPr>
+            <a:lvl1pPr marL="0" algn="l" defTabSz="914400" rtl="0" eaLnBrk="1" latinLnBrk="0" hangingPunct="1">
+              <a:defRPr sz="1800" kern="1200">
+                <a:solidFill>
+                  <a:schemeClr val="tx1"/>
+                </a:solidFill>
+                <a:latin typeface="+mn-lt"/>
+                <a:ea typeface="+mn-ea"/>
+                <a:cs typeface="+mn-cs"/>
+              </a:defRPr>
+            </a:lvl1pPr>
+            <a:lvl2pPr marL="457200" algn="l" defTabSz="914400" rtl="0" eaLnBrk="1" latinLnBrk="0" hangingPunct="1">
+              <a:defRPr sz="1800" kern="1200">
+                <a:solidFill>
+                  <a:schemeClr val="tx1"/>
+                </a:solidFill>
+                <a:latin typeface="+mn-lt"/>
+                <a:ea typeface="+mn-ea"/>
+                <a:cs typeface="+mn-cs"/>
+              </a:defRPr>
+            </a:lvl2pPr>
+            <a:lvl3pPr marL="914400" algn="l" defTabSz="914400" rtl="0" eaLnBrk="1" latinLnBrk="0" hangingPunct="1">
+              <a:defRPr sz="1800" kern="1200">
+                <a:solidFill>
+                  <a:schemeClr val="tx1"/>
+                </a:solidFill>
+                <a:latin typeface="+mn-lt"/>
+                <a:ea typeface="+mn-ea"/>
+                <a:cs typeface="+mn-cs"/>
+              </a:defRPr>
+            </a:lvl3pPr>
+            <a:lvl4pPr marL="1371600" algn="l" defTabSz="914400" rtl="0" eaLnBrk="1" latinLnBrk="0" hangingPunct="1">
+              <a:defRPr sz="1800" kern="1200">
+                <a:solidFill>
+                  <a:schemeClr val="tx1"/>
+                </a:solidFill>
+                <a:latin typeface="+mn-lt"/>
+                <a:ea typeface="+mn-ea"/>
+                <a:cs typeface="+mn-cs"/>
+              </a:defRPr>
+            </a:lvl4pPr>
+            <a:lvl5pPr marL="1828800" algn="l" defTabSz="914400" rtl="0" eaLnBrk="1" latinLnBrk="0" hangingPunct="1">
+              <a:defRPr sz="1800" kern="1200">
+                <a:solidFill>
+                  <a:schemeClr val="tx1"/>
+                </a:solidFill>
+                <a:latin typeface="+mn-lt"/>
+                <a:ea typeface="+mn-ea"/>
+                <a:cs typeface="+mn-cs"/>
+              </a:defRPr>
+            </a:lvl5pPr>
+            <a:lvl6pPr marL="2286000" algn="l" defTabSz="914400" rtl="0" eaLnBrk="1" latinLnBrk="0" hangingPunct="1">
+              <a:defRPr sz="1800" kern="1200">
+                <a:solidFill>
+                  <a:schemeClr val="tx1"/>
+                </a:solidFill>
+                <a:latin typeface="+mn-lt"/>
+                <a:ea typeface="+mn-ea"/>
+                <a:cs typeface="+mn-cs"/>
+              </a:defRPr>
+            </a:lvl6pPr>
+            <a:lvl7pPr marL="2743200" algn="l" defTabSz="914400" rtl="0" eaLnBrk="1" latinLnBrk="0" hangingPunct="1">
+              <a:defRPr sz="1800" kern="1200">
+                <a:solidFill>
+                  <a:schemeClr val="tx1"/>
+                </a:solidFill>
+                <a:latin typeface="+mn-lt"/>
+                <a:ea typeface="+mn-ea"/>
+                <a:cs typeface="+mn-cs"/>
+              </a:defRPr>
+            </a:lvl7pPr>
+            <a:lvl8pPr marL="3200400" algn="l" defTabSz="914400" rtl="0" eaLnBrk="1" latinLnBrk="0" hangingPunct="1">
+              <a:defRPr sz="1800" kern="1200">
+                <a:solidFill>
+                  <a:schemeClr val="tx1"/>
+                </a:solidFill>
+                <a:latin typeface="+mn-lt"/>
+                <a:ea typeface="+mn-ea"/>
+                <a:cs typeface="+mn-cs"/>
+              </a:defRPr>
+            </a:lvl8pPr>
+            <a:lvl9pPr marL="3657600" algn="l" defTabSz="914400" rtl="0" eaLnBrk="1" latinLnBrk="0" hangingPunct="1">
+              <a:defRPr sz="1800" kern="1200">
+                <a:solidFill>
+                  <a:schemeClr val="tx1"/>
+                </a:solidFill>
+                <a:latin typeface="+mn-lt"/>
+                <a:ea typeface="+mn-ea"/>
+                <a:cs typeface="+mn-cs"/>
+              </a:defRPr>
+            </a:lvl9pPr>
+          </a:lstStyle>
+          <a:p>
+            <a:r>
+              <a:rPr lang="en-US" sz="900" dirty="0"/>
+              <a:t>SELLER SCORE CARD</a:t>
+            </a:r>
+          </a:p>
+        </p:txBody>
+      </p:sp>
+      <p:sp>
+        <p:nvSpPr>
+          <p:cNvPr id="5" name="Slide Number Placeholder 12">
+            <a:extLst>
+              <a:ext uri="{FF2B5EF4-FFF2-40B4-BE49-F238E27FC236}">
+                <a16:creationId xmlns:a16="http://schemas.microsoft.com/office/drawing/2014/main" id="{7BD85EDF-FE00-E408-0244-E0FDA5453C88}"/>
+              </a:ext>
+            </a:extLst>
+          </p:cNvPr>
+          <p:cNvSpPr txBox="1">
+            <a:spLocks/>
+          </p:cNvSpPr>
+          <p:nvPr/>
+        </p:nvSpPr>
+        <p:spPr>
+          <a:xfrm>
+            <a:off x="10810874" y="6356350"/>
+            <a:ext cx="542925" cy="365125"/>
+          </a:xfrm>
+          <a:prstGeom prst="rect">
+            <a:avLst/>
+          </a:prstGeom>
+        </p:spPr>
+        <p:txBody>
+          <a:bodyPr/>
+          <a:lstStyle>
+            <a:defPPr>
+              <a:defRPr lang="en-US"/>
+            </a:defPPr>
+            <a:lvl1pPr marL="0" algn="l" defTabSz="914400" rtl="0" eaLnBrk="1" latinLnBrk="0" hangingPunct="1">
+              <a:defRPr sz="1800" kern="1200">
+                <a:solidFill>
+                  <a:schemeClr val="tx1"/>
+                </a:solidFill>
+                <a:latin typeface="+mn-lt"/>
+                <a:ea typeface="+mn-ea"/>
+                <a:cs typeface="+mn-cs"/>
+              </a:defRPr>
+            </a:lvl1pPr>
+            <a:lvl2pPr marL="457200" algn="l" defTabSz="914400" rtl="0" eaLnBrk="1" latinLnBrk="0" hangingPunct="1">
+              <a:defRPr sz="1800" kern="1200">
+                <a:solidFill>
+                  <a:schemeClr val="tx1"/>
+                </a:solidFill>
+                <a:latin typeface="+mn-lt"/>
+                <a:ea typeface="+mn-ea"/>
+                <a:cs typeface="+mn-cs"/>
+              </a:defRPr>
+            </a:lvl2pPr>
+            <a:lvl3pPr marL="914400" algn="l" defTabSz="914400" rtl="0" eaLnBrk="1" latinLnBrk="0" hangingPunct="1">
+              <a:defRPr sz="1800" kern="1200">
+                <a:solidFill>
+                  <a:schemeClr val="tx1"/>
+                </a:solidFill>
+                <a:latin typeface="+mn-lt"/>
+                <a:ea typeface="+mn-ea"/>
+                <a:cs typeface="+mn-cs"/>
+              </a:defRPr>
+            </a:lvl3pPr>
+            <a:lvl4pPr marL="1371600" algn="l" defTabSz="914400" rtl="0" eaLnBrk="1" latinLnBrk="0" hangingPunct="1">
+              <a:defRPr sz="1800" kern="1200">
+                <a:solidFill>
+                  <a:schemeClr val="tx1"/>
+                </a:solidFill>
+                <a:latin typeface="+mn-lt"/>
+                <a:ea typeface="+mn-ea"/>
+                <a:cs typeface="+mn-cs"/>
+              </a:defRPr>
+            </a:lvl4pPr>
+            <a:lvl5pPr marL="1828800" algn="l" defTabSz="914400" rtl="0" eaLnBrk="1" latinLnBrk="0" hangingPunct="1">
+              <a:defRPr sz="1800" kern="1200">
+                <a:solidFill>
+                  <a:schemeClr val="tx1"/>
+                </a:solidFill>
+                <a:latin typeface="+mn-lt"/>
+                <a:ea typeface="+mn-ea"/>
+                <a:cs typeface="+mn-cs"/>
+              </a:defRPr>
+            </a:lvl5pPr>
+            <a:lvl6pPr marL="2286000" algn="l" defTabSz="914400" rtl="0" eaLnBrk="1" latinLnBrk="0" hangingPunct="1">
+              <a:defRPr sz="1800" kern="1200">
+                <a:solidFill>
+                  <a:schemeClr val="tx1"/>
+                </a:solidFill>
+                <a:latin typeface="+mn-lt"/>
+                <a:ea typeface="+mn-ea"/>
+                <a:cs typeface="+mn-cs"/>
+              </a:defRPr>
+            </a:lvl6pPr>
+            <a:lvl7pPr marL="2743200" algn="l" defTabSz="914400" rtl="0" eaLnBrk="1" latinLnBrk="0" hangingPunct="1">
+              <a:defRPr sz="1800" kern="1200">
+                <a:solidFill>
+                  <a:schemeClr val="tx1"/>
+                </a:solidFill>
+                <a:latin typeface="+mn-lt"/>
+                <a:ea typeface="+mn-ea"/>
+                <a:cs typeface="+mn-cs"/>
+              </a:defRPr>
+            </a:lvl7pPr>
+            <a:lvl8pPr marL="3200400" algn="l" defTabSz="914400" rtl="0" eaLnBrk="1" latinLnBrk="0" hangingPunct="1">
+              <a:defRPr sz="1800" kern="1200">
+                <a:solidFill>
+                  <a:schemeClr val="tx1"/>
+                </a:solidFill>
+                <a:latin typeface="+mn-lt"/>
+                <a:ea typeface="+mn-ea"/>
+                <a:cs typeface="+mn-cs"/>
+              </a:defRPr>
+            </a:lvl8pPr>
+            <a:lvl9pPr marL="3657600" algn="l" defTabSz="914400" rtl="0" eaLnBrk="1" latinLnBrk="0" hangingPunct="1">
+              <a:defRPr sz="1800" kern="1200">
+                <a:solidFill>
+                  <a:schemeClr val="tx1"/>
+                </a:solidFill>
+                <a:latin typeface="+mn-lt"/>
+                <a:ea typeface="+mn-ea"/>
+                <a:cs typeface="+mn-cs"/>
+              </a:defRPr>
+            </a:lvl9pPr>
+          </a:lstStyle>
+          <a:p>
+            <a:fld id="{B5CEABB6-07DC-46E8-9B57-56EC44A396E5}" type="slidenum">
+              <a:rPr lang="en-US" sz="900" smtClean="0"/>
+              <a:pPr/>
+              <a:t>18</a:t>
+            </a:fld>
+            <a:endParaRPr lang="en-US" sz="900" dirty="0"/>
+          </a:p>
+        </p:txBody>
+      </p:sp>
+    </p:spTree>
+    <p:extLst>
+      <p:ext uri="{BB962C8B-B14F-4D97-AF65-F5344CB8AC3E}">
+        <p14:creationId xmlns:p14="http://schemas.microsoft.com/office/powerpoint/2010/main" val="300223189"/>
+      </p:ext>
+    </p:extLst>
+  </p:cSld>
+  <p:clrMapOvr>
+    <a:masterClrMapping/>
+  </p:clrMapOvr>
+</p:sld>
+</file>
+
+<file path=ppt/slides/slide19.xml><?xml version="1.0" encoding="utf-8"?>
+<p:sld xmlns:a="http://schemas.openxmlformats.org/drawingml/2006/main" xmlns:r="http://schemas.openxmlformats.org/officeDocument/2006/relationships" xmlns:p="http://schemas.openxmlformats.org/presentationml/2006/main">
+  <p:cSld>
+    <p:spTree>
+      <p:nvGrpSpPr>
+        <p:cNvPr id="1" name=""/>
+        <p:cNvGrpSpPr/>
+        <p:nvPr/>
+      </p:nvGrpSpPr>
+      <p:grpSpPr>
+        <a:xfrm>
+          <a:off x="0" y="0"/>
+          <a:ext cx="0" cy="0"/>
+          <a:chOff x="0" y="0"/>
+          <a:chExt cx="0" cy="0"/>
+        </a:xfrm>
+      </p:grpSpPr>
       <p:sp>
         <p:nvSpPr>
           <p:cNvPr id="2" name="Title 1">
@@ -19475,102 +22757,387 @@
       </p:sp>
       <p:sp>
         <p:nvSpPr>
-          <p:cNvPr id="4" name="Date Placeholder 3">
-            <a:extLst>
-              <a:ext uri="{FF2B5EF4-FFF2-40B4-BE49-F238E27FC236}">
-                <a16:creationId xmlns:a16="http://schemas.microsoft.com/office/drawing/2014/main" id="{13F8C8B5-F6EC-489B-BD0F-CD89A73CAB3A}"/>
-              </a:ext>
-            </a:extLst>
-          </p:cNvPr>
-          <p:cNvSpPr>
-            <a:spLocks noGrp="1"/>
-          </p:cNvSpPr>
-          <p:nvPr>
-            <p:ph type="dt" sz="half" idx="10"/>
-          </p:nvPr>
+          <p:cNvPr id="7" name="Date Placeholder 10">
+            <a:extLst>
+              <a:ext uri="{FF2B5EF4-FFF2-40B4-BE49-F238E27FC236}">
+                <a16:creationId xmlns:a16="http://schemas.microsoft.com/office/drawing/2014/main" id="{13DD3B80-1DBA-BDB7-BF02-98F459968C2F}"/>
+              </a:ext>
+            </a:extLst>
+          </p:cNvPr>
+          <p:cNvSpPr txBox="1">
+            <a:spLocks/>
+          </p:cNvSpPr>
+          <p:nvPr/>
         </p:nvSpPr>
         <p:spPr>
           <a:xfrm>
             <a:off x="838200" y="6356350"/>
             <a:ext cx="2743200" cy="365125"/>
           </a:xfrm>
+          <a:prstGeom prst="rect">
+            <a:avLst/>
+          </a:prstGeom>
         </p:spPr>
         <p:txBody>
           <a:bodyPr/>
-          <a:lstStyle/>
-          <a:p>
-            <a:r>
-              <a:rPr lang="en-US" dirty="0"/>
-              <a:t>20XX</a:t>
-            </a:r>
-          </a:p>
-        </p:txBody>
-      </p:sp>
-      <p:sp>
-        <p:nvSpPr>
-          <p:cNvPr id="5" name="Footer Placeholder 4">
-            <a:extLst>
-              <a:ext uri="{FF2B5EF4-FFF2-40B4-BE49-F238E27FC236}">
-                <a16:creationId xmlns:a16="http://schemas.microsoft.com/office/drawing/2014/main" id="{11AEA823-8519-4F9D-81FA-3673131076FC}"/>
-              </a:ext>
-            </a:extLst>
-          </p:cNvPr>
-          <p:cNvSpPr>
-            <a:spLocks noGrp="1"/>
-          </p:cNvSpPr>
-          <p:nvPr>
-            <p:ph type="ftr" sz="quarter" idx="11"/>
-          </p:nvPr>
-        </p:nvSpPr>
-        <p:spPr>
-          <a:xfrm>
-            <a:off x="4038600" y="6356350"/>
-            <a:ext cx="4114800" cy="365125"/>
-          </a:xfrm>
+          <a:lstStyle>
+            <a:defPPr>
+              <a:defRPr lang="en-US"/>
+            </a:defPPr>
+            <a:lvl1pPr marL="0" algn="l" defTabSz="914400" rtl="0" eaLnBrk="1" latinLnBrk="0" hangingPunct="1">
+              <a:defRPr sz="1800" kern="1200">
+                <a:solidFill>
+                  <a:schemeClr val="tx1"/>
+                </a:solidFill>
+                <a:latin typeface="+mn-lt"/>
+                <a:ea typeface="+mn-ea"/>
+                <a:cs typeface="+mn-cs"/>
+              </a:defRPr>
+            </a:lvl1pPr>
+            <a:lvl2pPr marL="457200" algn="l" defTabSz="914400" rtl="0" eaLnBrk="1" latinLnBrk="0" hangingPunct="1">
+              <a:defRPr sz="1800" kern="1200">
+                <a:solidFill>
+                  <a:schemeClr val="tx1"/>
+                </a:solidFill>
+                <a:latin typeface="+mn-lt"/>
+                <a:ea typeface="+mn-ea"/>
+                <a:cs typeface="+mn-cs"/>
+              </a:defRPr>
+            </a:lvl2pPr>
+            <a:lvl3pPr marL="914400" algn="l" defTabSz="914400" rtl="0" eaLnBrk="1" latinLnBrk="0" hangingPunct="1">
+              <a:defRPr sz="1800" kern="1200">
+                <a:solidFill>
+                  <a:schemeClr val="tx1"/>
+                </a:solidFill>
+                <a:latin typeface="+mn-lt"/>
+                <a:ea typeface="+mn-ea"/>
+                <a:cs typeface="+mn-cs"/>
+              </a:defRPr>
+            </a:lvl3pPr>
+            <a:lvl4pPr marL="1371600" algn="l" defTabSz="914400" rtl="0" eaLnBrk="1" latinLnBrk="0" hangingPunct="1">
+              <a:defRPr sz="1800" kern="1200">
+                <a:solidFill>
+                  <a:schemeClr val="tx1"/>
+                </a:solidFill>
+                <a:latin typeface="+mn-lt"/>
+                <a:ea typeface="+mn-ea"/>
+                <a:cs typeface="+mn-cs"/>
+              </a:defRPr>
+            </a:lvl4pPr>
+            <a:lvl5pPr marL="1828800" algn="l" defTabSz="914400" rtl="0" eaLnBrk="1" latinLnBrk="0" hangingPunct="1">
+              <a:defRPr sz="1800" kern="1200">
+                <a:solidFill>
+                  <a:schemeClr val="tx1"/>
+                </a:solidFill>
+                <a:latin typeface="+mn-lt"/>
+                <a:ea typeface="+mn-ea"/>
+                <a:cs typeface="+mn-cs"/>
+              </a:defRPr>
+            </a:lvl5pPr>
+            <a:lvl6pPr marL="2286000" algn="l" defTabSz="914400" rtl="0" eaLnBrk="1" latinLnBrk="0" hangingPunct="1">
+              <a:defRPr sz="1800" kern="1200">
+                <a:solidFill>
+                  <a:schemeClr val="tx1"/>
+                </a:solidFill>
+                <a:latin typeface="+mn-lt"/>
+                <a:ea typeface="+mn-ea"/>
+                <a:cs typeface="+mn-cs"/>
+              </a:defRPr>
+            </a:lvl6pPr>
+            <a:lvl7pPr marL="2743200" algn="l" defTabSz="914400" rtl="0" eaLnBrk="1" latinLnBrk="0" hangingPunct="1">
+              <a:defRPr sz="1800" kern="1200">
+                <a:solidFill>
+                  <a:schemeClr val="tx1"/>
+                </a:solidFill>
+                <a:latin typeface="+mn-lt"/>
+                <a:ea typeface="+mn-ea"/>
+                <a:cs typeface="+mn-cs"/>
+              </a:defRPr>
+            </a:lvl7pPr>
+            <a:lvl8pPr marL="3200400" algn="l" defTabSz="914400" rtl="0" eaLnBrk="1" latinLnBrk="0" hangingPunct="1">
+              <a:defRPr sz="1800" kern="1200">
+                <a:solidFill>
+                  <a:schemeClr val="tx1"/>
+                </a:solidFill>
+                <a:latin typeface="+mn-lt"/>
+                <a:ea typeface="+mn-ea"/>
+                <a:cs typeface="+mn-cs"/>
+              </a:defRPr>
+            </a:lvl8pPr>
+            <a:lvl9pPr marL="3657600" algn="l" defTabSz="914400" rtl="0" eaLnBrk="1" latinLnBrk="0" hangingPunct="1">
+              <a:defRPr sz="1800" kern="1200">
+                <a:solidFill>
+                  <a:schemeClr val="tx1"/>
+                </a:solidFill>
+                <a:latin typeface="+mn-lt"/>
+                <a:ea typeface="+mn-ea"/>
+                <a:cs typeface="+mn-cs"/>
+              </a:defRPr>
+            </a:lvl9pPr>
+          </a:lstStyle>
+          <a:p>
+            <a:r>
+              <a:rPr lang="en-US" sz="900" dirty="0"/>
+              <a:t>1nsight</a:t>
+            </a:r>
+          </a:p>
+        </p:txBody>
+      </p:sp>
+      <p:sp>
+        <p:nvSpPr>
+          <p:cNvPr id="8" name="Footer Placeholder 11">
+            <a:extLst>
+              <a:ext uri="{FF2B5EF4-FFF2-40B4-BE49-F238E27FC236}">
+                <a16:creationId xmlns:a16="http://schemas.microsoft.com/office/drawing/2014/main" id="{266947D8-27AE-B9E2-B11E-DAE1A4CD9642}"/>
+              </a:ext>
+            </a:extLst>
+          </p:cNvPr>
+          <p:cNvSpPr txBox="1">
+            <a:spLocks/>
+          </p:cNvSpPr>
+          <p:nvPr/>
+        </p:nvSpPr>
+        <p:spPr>
+          <a:xfrm>
+            <a:off x="6155823" y="6356350"/>
+            <a:ext cx="1808712" cy="365125"/>
+          </a:xfrm>
+          <a:prstGeom prst="rect">
+            <a:avLst/>
+          </a:prstGeom>
         </p:spPr>
         <p:txBody>
           <a:bodyPr/>
-          <a:lstStyle/>
-          <a:p>
-            <a:r>
-              <a:rPr lang="en-US" dirty="0"/>
-              <a:t>Pitch Deck</a:t>
-            </a:r>
-          </a:p>
-        </p:txBody>
-      </p:sp>
-      <p:sp>
-        <p:nvSpPr>
-          <p:cNvPr id="6" name="Slide Number Placeholder 5">
-            <a:extLst>
-              <a:ext uri="{FF2B5EF4-FFF2-40B4-BE49-F238E27FC236}">
-                <a16:creationId xmlns:a16="http://schemas.microsoft.com/office/drawing/2014/main" id="{BAEFF51B-0E28-4171-AE7C-A31AAB42BC73}"/>
-              </a:ext>
-            </a:extLst>
-          </p:cNvPr>
-          <p:cNvSpPr>
-            <a:spLocks noGrp="1"/>
-          </p:cNvSpPr>
-          <p:nvPr>
-            <p:ph type="sldNum" sz="quarter" idx="12"/>
-          </p:nvPr>
-        </p:nvSpPr>
-        <p:spPr>
-          <a:xfrm>
-            <a:off x="8610600" y="6356350"/>
-            <a:ext cx="2743200" cy="365125"/>
-          </a:xfrm>
+          <a:lstStyle>
+            <a:defPPr>
+              <a:defRPr lang="en-US"/>
+            </a:defPPr>
+            <a:lvl1pPr marL="0" algn="l" defTabSz="914400" rtl="0" eaLnBrk="1" latinLnBrk="0" hangingPunct="1">
+              <a:defRPr sz="1800" kern="1200">
+                <a:solidFill>
+                  <a:schemeClr val="tx1"/>
+                </a:solidFill>
+                <a:latin typeface="+mn-lt"/>
+                <a:ea typeface="+mn-ea"/>
+                <a:cs typeface="+mn-cs"/>
+              </a:defRPr>
+            </a:lvl1pPr>
+            <a:lvl2pPr marL="457200" algn="l" defTabSz="914400" rtl="0" eaLnBrk="1" latinLnBrk="0" hangingPunct="1">
+              <a:defRPr sz="1800" kern="1200">
+                <a:solidFill>
+                  <a:schemeClr val="tx1"/>
+                </a:solidFill>
+                <a:latin typeface="+mn-lt"/>
+                <a:ea typeface="+mn-ea"/>
+                <a:cs typeface="+mn-cs"/>
+              </a:defRPr>
+            </a:lvl2pPr>
+            <a:lvl3pPr marL="914400" algn="l" defTabSz="914400" rtl="0" eaLnBrk="1" latinLnBrk="0" hangingPunct="1">
+              <a:defRPr sz="1800" kern="1200">
+                <a:solidFill>
+                  <a:schemeClr val="tx1"/>
+                </a:solidFill>
+                <a:latin typeface="+mn-lt"/>
+                <a:ea typeface="+mn-ea"/>
+                <a:cs typeface="+mn-cs"/>
+              </a:defRPr>
+            </a:lvl3pPr>
+            <a:lvl4pPr marL="1371600" algn="l" defTabSz="914400" rtl="0" eaLnBrk="1" latinLnBrk="0" hangingPunct="1">
+              <a:defRPr sz="1800" kern="1200">
+                <a:solidFill>
+                  <a:schemeClr val="tx1"/>
+                </a:solidFill>
+                <a:latin typeface="+mn-lt"/>
+                <a:ea typeface="+mn-ea"/>
+                <a:cs typeface="+mn-cs"/>
+              </a:defRPr>
+            </a:lvl4pPr>
+            <a:lvl5pPr marL="1828800" algn="l" defTabSz="914400" rtl="0" eaLnBrk="1" latinLnBrk="0" hangingPunct="1">
+              <a:defRPr sz="1800" kern="1200">
+                <a:solidFill>
+                  <a:schemeClr val="tx1"/>
+                </a:solidFill>
+                <a:latin typeface="+mn-lt"/>
+                <a:ea typeface="+mn-ea"/>
+                <a:cs typeface="+mn-cs"/>
+              </a:defRPr>
+            </a:lvl5pPr>
+            <a:lvl6pPr marL="2286000" algn="l" defTabSz="914400" rtl="0" eaLnBrk="1" latinLnBrk="0" hangingPunct="1">
+              <a:defRPr sz="1800" kern="1200">
+                <a:solidFill>
+                  <a:schemeClr val="tx1"/>
+                </a:solidFill>
+                <a:latin typeface="+mn-lt"/>
+                <a:ea typeface="+mn-ea"/>
+                <a:cs typeface="+mn-cs"/>
+              </a:defRPr>
+            </a:lvl6pPr>
+            <a:lvl7pPr marL="2743200" algn="l" defTabSz="914400" rtl="0" eaLnBrk="1" latinLnBrk="0" hangingPunct="1">
+              <a:defRPr sz="1800" kern="1200">
+                <a:solidFill>
+                  <a:schemeClr val="tx1"/>
+                </a:solidFill>
+                <a:latin typeface="+mn-lt"/>
+                <a:ea typeface="+mn-ea"/>
+                <a:cs typeface="+mn-cs"/>
+              </a:defRPr>
+            </a:lvl7pPr>
+            <a:lvl8pPr marL="3200400" algn="l" defTabSz="914400" rtl="0" eaLnBrk="1" latinLnBrk="0" hangingPunct="1">
+              <a:defRPr sz="1800" kern="1200">
+                <a:solidFill>
+                  <a:schemeClr val="tx1"/>
+                </a:solidFill>
+                <a:latin typeface="+mn-lt"/>
+                <a:ea typeface="+mn-ea"/>
+                <a:cs typeface="+mn-cs"/>
+              </a:defRPr>
+            </a:lvl8pPr>
+            <a:lvl9pPr marL="3657600" algn="l" defTabSz="914400" rtl="0" eaLnBrk="1" latinLnBrk="0" hangingPunct="1">
+              <a:defRPr sz="1800" kern="1200">
+                <a:solidFill>
+                  <a:schemeClr val="tx1"/>
+                </a:solidFill>
+                <a:latin typeface="+mn-lt"/>
+                <a:ea typeface="+mn-ea"/>
+                <a:cs typeface="+mn-cs"/>
+              </a:defRPr>
+            </a:lvl9pPr>
+          </a:lstStyle>
+          <a:p>
+            <a:r>
+              <a:rPr lang="en-US" sz="900" dirty="0"/>
+              <a:t>REVIEW</a:t>
+            </a:r>
+          </a:p>
+        </p:txBody>
+      </p:sp>
+      <p:sp>
+        <p:nvSpPr>
+          <p:cNvPr id="9" name="Slide Number Placeholder 12">
+            <a:extLst>
+              <a:ext uri="{FF2B5EF4-FFF2-40B4-BE49-F238E27FC236}">
+                <a16:creationId xmlns:a16="http://schemas.microsoft.com/office/drawing/2014/main" id="{6B2A8045-C4A9-0D39-C67D-C574BFFFE9A6}"/>
+              </a:ext>
+            </a:extLst>
+          </p:cNvPr>
+          <p:cNvSpPr txBox="1">
+            <a:spLocks/>
+          </p:cNvSpPr>
+          <p:nvPr/>
+        </p:nvSpPr>
+        <p:spPr>
+          <a:xfrm>
+            <a:off x="10810874" y="6356350"/>
+            <a:ext cx="542925" cy="365125"/>
+          </a:xfrm>
+          <a:prstGeom prst="rect">
+            <a:avLst/>
+          </a:prstGeom>
         </p:spPr>
         <p:txBody>
           <a:bodyPr/>
-          <a:lstStyle/>
+          <a:lstStyle>
+            <a:defPPr>
+              <a:defRPr lang="en-US"/>
+            </a:defPPr>
+            <a:lvl1pPr marL="0" algn="l" defTabSz="914400" rtl="0" eaLnBrk="1" latinLnBrk="0" hangingPunct="1">
+              <a:defRPr sz="1800" kern="1200">
+                <a:solidFill>
+                  <a:schemeClr val="tx1"/>
+                </a:solidFill>
+                <a:latin typeface="+mn-lt"/>
+                <a:ea typeface="+mn-ea"/>
+                <a:cs typeface="+mn-cs"/>
+              </a:defRPr>
+            </a:lvl1pPr>
+            <a:lvl2pPr marL="457200" algn="l" defTabSz="914400" rtl="0" eaLnBrk="1" latinLnBrk="0" hangingPunct="1">
+              <a:defRPr sz="1800" kern="1200">
+                <a:solidFill>
+                  <a:schemeClr val="tx1"/>
+                </a:solidFill>
+                <a:latin typeface="+mn-lt"/>
+                <a:ea typeface="+mn-ea"/>
+                <a:cs typeface="+mn-cs"/>
+              </a:defRPr>
+            </a:lvl2pPr>
+            <a:lvl3pPr marL="914400" algn="l" defTabSz="914400" rtl="0" eaLnBrk="1" latinLnBrk="0" hangingPunct="1">
+              <a:defRPr sz="1800" kern="1200">
+                <a:solidFill>
+                  <a:schemeClr val="tx1"/>
+                </a:solidFill>
+                <a:latin typeface="+mn-lt"/>
+                <a:ea typeface="+mn-ea"/>
+                <a:cs typeface="+mn-cs"/>
+              </a:defRPr>
+            </a:lvl3pPr>
+            <a:lvl4pPr marL="1371600" algn="l" defTabSz="914400" rtl="0" eaLnBrk="1" latinLnBrk="0" hangingPunct="1">
+              <a:defRPr sz="1800" kern="1200">
+                <a:solidFill>
+                  <a:schemeClr val="tx1"/>
+                </a:solidFill>
+                <a:latin typeface="+mn-lt"/>
+                <a:ea typeface="+mn-ea"/>
+                <a:cs typeface="+mn-cs"/>
+              </a:defRPr>
+            </a:lvl4pPr>
+            <a:lvl5pPr marL="1828800" algn="l" defTabSz="914400" rtl="0" eaLnBrk="1" latinLnBrk="0" hangingPunct="1">
+              <a:defRPr sz="1800" kern="1200">
+                <a:solidFill>
+                  <a:schemeClr val="tx1"/>
+                </a:solidFill>
+                <a:latin typeface="+mn-lt"/>
+                <a:ea typeface="+mn-ea"/>
+                <a:cs typeface="+mn-cs"/>
+              </a:defRPr>
+            </a:lvl5pPr>
+            <a:lvl6pPr marL="2286000" algn="l" defTabSz="914400" rtl="0" eaLnBrk="1" latinLnBrk="0" hangingPunct="1">
+              <a:defRPr sz="1800" kern="1200">
+                <a:solidFill>
+                  <a:schemeClr val="tx1"/>
+                </a:solidFill>
+                <a:latin typeface="+mn-lt"/>
+                <a:ea typeface="+mn-ea"/>
+                <a:cs typeface="+mn-cs"/>
+              </a:defRPr>
+            </a:lvl6pPr>
+            <a:lvl7pPr marL="2743200" algn="l" defTabSz="914400" rtl="0" eaLnBrk="1" latinLnBrk="0" hangingPunct="1">
+              <a:defRPr sz="1800" kern="1200">
+                <a:solidFill>
+                  <a:schemeClr val="tx1"/>
+                </a:solidFill>
+                <a:latin typeface="+mn-lt"/>
+                <a:ea typeface="+mn-ea"/>
+                <a:cs typeface="+mn-cs"/>
+              </a:defRPr>
+            </a:lvl7pPr>
+            <a:lvl8pPr marL="3200400" algn="l" defTabSz="914400" rtl="0" eaLnBrk="1" latinLnBrk="0" hangingPunct="1">
+              <a:defRPr sz="1800" kern="1200">
+                <a:solidFill>
+                  <a:schemeClr val="tx1"/>
+                </a:solidFill>
+                <a:latin typeface="+mn-lt"/>
+                <a:ea typeface="+mn-ea"/>
+                <a:cs typeface="+mn-cs"/>
+              </a:defRPr>
+            </a:lvl8pPr>
+            <a:lvl9pPr marL="3657600" algn="l" defTabSz="914400" rtl="0" eaLnBrk="1" latinLnBrk="0" hangingPunct="1">
+              <a:defRPr sz="1800" kern="1200">
+                <a:solidFill>
+                  <a:schemeClr val="tx1"/>
+                </a:solidFill>
+                <a:latin typeface="+mn-lt"/>
+                <a:ea typeface="+mn-ea"/>
+                <a:cs typeface="+mn-cs"/>
+              </a:defRPr>
+            </a:lvl9pPr>
+          </a:lstStyle>
           <a:p>
             <a:fld id="{B5CEABB6-07DC-46E8-9B57-56EC44A396E5}" type="slidenum">
-              <a:rPr lang="en-US" smtClean="0"/>
+              <a:rPr lang="en-US" sz="900" smtClean="0"/>
               <a:pPr/>
-              <a:t>10</a:t>
+              <a:t>19</a:t>
             </a:fld>
-            <a:endParaRPr lang="en-US" dirty="0"/>
+            <a:endParaRPr lang="en-US" sz="900" dirty="0"/>
           </a:p>
         </p:txBody>
       </p:sp>
@@ -19587,7 +23154,391 @@
 </p:sld>
 </file>
 
-<file path=ppt/slides/slide11.xml><?xml version="1.0" encoding="utf-8"?>
+<file path=ppt/slides/slide2.xml><?xml version="1.0" encoding="utf-8"?>
+<p:sld xmlns:a="http://schemas.openxmlformats.org/drawingml/2006/main" xmlns:r="http://schemas.openxmlformats.org/officeDocument/2006/relationships" xmlns:p="http://schemas.openxmlformats.org/presentationml/2006/main">
+  <p:cSld>
+    <p:spTree>
+      <p:nvGrpSpPr>
+        <p:cNvPr id="1" name="">
+          <a:extLst>
+            <a:ext uri="{FF2B5EF4-FFF2-40B4-BE49-F238E27FC236}">
+              <a16:creationId xmlns:a16="http://schemas.microsoft.com/office/drawing/2014/main" id="{9965BF79-8627-1903-4D55-19E7F9C92DC5}"/>
+            </a:ext>
+          </a:extLst>
+        </p:cNvPr>
+        <p:cNvGrpSpPr/>
+        <p:nvPr/>
+      </p:nvGrpSpPr>
+      <p:grpSpPr>
+        <a:xfrm>
+          <a:off x="0" y="0"/>
+          <a:ext cx="0" cy="0"/>
+          <a:chOff x="0" y="0"/>
+          <a:chExt cx="0" cy="0"/>
+        </a:xfrm>
+      </p:grpSpPr>
+      <p:sp>
+        <p:nvSpPr>
+          <p:cNvPr id="2" name="Title 1">
+            <a:extLst>
+              <a:ext uri="{FF2B5EF4-FFF2-40B4-BE49-F238E27FC236}">
+                <a16:creationId xmlns:a16="http://schemas.microsoft.com/office/drawing/2014/main" id="{8849122C-D857-630B-CB58-7CA43CE28BDB}"/>
+              </a:ext>
+              <a:ext uri="{C183D7F6-B498-43B3-948B-1728B52AA6E4}">
+                <adec:decorative xmlns:adec="http://schemas.microsoft.com/office/drawing/2017/decorative" val="0"/>
+              </a:ext>
+            </a:extLst>
+          </p:cNvPr>
+          <p:cNvSpPr>
+            <a:spLocks noGrp="1"/>
+          </p:cNvSpPr>
+          <p:nvPr>
+            <p:ph type="title"/>
+          </p:nvPr>
+        </p:nvSpPr>
+        <p:spPr>
+          <a:xfrm>
+            <a:off x="1333500" y="462180"/>
+            <a:ext cx="3171825" cy="1325563"/>
+          </a:xfrm>
+        </p:spPr>
+        <p:txBody>
+          <a:bodyPr>
+            <a:normAutofit/>
+          </a:bodyPr>
+          <a:lstStyle/>
+          <a:p>
+            <a:r>
+              <a:rPr lang="en-US" sz="3600" dirty="0"/>
+              <a:t>AGENDA</a:t>
+            </a:r>
+            <a:endParaRPr lang="en-US" sz="3200" dirty="0"/>
+          </a:p>
+        </p:txBody>
+      </p:sp>
+      <p:sp>
+        <p:nvSpPr>
+          <p:cNvPr id="6" name="Date Placeholder 5">
+            <a:extLst>
+              <a:ext uri="{FF2B5EF4-FFF2-40B4-BE49-F238E27FC236}">
+                <a16:creationId xmlns:a16="http://schemas.microsoft.com/office/drawing/2014/main" id="{AFB19733-F3B0-D045-C155-6831D699D709}"/>
+              </a:ext>
+            </a:extLst>
+          </p:cNvPr>
+          <p:cNvSpPr>
+            <a:spLocks noGrp="1"/>
+          </p:cNvSpPr>
+          <p:nvPr>
+            <p:ph type="dt" sz="half" idx="10"/>
+          </p:nvPr>
+        </p:nvSpPr>
+        <p:spPr>
+          <a:xfrm>
+            <a:off x="1333500" y="6356350"/>
+            <a:ext cx="985157" cy="365125"/>
+          </a:xfrm>
+        </p:spPr>
+        <p:txBody>
+          <a:bodyPr/>
+          <a:lstStyle/>
+          <a:p>
+            <a:r>
+              <a:rPr lang="en-US" dirty="0"/>
+              <a:t>20XX</a:t>
+            </a:r>
+          </a:p>
+        </p:txBody>
+      </p:sp>
+      <p:sp>
+        <p:nvSpPr>
+          <p:cNvPr id="5" name="Footer Placeholder 4">
+            <a:extLst>
+              <a:ext uri="{FF2B5EF4-FFF2-40B4-BE49-F238E27FC236}">
+                <a16:creationId xmlns:a16="http://schemas.microsoft.com/office/drawing/2014/main" id="{1044B05B-0E95-D776-6012-E5CE7BE6CB99}"/>
+              </a:ext>
+            </a:extLst>
+          </p:cNvPr>
+          <p:cNvSpPr>
+            <a:spLocks noGrp="1"/>
+          </p:cNvSpPr>
+          <p:nvPr>
+            <p:ph type="ftr" sz="quarter" idx="11"/>
+          </p:nvPr>
+        </p:nvSpPr>
+        <p:spPr>
+          <a:xfrm>
+            <a:off x="2669886" y="6356349"/>
+            <a:ext cx="2482842" cy="365125"/>
+          </a:xfrm>
+        </p:spPr>
+        <p:txBody>
+          <a:bodyPr/>
+          <a:lstStyle/>
+          <a:p>
+            <a:r>
+              <a:rPr lang="en-US" dirty="0"/>
+              <a:t>Pitch Deck</a:t>
+            </a:r>
+          </a:p>
+        </p:txBody>
+      </p:sp>
+      <p:sp>
+        <p:nvSpPr>
+          <p:cNvPr id="4" name="Slide Number Placeholder 3">
+            <a:extLst>
+              <a:ext uri="{FF2B5EF4-FFF2-40B4-BE49-F238E27FC236}">
+                <a16:creationId xmlns:a16="http://schemas.microsoft.com/office/drawing/2014/main" id="{FCE60D32-BD03-88F7-925A-C1D33EE03ED8}"/>
+              </a:ext>
+            </a:extLst>
+          </p:cNvPr>
+          <p:cNvSpPr>
+            <a:spLocks noGrp="1"/>
+          </p:cNvSpPr>
+          <p:nvPr>
+            <p:ph type="sldNum" sz="quarter" idx="12"/>
+          </p:nvPr>
+        </p:nvSpPr>
+        <p:spPr>
+          <a:xfrm>
+            <a:off x="5536305" y="6356350"/>
+            <a:ext cx="987552" cy="365125"/>
+          </a:xfrm>
+        </p:spPr>
+        <p:txBody>
+          <a:bodyPr/>
+          <a:lstStyle/>
+          <a:p>
+            <a:fld id="{19B51A1E-902D-48AF-9020-955120F399B6}" type="slidenum">
+              <a:rPr lang="en-US" smtClean="0"/>
+              <a:pPr/>
+              <a:t>2</a:t>
+            </a:fld>
+            <a:endParaRPr lang="en-US" dirty="0"/>
+          </a:p>
+        </p:txBody>
+      </p:sp>
+      <p:sp>
+        <p:nvSpPr>
+          <p:cNvPr id="9" name="Subtitle 2">
+            <a:extLst>
+              <a:ext uri="{FF2B5EF4-FFF2-40B4-BE49-F238E27FC236}">
+                <a16:creationId xmlns:a16="http://schemas.microsoft.com/office/drawing/2014/main" id="{E944299B-0D61-3191-9B00-1811FF9A3CE9}"/>
+              </a:ext>
+              <a:ext uri="{C183D7F6-B498-43B3-948B-1728B52AA6E4}">
+                <adec:decorative xmlns:adec="http://schemas.microsoft.com/office/drawing/2017/decorative" val="0"/>
+              </a:ext>
+            </a:extLst>
+          </p:cNvPr>
+          <p:cNvSpPr>
+            <a:spLocks noGrp="1"/>
+          </p:cNvSpPr>
+          <p:nvPr>
+            <p:ph idx="1"/>
+          </p:nvPr>
+        </p:nvSpPr>
+        <p:spPr>
+          <a:xfrm>
+            <a:off x="1603006" y="2459814"/>
+            <a:ext cx="5048050" cy="3469348"/>
+          </a:xfrm>
+        </p:spPr>
+        <p:txBody>
+          <a:bodyPr>
+            <a:normAutofit/>
+          </a:bodyPr>
+          <a:lstStyle/>
+          <a:p>
+            <a:pPr marL="342900" indent="-342900">
+              <a:buAutoNum type="arabicPeriod"/>
+            </a:pPr>
+            <a:r>
+              <a:rPr lang="en-US" sz="2400" dirty="0"/>
+              <a:t>Problem Statements</a:t>
+            </a:r>
+          </a:p>
+          <a:p>
+            <a:pPr marL="342900" indent="-342900">
+              <a:buAutoNum type="arabicPeriod"/>
+            </a:pPr>
+            <a:r>
+              <a:rPr lang="en-US" sz="2400" dirty="0"/>
+              <a:t>Key Recommendations</a:t>
+            </a:r>
+          </a:p>
+          <a:p>
+            <a:pPr marL="342900" indent="-342900">
+              <a:buAutoNum type="arabicPeriod"/>
+            </a:pPr>
+            <a:r>
+              <a:rPr lang="en-US" sz="2400" dirty="0"/>
+              <a:t>Technical Overview</a:t>
+            </a:r>
+          </a:p>
+          <a:p>
+            <a:pPr marL="342900" indent="-342900">
+              <a:buAutoNum type="arabicPeriod"/>
+            </a:pPr>
+            <a:r>
+              <a:rPr lang="en-US" sz="2400" dirty="0"/>
+              <a:t>Delivery Performance</a:t>
+            </a:r>
+          </a:p>
+          <a:p>
+            <a:pPr marL="342900" indent="-342900">
+              <a:buAutoNum type="arabicPeriod"/>
+            </a:pPr>
+            <a:r>
+              <a:rPr lang="en-US" sz="2400" dirty="0"/>
+              <a:t>Customer Segmentation</a:t>
+            </a:r>
+          </a:p>
+          <a:p>
+            <a:pPr marL="342900" indent="-342900">
+              <a:buAutoNum type="arabicPeriod"/>
+            </a:pPr>
+            <a:r>
+              <a:rPr lang="en-US" sz="2400" dirty="0"/>
+              <a:t>Seller Score Card</a:t>
+            </a:r>
+          </a:p>
+          <a:p>
+            <a:pPr marL="342900" indent="-342900">
+              <a:buAutoNum type="arabicPeriod"/>
+            </a:pPr>
+            <a:endParaRPr lang="en-US" sz="2400" dirty="0"/>
+          </a:p>
+        </p:txBody>
+      </p:sp>
+    </p:spTree>
+    <p:extLst>
+      <p:ext uri="{BB962C8B-B14F-4D97-AF65-F5344CB8AC3E}">
+        <p14:creationId xmlns:p14="http://schemas.microsoft.com/office/powerpoint/2010/main" val="580292907"/>
+      </p:ext>
+    </p:extLst>
+  </p:cSld>
+  <p:clrMapOvr>
+    <a:masterClrMapping/>
+  </p:clrMapOvr>
+</p:sld>
+</file>
+
+<file path=ppt/slides/slide20.xml><?xml version="1.0" encoding="utf-8"?>
+<p:sld xmlns:a="http://schemas.openxmlformats.org/drawingml/2006/main" xmlns:r="http://schemas.openxmlformats.org/officeDocument/2006/relationships" xmlns:p="http://schemas.openxmlformats.org/presentationml/2006/main">
+  <p:cSld>
+    <p:spTree>
+      <p:nvGrpSpPr>
+        <p:cNvPr id="1" name="">
+          <a:extLst>
+            <a:ext uri="{FF2B5EF4-FFF2-40B4-BE49-F238E27FC236}">
+              <a16:creationId xmlns:a16="http://schemas.microsoft.com/office/drawing/2014/main" id="{495559B4-CA83-BDB8-FA90-B5D5308CFE66}"/>
+            </a:ext>
+          </a:extLst>
+        </p:cNvPr>
+        <p:cNvGrpSpPr/>
+        <p:nvPr/>
+      </p:nvGrpSpPr>
+      <p:grpSpPr>
+        <a:xfrm>
+          <a:off x="0" y="0"/>
+          <a:ext cx="0" cy="0"/>
+          <a:chOff x="0" y="0"/>
+          <a:chExt cx="0" cy="0"/>
+        </a:xfrm>
+      </p:grpSpPr>
+      <p:sp>
+        <p:nvSpPr>
+          <p:cNvPr id="2" name="Title 1">
+            <a:extLst>
+              <a:ext uri="{FF2B5EF4-FFF2-40B4-BE49-F238E27FC236}">
+                <a16:creationId xmlns:a16="http://schemas.microsoft.com/office/drawing/2014/main" id="{C433BBDC-B7F2-6814-A3D6-9E5CF11B742D}"/>
+              </a:ext>
+            </a:extLst>
+          </p:cNvPr>
+          <p:cNvSpPr>
+            <a:spLocks noGrp="1"/>
+          </p:cNvSpPr>
+          <p:nvPr>
+            <p:ph type="ctrTitle"/>
+          </p:nvPr>
+        </p:nvSpPr>
+        <p:spPr>
+          <a:xfrm>
+            <a:off x="1202589" y="5533810"/>
+            <a:ext cx="9786821" cy="648070"/>
+          </a:xfrm>
+        </p:spPr>
+        <p:txBody>
+          <a:bodyPr/>
+          <a:lstStyle/>
+          <a:p>
+            <a:pPr algn="ctr"/>
+            <a:r>
+              <a:rPr lang="en-US" b="1" dirty="0"/>
+              <a:t>THANK YOU</a:t>
+            </a:r>
+          </a:p>
+        </p:txBody>
+      </p:sp>
+      <p:sp>
+        <p:nvSpPr>
+          <p:cNvPr id="3" name="Subtitle 2">
+            <a:extLst>
+              <a:ext uri="{FF2B5EF4-FFF2-40B4-BE49-F238E27FC236}">
+                <a16:creationId xmlns:a16="http://schemas.microsoft.com/office/drawing/2014/main" id="{0E45E9EC-08D7-2D7E-BDD1-0EAA30B805DF}"/>
+              </a:ext>
+            </a:extLst>
+          </p:cNvPr>
+          <p:cNvSpPr>
+            <a:spLocks noGrp="1"/>
+          </p:cNvSpPr>
+          <p:nvPr>
+            <p:ph type="subTitle" idx="1"/>
+          </p:nvPr>
+        </p:nvSpPr>
+        <p:spPr>
+          <a:xfrm>
+            <a:off x="0" y="6461340"/>
+            <a:ext cx="12192000" cy="396660"/>
+          </a:xfrm>
+        </p:spPr>
+        <p:txBody>
+          <a:bodyPr/>
+          <a:lstStyle/>
+          <a:p>
+            <a:pPr algn="ctr"/>
+            <a:r>
+              <a:rPr lang="en-US" b="1" dirty="0"/>
+              <a:t>Team 1</a:t>
+            </a:r>
+            <a:r>
+              <a:rPr lang="en-US" dirty="0"/>
+              <a:t>     |     Manish Oswal    |     Jesse </a:t>
+            </a:r>
+            <a:r>
+              <a:rPr lang="en-US" dirty="0" err="1"/>
+              <a:t>Cajita</a:t>
+            </a:r>
+            <a:r>
+              <a:rPr lang="en-US" dirty="0"/>
+              <a:t>     |     R. Sreenivasan     |     Christopher Tan     |     Christopher Choo</a:t>
+            </a:r>
+          </a:p>
+        </p:txBody>
+      </p:sp>
+    </p:spTree>
+    <p:extLst>
+      <p:ext uri="{BB962C8B-B14F-4D97-AF65-F5344CB8AC3E}">
+        <p14:creationId xmlns:p14="http://schemas.microsoft.com/office/powerpoint/2010/main" val="4217820340"/>
+      </p:ext>
+    </p:extLst>
+  </p:cSld>
+  <p:clrMapOvr>
+    <a:masterClrMapping/>
+  </p:clrMapOvr>
+</p:sld>
+</file>
+
+<file path=ppt/slides/slide21.xml><?xml version="1.0" encoding="utf-8"?>
 <p:sld xmlns:a="http://schemas.openxmlformats.org/drawingml/2006/main" xmlns:r="http://schemas.openxmlformats.org/officeDocument/2006/relationships" xmlns:p="http://schemas.openxmlformats.org/presentationml/2006/main">
   <p:cSld>
     <p:spTree>
@@ -19773,7 +23724,7 @@
             <a:fld id="{B5CEABB6-07DC-46E8-9B57-56EC44A396E5}" type="slidenum">
               <a:rPr lang="en-US" smtClean="0"/>
               <a:pPr/>
-              <a:t>11</a:t>
+              <a:t>21</a:t>
             </a:fld>
             <a:endParaRPr lang="en-US" dirty="0"/>
           </a:p>
@@ -19792,7 +23743,7 @@
 </p:sld>
 </file>
 
-<file path=ppt/slides/slide12.xml><?xml version="1.0" encoding="utf-8"?>
+<file path=ppt/slides/slide22.xml><?xml version="1.0" encoding="utf-8"?>
 <p:sld xmlns:a="http://schemas.openxmlformats.org/drawingml/2006/main" xmlns:r="http://schemas.openxmlformats.org/officeDocument/2006/relationships" xmlns:p="http://schemas.openxmlformats.org/presentationml/2006/main" show="0">
   <p:cSld>
     <p:spTree>
@@ -19978,7 +23929,7 @@
             <a:fld id="{19B51A1E-902D-48AF-9020-955120F399B6}" type="slidenum">
               <a:rPr lang="en-US" smtClean="0"/>
               <a:pPr/>
-              <a:t>12</a:t>
+              <a:t>22</a:t>
             </a:fld>
             <a:endParaRPr lang="en-US" dirty="0"/>
           </a:p>
@@ -19997,7 +23948,7 @@
 </p:sld>
 </file>
 
-<file path=ppt/slides/slide13.xml><?xml version="1.0" encoding="utf-8"?>
+<file path=ppt/slides/slide23.xml><?xml version="1.0" encoding="utf-8"?>
 <p:sld xmlns:a="http://schemas.openxmlformats.org/drawingml/2006/main" xmlns:r="http://schemas.openxmlformats.org/officeDocument/2006/relationships" xmlns:p="http://schemas.openxmlformats.org/presentationml/2006/main" show="0">
   <p:cSld>
     <p:spTree>
@@ -20420,7 +24371,7 @@
             <a:fld id="{B5CEABB6-07DC-46E8-9B57-56EC44A396E5}" type="slidenum">
               <a:rPr lang="en-US" smtClean="0"/>
               <a:pPr/>
-              <a:t>13</a:t>
+              <a:t>23</a:t>
             </a:fld>
             <a:endParaRPr lang="en-US" dirty="0"/>
           </a:p>
@@ -20439,7 +24390,7 @@
 </p:sld>
 </file>
 
-<file path=ppt/slides/slide14.xml><?xml version="1.0" encoding="utf-8"?>
+<file path=ppt/slides/slide24.xml><?xml version="1.0" encoding="utf-8"?>
 <p:sld xmlns:a="http://schemas.openxmlformats.org/drawingml/2006/main" xmlns:r="http://schemas.openxmlformats.org/officeDocument/2006/relationships" xmlns:p="http://schemas.openxmlformats.org/presentationml/2006/main" show="0">
   <p:cSld>
     <p:spTree>
@@ -20674,7 +24625,7 @@
             <a:fld id="{B5CEABB6-07DC-46E8-9B57-56EC44A396E5}" type="slidenum">
               <a:rPr lang="en-US" smtClean="0"/>
               <a:pPr/>
-              <a:t>14</a:t>
+              <a:t>24</a:t>
             </a:fld>
             <a:endParaRPr lang="en-US" dirty="0"/>
           </a:p>
@@ -20693,7 +24644,7 @@
 </p:sld>
 </file>
 
-<file path=ppt/slides/slide15.xml><?xml version="1.0" encoding="utf-8"?>
+<file path=ppt/slides/slide25.xml><?xml version="1.0" encoding="utf-8"?>
 <p:sld xmlns:a="http://schemas.openxmlformats.org/drawingml/2006/main" xmlns:r="http://schemas.openxmlformats.org/officeDocument/2006/relationships" xmlns:p="http://schemas.openxmlformats.org/presentationml/2006/main" show="0">
   <p:cSld>
     <p:spTree>
@@ -20756,7 +24707,7 @@
 </p:sld>
 </file>
 
-<file path=ppt/slides/slide16.xml><?xml version="1.0" encoding="utf-8"?>
+<file path=ppt/slides/slide26.xml><?xml version="1.0" encoding="utf-8"?>
 <p:sld xmlns:a="http://schemas.openxmlformats.org/drawingml/2006/main" xmlns:r="http://schemas.openxmlformats.org/officeDocument/2006/relationships" xmlns:p="http://schemas.openxmlformats.org/presentationml/2006/main" show="0">
   <p:cSld>
     <p:spTree>
@@ -21111,7 +25062,7 @@
             <a:fld id="{19B51A1E-902D-48AF-9020-955120F399B6}" type="slidenum">
               <a:rPr lang="en-US" smtClean="0"/>
               <a:pPr/>
-              <a:t>16</a:t>
+              <a:t>26</a:t>
             </a:fld>
             <a:endParaRPr lang="en-US" dirty="0"/>
           </a:p>
@@ -21130,7 +25081,7 @@
 </p:sld>
 </file>
 
-<file path=ppt/slides/slide17.xml><?xml version="1.0" encoding="utf-8"?>
+<file path=ppt/slides/slide27.xml><?xml version="1.0" encoding="utf-8"?>
 <p:sld xmlns:a="http://schemas.openxmlformats.org/drawingml/2006/main" xmlns:r="http://schemas.openxmlformats.org/officeDocument/2006/relationships" xmlns:p="http://schemas.openxmlformats.org/presentationml/2006/main" show="0">
   <p:cSld>
     <p:spTree>
@@ -21521,7 +25472,7 @@
             <a:fld id="{B5CEABB6-07DC-46E8-9B57-56EC44A396E5}" type="slidenum">
               <a:rPr lang="en-US" smtClean="0"/>
               <a:pPr/>
-              <a:t>17</a:t>
+              <a:t>27</a:t>
             </a:fld>
             <a:endParaRPr lang="en-US" dirty="0"/>
           </a:p>
@@ -21540,7 +25491,7 @@
 </p:sld>
 </file>
 
-<file path=ppt/slides/slide18.xml><?xml version="1.0" encoding="utf-8"?>
+<file path=ppt/slides/slide28.xml><?xml version="1.0" encoding="utf-8"?>
 <p:sld xmlns:a="http://schemas.openxmlformats.org/drawingml/2006/main" xmlns:r="http://schemas.openxmlformats.org/officeDocument/2006/relationships" xmlns:p="http://schemas.openxmlformats.org/presentationml/2006/main" show="0">
   <p:cSld>
     <p:spTree>
@@ -21982,7 +25933,7 @@
             <a:fld id="{B5CEABB6-07DC-46E8-9B57-56EC44A396E5}" type="slidenum">
               <a:rPr lang="en-US" smtClean="0"/>
               <a:pPr/>
-              <a:t>18</a:t>
+              <a:t>28</a:t>
             </a:fld>
             <a:endParaRPr lang="en-US" dirty="0"/>
           </a:p>
@@ -22001,7 +25952,7 @@
 </p:sld>
 </file>
 
-<file path=ppt/slides/slide19.xml><?xml version="1.0" encoding="utf-8"?>
+<file path=ppt/slides/slide29.xml><?xml version="1.0" encoding="utf-8"?>
 <p:sld xmlns:a="http://schemas.openxmlformats.org/drawingml/2006/main" xmlns:r="http://schemas.openxmlformats.org/officeDocument/2006/relationships" xmlns:p="http://schemas.openxmlformats.org/presentationml/2006/main" show="0">
   <p:cSld>
     <p:spTree>
@@ -22325,7 +26276,7 @@
             <a:fld id="{B5CEABB6-07DC-46E8-9B57-56EC44A396E5}" type="slidenum">
               <a:rPr lang="en-US" smtClean="0"/>
               <a:pPr/>
-              <a:t>19</a:t>
+              <a:t>29</a:t>
             </a:fld>
             <a:endParaRPr lang="en-US" dirty="0"/>
           </a:p>
@@ -22344,7 +26295,7 @@
 </p:sld>
 </file>
 
-<file path=ppt/slides/slide2.xml><?xml version="1.0" encoding="utf-8"?>
+<file path=ppt/slides/slide3.xml><?xml version="1.0" encoding="utf-8"?>
 <p:sld xmlns:a="http://schemas.openxmlformats.org/drawingml/2006/main" xmlns:r="http://schemas.openxmlformats.org/officeDocument/2006/relationships" xmlns:p="http://schemas.openxmlformats.org/presentationml/2006/main">
   <p:cSld>
     <p:spTree>
@@ -22352,7 +26303,7 @@
         <p:cNvPr id="1" name="">
           <a:extLst>
             <a:ext uri="{FF2B5EF4-FFF2-40B4-BE49-F238E27FC236}">
-              <a16:creationId xmlns:a16="http://schemas.microsoft.com/office/drawing/2014/main" id="{72E6C939-2EF0-6265-043F-90BA12158E45}"/>
+              <a16:creationId xmlns:a16="http://schemas.microsoft.com/office/drawing/2014/main" id="{2702B43A-2863-C439-3ECB-7212AF8E47B5}"/>
             </a:ext>
           </a:extLst>
         </p:cNvPr>
@@ -22372,24 +26323,21 @@
           <p:cNvPr id="2" name="Title 1">
             <a:extLst>
               <a:ext uri="{FF2B5EF4-FFF2-40B4-BE49-F238E27FC236}">
-                <a16:creationId xmlns:a16="http://schemas.microsoft.com/office/drawing/2014/main" id="{BEACA6F6-65DF-F98F-032F-7F1BCF1A4969}"/>
-              </a:ext>
-              <a:ext uri="{C183D7F6-B498-43B3-948B-1728B52AA6E4}">
-                <adec:decorative xmlns:adec="http://schemas.microsoft.com/office/drawing/2017/decorative" val="0"/>
-              </a:ext>
-            </a:extLst>
-          </p:cNvPr>
-          <p:cNvSpPr>
-            <a:spLocks noGrp="1"/>
-          </p:cNvSpPr>
-          <p:nvPr>
-            <p:ph type="title"/>
-          </p:nvPr>
-        </p:nvSpPr>
-        <p:spPr>
-          <a:xfrm>
-            <a:off x="1333499" y="1020445"/>
-            <a:ext cx="3171825" cy="1325563"/>
+                <a16:creationId xmlns:a16="http://schemas.microsoft.com/office/drawing/2014/main" id="{277A719B-DBAA-C769-DE73-B504722257C5}"/>
+              </a:ext>
+            </a:extLst>
+          </p:cNvPr>
+          <p:cNvSpPr>
+            <a:spLocks noGrp="1"/>
+          </p:cNvSpPr>
+          <p:nvPr>
+            <p:ph type="ctrTitle"/>
+          </p:nvPr>
+        </p:nvSpPr>
+        <p:spPr>
+          <a:xfrm>
+            <a:off x="6991350" y="2571235"/>
+            <a:ext cx="4179570" cy="1715531"/>
           </a:xfrm>
         </p:spPr>
         <p:txBody>
@@ -22398,154 +26346,15 @@
           <a:p>
             <a:r>
               <a:rPr lang="en-US" dirty="0"/>
-              <a:t>PROBLEM STATEMENT</a:t>
-            </a:r>
-          </a:p>
-        </p:txBody>
-      </p:sp>
-      <p:sp>
-        <p:nvSpPr>
-          <p:cNvPr id="3" name="Subtitle 2">
-            <a:extLst>
-              <a:ext uri="{FF2B5EF4-FFF2-40B4-BE49-F238E27FC236}">
-                <a16:creationId xmlns:a16="http://schemas.microsoft.com/office/drawing/2014/main" id="{615CF503-654C-B35A-83BD-331E9E7137E4}"/>
-              </a:ext>
-              <a:ext uri="{C183D7F6-B498-43B3-948B-1728B52AA6E4}">
-                <adec:decorative xmlns:adec="http://schemas.microsoft.com/office/drawing/2017/decorative" val="0"/>
-              </a:ext>
-            </a:extLst>
-          </p:cNvPr>
-          <p:cNvSpPr>
-            <a:spLocks noGrp="1"/>
-          </p:cNvSpPr>
-          <p:nvPr>
-            <p:ph idx="1"/>
-          </p:nvPr>
-        </p:nvSpPr>
-        <p:spPr>
-          <a:xfrm>
-            <a:off x="1333499" y="2924175"/>
-            <a:ext cx="3171825" cy="2519363"/>
-          </a:xfrm>
-        </p:spPr>
-        <p:txBody>
-          <a:bodyPr>
-            <a:normAutofit/>
-          </a:bodyPr>
-          <a:lstStyle/>
-          <a:p>
-            <a:r>
-              <a:rPr lang="en-US" dirty="0"/>
-              <a:t>Problem statement(s) here…</a:t>
-            </a:r>
-          </a:p>
-        </p:txBody>
-      </p:sp>
-      <p:sp>
-        <p:nvSpPr>
-          <p:cNvPr id="6" name="Date Placeholder 5">
-            <a:extLst>
-              <a:ext uri="{FF2B5EF4-FFF2-40B4-BE49-F238E27FC236}">
-                <a16:creationId xmlns:a16="http://schemas.microsoft.com/office/drawing/2014/main" id="{B18E9D2C-8EEF-26C3-9D47-69FE3EF10F26}"/>
-              </a:ext>
-            </a:extLst>
-          </p:cNvPr>
-          <p:cNvSpPr>
-            <a:spLocks noGrp="1"/>
-          </p:cNvSpPr>
-          <p:nvPr>
-            <p:ph type="dt" sz="half" idx="10"/>
-          </p:nvPr>
-        </p:nvSpPr>
-        <p:spPr>
-          <a:xfrm>
-            <a:off x="1333500" y="6356350"/>
-            <a:ext cx="985157" cy="365125"/>
-          </a:xfrm>
-        </p:spPr>
-        <p:txBody>
-          <a:bodyPr/>
-          <a:lstStyle/>
-          <a:p>
-            <a:r>
-              <a:rPr lang="en-US" dirty="0"/>
-              <a:t>20XX</a:t>
-            </a:r>
-          </a:p>
-        </p:txBody>
-      </p:sp>
-      <p:sp>
-        <p:nvSpPr>
-          <p:cNvPr id="5" name="Footer Placeholder 4">
-            <a:extLst>
-              <a:ext uri="{FF2B5EF4-FFF2-40B4-BE49-F238E27FC236}">
-                <a16:creationId xmlns:a16="http://schemas.microsoft.com/office/drawing/2014/main" id="{AA8D12B3-FDA9-2DD9-C874-A0CB48A3ADD4}"/>
-              </a:ext>
-            </a:extLst>
-          </p:cNvPr>
-          <p:cNvSpPr>
-            <a:spLocks noGrp="1"/>
-          </p:cNvSpPr>
-          <p:nvPr>
-            <p:ph type="ftr" sz="quarter" idx="11"/>
-          </p:nvPr>
-        </p:nvSpPr>
-        <p:spPr>
-          <a:xfrm>
-            <a:off x="2669886" y="6356349"/>
-            <a:ext cx="2482842" cy="365125"/>
-          </a:xfrm>
-        </p:spPr>
-        <p:txBody>
-          <a:bodyPr/>
-          <a:lstStyle/>
-          <a:p>
-            <a:r>
-              <a:rPr lang="en-US" dirty="0"/>
-              <a:t>Pitch Deck</a:t>
-            </a:r>
-          </a:p>
-        </p:txBody>
-      </p:sp>
-      <p:sp>
-        <p:nvSpPr>
-          <p:cNvPr id="4" name="Slide Number Placeholder 3">
-            <a:extLst>
-              <a:ext uri="{FF2B5EF4-FFF2-40B4-BE49-F238E27FC236}">
-                <a16:creationId xmlns:a16="http://schemas.microsoft.com/office/drawing/2014/main" id="{918DD5B3-4AEA-9731-554D-9CBEF5BB9EC4}"/>
-              </a:ext>
-            </a:extLst>
-          </p:cNvPr>
-          <p:cNvSpPr>
-            <a:spLocks noGrp="1"/>
-          </p:cNvSpPr>
-          <p:nvPr>
-            <p:ph type="sldNum" sz="quarter" idx="12"/>
-          </p:nvPr>
-        </p:nvSpPr>
-        <p:spPr>
-          <a:xfrm>
-            <a:off x="5536305" y="6356350"/>
-            <a:ext cx="987552" cy="365125"/>
-          </a:xfrm>
-        </p:spPr>
-        <p:txBody>
-          <a:bodyPr/>
-          <a:lstStyle/>
-          <a:p>
-            <a:fld id="{19B51A1E-902D-48AF-9020-955120F399B6}" type="slidenum">
-              <a:rPr lang="en-US" smtClean="0"/>
-              <a:pPr/>
-              <a:t>2</a:t>
-            </a:fld>
-            <a:endParaRPr lang="en-US" dirty="0"/>
+              <a:t>PROBLEM STATEMENTS</a:t>
+            </a:r>
           </a:p>
         </p:txBody>
       </p:sp>
     </p:spTree>
     <p:extLst>
       <p:ext uri="{BB962C8B-B14F-4D97-AF65-F5344CB8AC3E}">
-        <p14:creationId xmlns:p14="http://schemas.microsoft.com/office/powerpoint/2010/main" val="94256970"/>
+        <p14:creationId xmlns:p14="http://schemas.microsoft.com/office/powerpoint/2010/main" val="2420817601"/>
       </p:ext>
     </p:extLst>
   </p:cSld>
@@ -22555,7 +26364,7 @@
 </p:sld>
 </file>
 
-<file path=ppt/slides/slide20.xml><?xml version="1.0" encoding="utf-8"?>
+<file path=ppt/slides/slide30.xml><?xml version="1.0" encoding="utf-8"?>
 <p:sld xmlns:a="http://schemas.openxmlformats.org/drawingml/2006/main" xmlns:r="http://schemas.openxmlformats.org/officeDocument/2006/relationships" xmlns:p="http://schemas.openxmlformats.org/presentationml/2006/main" show="0">
   <p:cSld>
     <p:spTree>
@@ -23038,7 +26847,7 @@
             <a:fld id="{19B51A1E-902D-48AF-9020-955120F399B6}" type="slidenum">
               <a:rPr lang="en-US" smtClean="0"/>
               <a:pPr/>
-              <a:t>20</a:t>
+              <a:t>30</a:t>
             </a:fld>
             <a:endParaRPr lang="en-US" dirty="0"/>
           </a:p>
@@ -24107,7 +27916,7 @@
 </p:sld>
 </file>
 
-<file path=ppt/slides/slide21.xml><?xml version="1.0" encoding="utf-8"?>
+<file path=ppt/slides/slide31.xml><?xml version="1.0" encoding="utf-8"?>
 <p:sld xmlns:a="http://schemas.openxmlformats.org/drawingml/2006/main" xmlns:r="http://schemas.openxmlformats.org/officeDocument/2006/relationships" xmlns:p="http://schemas.openxmlformats.org/presentationml/2006/main" show="0">
   <p:cSld>
     <p:spTree>
@@ -24463,7 +28272,7 @@
             <a:fld id="{B5CEABB6-07DC-46E8-9B57-56EC44A396E5}" type="slidenum">
               <a:rPr lang="en-US" smtClean="0"/>
               <a:pPr/>
-              <a:t>21</a:t>
+              <a:t>31</a:t>
             </a:fld>
             <a:endParaRPr lang="en-US" dirty="0"/>
           </a:p>
@@ -24482,7 +28291,7 @@
 </p:sld>
 </file>
 
-<file path=ppt/slides/slide22.xml><?xml version="1.0" encoding="utf-8"?>
+<file path=ppt/slides/slide32.xml><?xml version="1.0" encoding="utf-8"?>
 <p:sld xmlns:a="http://schemas.openxmlformats.org/drawingml/2006/main" xmlns:r="http://schemas.openxmlformats.org/officeDocument/2006/relationships" xmlns:p="http://schemas.openxmlformats.org/presentationml/2006/main" show="0">
   <p:cSld>
     <p:spTree>
@@ -26768,7 +30577,7 @@
             <a:fld id="{B5CEABB6-07DC-46E8-9B57-56EC44A396E5}" type="slidenum">
               <a:rPr lang="en-US" smtClean="0"/>
               <a:pPr/>
-              <a:t>22</a:t>
+              <a:t>32</a:t>
             </a:fld>
             <a:endParaRPr lang="en-US" dirty="0"/>
           </a:p>
@@ -26879,7 +30688,7 @@
 </p:sld>
 </file>
 
-<file path=ppt/slides/slide23.xml><?xml version="1.0" encoding="utf-8"?>
+<file path=ppt/slides/slide33.xml><?xml version="1.0" encoding="utf-8"?>
 <p:sld xmlns:a="http://schemas.openxmlformats.org/drawingml/2006/main" xmlns:r="http://schemas.openxmlformats.org/officeDocument/2006/relationships" xmlns:p="http://schemas.openxmlformats.org/presentationml/2006/main" show="0">
   <p:cSld>
     <p:spTree>
@@ -28809,7 +32618,7 @@
         </p:spPr>
         <p:txBody>
           <a:bodyPr vert="horz" lIns="91440" tIns="45720" rIns="91440" bIns="45720" rtlCol="0">
-            <a:normAutofit fontScale="92500"/>
+            <a:normAutofit/>
           </a:bodyPr>
           <a:lstStyle>
             <a:lvl1pPr marL="228600" indent="-228600" algn="l" defTabSz="914400" rtl="0" eaLnBrk="1" latinLnBrk="0" hangingPunct="1">
@@ -29824,7 +33633,7 @@
             <a:fld id="{19B51A1E-902D-48AF-9020-955120F399B6}" type="slidenum">
               <a:rPr lang="en-US" smtClean="0"/>
               <a:pPr/>
-              <a:t>23</a:t>
+              <a:t>33</a:t>
             </a:fld>
             <a:endParaRPr lang="en-US" dirty="0"/>
           </a:p>
@@ -29843,7 +33652,7 @@
 </p:sld>
 </file>
 
-<file path=ppt/slides/slide24.xml><?xml version="1.0" encoding="utf-8"?>
+<file path=ppt/slides/slide34.xml><?xml version="1.0" encoding="utf-8"?>
 <p:sld xmlns:a="http://schemas.openxmlformats.org/drawingml/2006/main" xmlns:r="http://schemas.openxmlformats.org/officeDocument/2006/relationships" xmlns:p="http://schemas.openxmlformats.org/presentationml/2006/main" show="0">
   <p:cSld>
     <p:spTree>
@@ -29990,7 +33799,7 @@
             <a:fld id="{B5CEABB6-07DC-46E8-9B57-56EC44A396E5}" type="slidenum">
               <a:rPr lang="en-US" smtClean="0"/>
               <a:pPr/>
-              <a:t>24</a:t>
+              <a:t>34</a:t>
             </a:fld>
             <a:endParaRPr lang="en-US" dirty="0"/>
           </a:p>
@@ -33215,7 +37024,7 @@
 </p:sld>
 </file>
 
-<file path=ppt/slides/slide25.xml><?xml version="1.0" encoding="utf-8"?>
+<file path=ppt/slides/slide35.xml><?xml version="1.0" encoding="utf-8"?>
 <p:sld xmlns:a="http://schemas.openxmlformats.org/drawingml/2006/main" xmlns:r="http://schemas.openxmlformats.org/officeDocument/2006/relationships" xmlns:p="http://schemas.openxmlformats.org/presentationml/2006/main" show="0">
   <p:cSld>
     <p:spTree>
@@ -33766,7 +37575,7 @@
             <a:fld id="{B5CEABB6-07DC-46E8-9B57-56EC44A396E5}" type="slidenum">
               <a:rPr lang="en-US" smtClean="0"/>
               <a:pPr/>
-              <a:t>25</a:t>
+              <a:t>35</a:t>
             </a:fld>
             <a:endParaRPr lang="en-US" dirty="0"/>
           </a:p>
@@ -33785,7 +37594,7 @@
 </p:sld>
 </file>
 
-<file path=ppt/slides/slide26.xml><?xml version="1.0" encoding="utf-8"?>
+<file path=ppt/slides/slide36.xml><?xml version="1.0" encoding="utf-8"?>
 <p:sld xmlns:a="http://schemas.openxmlformats.org/drawingml/2006/main" xmlns:r="http://schemas.openxmlformats.org/officeDocument/2006/relationships" xmlns:p="http://schemas.openxmlformats.org/presentationml/2006/main" show="0">
   <p:cSld>
     <p:spTree>
@@ -34742,7 +38551,7 @@
             <a:fld id="{B5CEABB6-07DC-46E8-9B57-56EC44A396E5}" type="slidenum">
               <a:rPr lang="en-US" smtClean="0"/>
               <a:pPr/>
-              <a:t>26</a:t>
+              <a:t>36</a:t>
             </a:fld>
             <a:endParaRPr lang="en-US" dirty="0"/>
           </a:p>
@@ -34761,7 +38570,7 @@
 </p:sld>
 </file>
 
-<file path=ppt/slides/slide27.xml><?xml version="1.0" encoding="utf-8"?>
+<file path=ppt/slides/slide37.xml><?xml version="1.0" encoding="utf-8"?>
 <p:sld xmlns:a="http://schemas.openxmlformats.org/drawingml/2006/main" xmlns:r="http://schemas.openxmlformats.org/officeDocument/2006/relationships" xmlns:p="http://schemas.openxmlformats.org/presentationml/2006/main" show="0">
   <p:cSld>
     <p:spTree>
@@ -35432,7 +39241,7 @@
             <a:fld id="{B5CEABB6-07DC-46E8-9B57-56EC44A396E5}" type="slidenum">
               <a:rPr lang="en-US" smtClean="0"/>
               <a:pPr/>
-              <a:t>27</a:t>
+              <a:t>37</a:t>
             </a:fld>
             <a:endParaRPr lang="en-US" dirty="0"/>
           </a:p>
@@ -35442,397 +39251,6 @@
     <p:extLst>
       <p:ext uri="{BB962C8B-B14F-4D97-AF65-F5344CB8AC3E}">
         <p14:creationId xmlns:p14="http://schemas.microsoft.com/office/powerpoint/2010/main" val="1177824853"/>
-      </p:ext>
-    </p:extLst>
-  </p:cSld>
-  <p:clrMapOvr>
-    <a:masterClrMapping/>
-  </p:clrMapOvr>
-</p:sld>
-</file>
-
-<file path=ppt/slides/slide3.xml><?xml version="1.0" encoding="utf-8"?>
-<p:sld xmlns:a="http://schemas.openxmlformats.org/drawingml/2006/main" xmlns:r="http://schemas.openxmlformats.org/officeDocument/2006/relationships" xmlns:p="http://schemas.openxmlformats.org/presentationml/2006/main">
-  <p:cSld>
-    <p:spTree>
-      <p:nvGrpSpPr>
-        <p:cNvPr id="1" name=""/>
-        <p:cNvGrpSpPr/>
-        <p:nvPr/>
-      </p:nvGrpSpPr>
-      <p:grpSpPr>
-        <a:xfrm>
-          <a:off x="0" y="0"/>
-          <a:ext cx="0" cy="0"/>
-          <a:chOff x="0" y="0"/>
-          <a:chExt cx="0" cy="0"/>
-        </a:xfrm>
-      </p:grpSpPr>
-      <p:sp>
-        <p:nvSpPr>
-          <p:cNvPr id="2" name="Title 1">
-            <a:extLst>
-              <a:ext uri="{FF2B5EF4-FFF2-40B4-BE49-F238E27FC236}">
-                <a16:creationId xmlns:a16="http://schemas.microsoft.com/office/drawing/2014/main" id="{67708C79-A4AC-4B5D-92DF-600737E4D11A}"/>
-              </a:ext>
-            </a:extLst>
-          </p:cNvPr>
-          <p:cNvSpPr>
-            <a:spLocks noGrp="1"/>
-          </p:cNvSpPr>
-          <p:nvPr>
-            <p:ph type="title"/>
-          </p:nvPr>
-        </p:nvSpPr>
-        <p:spPr>
-          <a:xfrm>
-            <a:off x="838200" y="5509419"/>
-            <a:ext cx="4082142" cy="585788"/>
-          </a:xfrm>
-        </p:spPr>
-        <p:txBody>
-          <a:bodyPr>
-            <a:normAutofit fontScale="90000"/>
-          </a:bodyPr>
-          <a:lstStyle/>
-          <a:p>
-            <a:r>
-              <a:rPr lang="en-US" dirty="0"/>
-              <a:t>KEY RECOMMENDATIONS</a:t>
-            </a:r>
-          </a:p>
-        </p:txBody>
-      </p:sp>
-      <p:sp>
-        <p:nvSpPr>
-          <p:cNvPr id="3" name="Content Placeholder 2">
-            <a:extLst>
-              <a:ext uri="{FF2B5EF4-FFF2-40B4-BE49-F238E27FC236}">
-                <a16:creationId xmlns:a16="http://schemas.microsoft.com/office/drawing/2014/main" id="{7D779DE4-CAEA-4617-897E-FEC9A2AC2D6A}"/>
-              </a:ext>
-            </a:extLst>
-          </p:cNvPr>
-          <p:cNvSpPr>
-            <a:spLocks noGrp="1"/>
-          </p:cNvSpPr>
-          <p:nvPr>
-            <p:ph type="body" sz="quarter" idx="13"/>
-          </p:nvPr>
-        </p:nvSpPr>
-        <p:spPr>
-          <a:xfrm>
-            <a:off x="148318" y="1481138"/>
-            <a:ext cx="2141764" cy="514350"/>
-          </a:xfrm>
-        </p:spPr>
-        <p:txBody>
-          <a:bodyPr vert="horz" lIns="91440" tIns="45720" rIns="91440" bIns="45720" rtlCol="0" anchor="ctr">
-            <a:normAutofit lnSpcReduction="10000"/>
-          </a:bodyPr>
-          <a:lstStyle/>
-          <a:p>
-            <a:r>
-              <a:rPr lang="en-US" dirty="0"/>
-              <a:t>DELIVERY PERFORMANCE</a:t>
-            </a:r>
-          </a:p>
-        </p:txBody>
-      </p:sp>
-      <p:sp>
-        <p:nvSpPr>
-          <p:cNvPr id="4" name="Text Placeholder 3">
-            <a:extLst>
-              <a:ext uri="{FF2B5EF4-FFF2-40B4-BE49-F238E27FC236}">
-                <a16:creationId xmlns:a16="http://schemas.microsoft.com/office/drawing/2014/main" id="{F5FF1291-56EB-4A7B-A198-1D91F9ECC5D3}"/>
-              </a:ext>
-            </a:extLst>
-          </p:cNvPr>
-          <p:cNvSpPr>
-            <a:spLocks noGrp="1"/>
-          </p:cNvSpPr>
-          <p:nvPr>
-            <p:ph type="body" sz="quarter" idx="14"/>
-          </p:nvPr>
-        </p:nvSpPr>
-        <p:spPr>
-          <a:xfrm>
-            <a:off x="714375" y="2557463"/>
-            <a:ext cx="2141764" cy="514350"/>
-          </a:xfrm>
-        </p:spPr>
-        <p:txBody>
-          <a:bodyPr/>
-          <a:lstStyle/>
-          <a:p>
-            <a:r>
-              <a:rPr lang="en-US" dirty="0"/>
-              <a:t>CUSTOMER SEGMENTATION</a:t>
-            </a:r>
-          </a:p>
-        </p:txBody>
-      </p:sp>
-      <p:sp>
-        <p:nvSpPr>
-          <p:cNvPr id="5" name="Text Placeholder 4">
-            <a:extLst>
-              <a:ext uri="{FF2B5EF4-FFF2-40B4-BE49-F238E27FC236}">
-                <a16:creationId xmlns:a16="http://schemas.microsoft.com/office/drawing/2014/main" id="{6184E21C-7534-4FB5-9709-F7D1A11034F3}"/>
-              </a:ext>
-            </a:extLst>
-          </p:cNvPr>
-          <p:cNvSpPr>
-            <a:spLocks noGrp="1"/>
-          </p:cNvSpPr>
-          <p:nvPr>
-            <p:ph type="body" sz="quarter" idx="15"/>
-          </p:nvPr>
-        </p:nvSpPr>
-        <p:spPr>
-          <a:xfrm>
-            <a:off x="1320800" y="3633788"/>
-            <a:ext cx="2141764" cy="514350"/>
-          </a:xfrm>
-        </p:spPr>
-        <p:txBody>
-          <a:bodyPr/>
-          <a:lstStyle/>
-          <a:p>
-            <a:r>
-              <a:rPr lang="en-US" dirty="0"/>
-              <a:t>SELLER SCORE CARD</a:t>
-            </a:r>
-          </a:p>
-        </p:txBody>
-      </p:sp>
-      <p:sp>
-        <p:nvSpPr>
-          <p:cNvPr id="7" name="Text Placeholder 6">
-            <a:extLst>
-              <a:ext uri="{FF2B5EF4-FFF2-40B4-BE49-F238E27FC236}">
-                <a16:creationId xmlns:a16="http://schemas.microsoft.com/office/drawing/2014/main" id="{D7EB25CA-DA83-483D-AF83-0001BDF2DE2B}"/>
-              </a:ext>
-            </a:extLst>
-          </p:cNvPr>
-          <p:cNvSpPr>
-            <a:spLocks noGrp="1"/>
-          </p:cNvSpPr>
-          <p:nvPr>
-            <p:ph type="body" sz="quarter" idx="17"/>
-          </p:nvPr>
-        </p:nvSpPr>
-        <p:spPr>
-          <a:xfrm>
-            <a:off x="4401535" y="1594478"/>
-            <a:ext cx="5539095" cy="1010842"/>
-          </a:xfrm>
-        </p:spPr>
-        <p:txBody>
-          <a:bodyPr/>
-          <a:lstStyle/>
-          <a:p>
-            <a:r>
-              <a:rPr lang="en-US" dirty="0"/>
-              <a:t>Improvements in Actual Delivery Time will result in improved Customer Review Scores that drive more repeat orders.</a:t>
-            </a:r>
-          </a:p>
-          <a:p>
-            <a:endParaRPr lang="en-US" dirty="0"/>
-          </a:p>
-        </p:txBody>
-      </p:sp>
-      <p:sp>
-        <p:nvSpPr>
-          <p:cNvPr id="8" name="Text Placeholder 7">
-            <a:extLst>
-              <a:ext uri="{FF2B5EF4-FFF2-40B4-BE49-F238E27FC236}">
-                <a16:creationId xmlns:a16="http://schemas.microsoft.com/office/drawing/2014/main" id="{B46CE8C6-E12D-4A0D-8553-7FFA31941D56}"/>
-              </a:ext>
-            </a:extLst>
-          </p:cNvPr>
-          <p:cNvSpPr>
-            <a:spLocks noGrp="1"/>
-          </p:cNvSpPr>
-          <p:nvPr>
-            <p:ph type="body" sz="quarter" idx="18"/>
-          </p:nvPr>
-        </p:nvSpPr>
-        <p:spPr>
-          <a:xfrm>
-            <a:off x="4986028" y="2682564"/>
-            <a:ext cx="5539095" cy="1010842"/>
-          </a:xfrm>
-        </p:spPr>
-        <p:txBody>
-          <a:bodyPr/>
-          <a:lstStyle/>
-          <a:p>
-            <a:r>
-              <a:rPr lang="en-US" dirty="0"/>
-              <a:t>Customers should be segmented by band (Gold / Silver / Bronze) for </a:t>
-            </a:r>
-            <a:r>
-              <a:rPr lang="en-US" dirty="0" err="1"/>
-              <a:t>Olist</a:t>
-            </a:r>
-            <a:r>
-              <a:rPr lang="en-US" dirty="0"/>
-              <a:t> to focus on customers in cities with higher total spend.</a:t>
-            </a:r>
-          </a:p>
-          <a:p>
-            <a:endParaRPr lang="en-US" dirty="0"/>
-          </a:p>
-        </p:txBody>
-      </p:sp>
-      <p:sp>
-        <p:nvSpPr>
-          <p:cNvPr id="9" name="Text Placeholder 8">
-            <a:extLst>
-              <a:ext uri="{FF2B5EF4-FFF2-40B4-BE49-F238E27FC236}">
-                <a16:creationId xmlns:a16="http://schemas.microsoft.com/office/drawing/2014/main" id="{1C7D5285-85DF-4331-A6FA-1AE847CA47AE}"/>
-              </a:ext>
-            </a:extLst>
-          </p:cNvPr>
-          <p:cNvSpPr>
-            <a:spLocks noGrp="1"/>
-          </p:cNvSpPr>
-          <p:nvPr>
-            <p:ph type="body" sz="quarter" idx="19"/>
-          </p:nvPr>
-        </p:nvSpPr>
-        <p:spPr>
-          <a:xfrm>
-            <a:off x="5576937" y="3755394"/>
-            <a:ext cx="5539095" cy="1010842"/>
-          </a:xfrm>
-        </p:spPr>
-        <p:txBody>
-          <a:bodyPr/>
-          <a:lstStyle/>
-          <a:p>
-            <a:r>
-              <a:rPr lang="en-US" dirty="0"/>
-              <a:t>Sellers may be prioritized by Total Order Value and Average Review Score to increase the quality of Sellers on the </a:t>
-            </a:r>
-            <a:r>
-              <a:rPr lang="en-US" dirty="0" err="1"/>
-              <a:t>Olist</a:t>
-            </a:r>
-            <a:r>
-              <a:rPr lang="en-US" dirty="0"/>
-              <a:t> platform.</a:t>
-            </a:r>
-          </a:p>
-          <a:p>
-            <a:endParaRPr lang="en-US" dirty="0"/>
-          </a:p>
-        </p:txBody>
-      </p:sp>
-      <p:sp>
-        <p:nvSpPr>
-          <p:cNvPr id="11" name="Date Placeholder 10">
-            <a:extLst>
-              <a:ext uri="{FF2B5EF4-FFF2-40B4-BE49-F238E27FC236}">
-                <a16:creationId xmlns:a16="http://schemas.microsoft.com/office/drawing/2014/main" id="{40BF6865-7FAE-4B56-A995-ADF1582DCC64}"/>
-              </a:ext>
-            </a:extLst>
-          </p:cNvPr>
-          <p:cNvSpPr>
-            <a:spLocks noGrp="1"/>
-          </p:cNvSpPr>
-          <p:nvPr>
-            <p:ph type="dt" sz="half" idx="10"/>
-          </p:nvPr>
-        </p:nvSpPr>
-        <p:spPr>
-          <a:xfrm>
-            <a:off x="838200" y="6356350"/>
-            <a:ext cx="2743200" cy="365125"/>
-          </a:xfrm>
-        </p:spPr>
-        <p:txBody>
-          <a:bodyPr/>
-          <a:lstStyle/>
-          <a:p>
-            <a:r>
-              <a:rPr lang="en-US" dirty="0"/>
-              <a:t>20XX</a:t>
-            </a:r>
-          </a:p>
-        </p:txBody>
-      </p:sp>
-      <p:sp>
-        <p:nvSpPr>
-          <p:cNvPr id="12" name="Footer Placeholder 11">
-            <a:extLst>
-              <a:ext uri="{FF2B5EF4-FFF2-40B4-BE49-F238E27FC236}">
-                <a16:creationId xmlns:a16="http://schemas.microsoft.com/office/drawing/2014/main" id="{7312B71A-5E84-41DE-9754-5F6291F6DFB7}"/>
-              </a:ext>
-            </a:extLst>
-          </p:cNvPr>
-          <p:cNvSpPr>
-            <a:spLocks noGrp="1"/>
-          </p:cNvSpPr>
-          <p:nvPr>
-            <p:ph type="ftr" sz="quarter" idx="11"/>
-          </p:nvPr>
-        </p:nvSpPr>
-        <p:spPr>
-          <a:xfrm>
-            <a:off x="6155823" y="6356350"/>
-            <a:ext cx="1808712" cy="365125"/>
-          </a:xfrm>
-        </p:spPr>
-        <p:txBody>
-          <a:bodyPr/>
-          <a:lstStyle/>
-          <a:p>
-            <a:r>
-              <a:rPr lang="en-US" dirty="0"/>
-              <a:t>Pitch Deck</a:t>
-            </a:r>
-          </a:p>
-        </p:txBody>
-      </p:sp>
-      <p:sp>
-        <p:nvSpPr>
-          <p:cNvPr id="13" name="Slide Number Placeholder 12">
-            <a:extLst>
-              <a:ext uri="{FF2B5EF4-FFF2-40B4-BE49-F238E27FC236}">
-                <a16:creationId xmlns:a16="http://schemas.microsoft.com/office/drawing/2014/main" id="{E3984D70-BD95-4E1F-9725-902B5D74DED6}"/>
-              </a:ext>
-            </a:extLst>
-          </p:cNvPr>
-          <p:cNvSpPr>
-            <a:spLocks noGrp="1"/>
-          </p:cNvSpPr>
-          <p:nvPr>
-            <p:ph type="sldNum" sz="quarter" idx="12"/>
-          </p:nvPr>
-        </p:nvSpPr>
-        <p:spPr>
-          <a:xfrm>
-            <a:off x="10810874" y="6356350"/>
-            <a:ext cx="542925" cy="365125"/>
-          </a:xfrm>
-        </p:spPr>
-        <p:txBody>
-          <a:bodyPr/>
-          <a:lstStyle/>
-          <a:p>
-            <a:fld id="{B5CEABB6-07DC-46E8-9B57-56EC44A396E5}" type="slidenum">
-              <a:rPr lang="en-US" smtClean="0"/>
-              <a:pPr/>
-              <a:t>3</a:t>
-            </a:fld>
-            <a:endParaRPr lang="en-US" dirty="0"/>
-          </a:p>
-        </p:txBody>
-      </p:sp>
-    </p:spTree>
-    <p:extLst>
-      <p:ext uri="{BB962C8B-B14F-4D97-AF65-F5344CB8AC3E}">
-        <p14:creationId xmlns:p14="http://schemas.microsoft.com/office/powerpoint/2010/main" val="1738561688"/>
       </p:ext>
     </p:extLst>
   </p:cSld>
@@ -35850,7 +39268,7 @@
         <p:cNvPr id="1" name="">
           <a:extLst>
             <a:ext uri="{FF2B5EF4-FFF2-40B4-BE49-F238E27FC236}">
-              <a16:creationId xmlns:a16="http://schemas.microsoft.com/office/drawing/2014/main" id="{D77CE486-DB28-396C-AE2D-BA6CB931E470}"/>
+              <a16:creationId xmlns:a16="http://schemas.microsoft.com/office/drawing/2014/main" id="{72E6C939-2EF0-6265-043F-90BA12158E45}"/>
             </a:ext>
           </a:extLst>
         </p:cNvPr>
@@ -35867,10 +39285,10 @@
       </p:grpSpPr>
       <p:sp>
         <p:nvSpPr>
-          <p:cNvPr id="2" name="Title 1">
-            <a:extLst>
-              <a:ext uri="{FF2B5EF4-FFF2-40B4-BE49-F238E27FC236}">
-                <a16:creationId xmlns:a16="http://schemas.microsoft.com/office/drawing/2014/main" id="{095F3347-3EB1-4456-9BE9-287B96B456E2}"/>
+          <p:cNvPr id="3" name="Subtitle 2">
+            <a:extLst>
+              <a:ext uri="{FF2B5EF4-FFF2-40B4-BE49-F238E27FC236}">
+                <a16:creationId xmlns:a16="http://schemas.microsoft.com/office/drawing/2014/main" id="{615CF503-654C-B35A-83BD-331E9E7137E4}"/>
               </a:ext>
               <a:ext uri="{C183D7F6-B498-43B3-948B-1728B52AA6E4}">
                 <adec:decorative xmlns:adec="http://schemas.microsoft.com/office/drawing/2017/decorative" val="0"/>
@@ -35881,49 +39299,13 @@
             <a:spLocks noGrp="1"/>
           </p:cNvSpPr>
           <p:nvPr>
-            <p:ph type="title"/>
-          </p:nvPr>
-        </p:nvSpPr>
-        <p:spPr>
-          <a:xfrm>
-            <a:off x="1333499" y="1020445"/>
-            <a:ext cx="3171825" cy="1325563"/>
-          </a:xfrm>
-        </p:spPr>
-        <p:txBody>
-          <a:bodyPr/>
-          <a:lstStyle/>
-          <a:p>
-            <a:r>
-              <a:rPr lang="en-US" dirty="0"/>
-              <a:t>Technical Overview</a:t>
-            </a:r>
-          </a:p>
-        </p:txBody>
-      </p:sp>
-      <p:sp>
-        <p:nvSpPr>
-          <p:cNvPr id="3" name="Subtitle 2">
-            <a:extLst>
-              <a:ext uri="{FF2B5EF4-FFF2-40B4-BE49-F238E27FC236}">
-                <a16:creationId xmlns:a16="http://schemas.microsoft.com/office/drawing/2014/main" id="{E6ED3EF8-DCF4-2DC5-2E0B-E374E066EAE3}"/>
-              </a:ext>
-              <a:ext uri="{C183D7F6-B498-43B3-948B-1728B52AA6E4}">
-                <adec:decorative xmlns:adec="http://schemas.microsoft.com/office/drawing/2017/decorative" val="0"/>
-              </a:ext>
-            </a:extLst>
-          </p:cNvPr>
-          <p:cNvSpPr>
-            <a:spLocks noGrp="1"/>
-          </p:cNvSpPr>
-          <p:nvPr>
             <p:ph idx="1"/>
           </p:nvPr>
         </p:nvSpPr>
         <p:spPr>
           <a:xfrm>
-            <a:off x="1333499" y="2924175"/>
-            <a:ext cx="3171825" cy="2519363"/>
+            <a:off x="659731" y="1499636"/>
+            <a:ext cx="5048050" cy="4564280"/>
           </a:xfrm>
         </p:spPr>
         <p:txBody>
@@ -35932,34 +39314,42 @@
           </a:bodyPr>
           <a:lstStyle/>
           <a:p>
-            <a:r>
-              <a:rPr lang="en-US" dirty="0"/>
-              <a:t>The next 2-3 slides should include some info on:</a:t>
-            </a:r>
-            <a:br>
-              <a:rPr lang="en-US" dirty="0"/>
-            </a:br>
-            <a:r>
-              <a:rPr lang="en-US" dirty="0"/>
-              <a:t>1) Architecture</a:t>
-            </a:r>
-          </a:p>
-          <a:p>
-            <a:r>
-              <a:rPr lang="en-US" dirty="0"/>
-              <a:t>2) Database Warehouse Design (Star Schema and Dimension Tables)</a:t>
-            </a:r>
-          </a:p>
-          <a:p>
-            <a:r>
-              <a:rPr lang="en-US" dirty="0"/>
-              <a:t>3) ELT Pipeline</a:t>
-            </a:r>
-          </a:p>
-          <a:p>
-            <a:r>
-              <a:rPr lang="en-US" dirty="0"/>
-              <a:t>4) Data Quality Testing</a:t>
+            <a:pPr marL="342900" indent="-342900">
+              <a:buAutoNum type="arabicPeriod"/>
+            </a:pPr>
+            <a:r>
+              <a:rPr lang="en-US" sz="2400" dirty="0"/>
+              <a:t>How efficiently are orders being delivered?</a:t>
+            </a:r>
+          </a:p>
+          <a:p>
+            <a:pPr marL="342900" indent="-342900">
+              <a:buAutoNum type="arabicPeriod"/>
+            </a:pPr>
+            <a:endParaRPr lang="en-US" sz="2400" dirty="0"/>
+          </a:p>
+          <a:p>
+            <a:pPr marL="342900" indent="-342900">
+              <a:buAutoNum type="arabicPeriod"/>
+            </a:pPr>
+            <a:r>
+              <a:rPr lang="en-US" sz="2400" dirty="0"/>
+              <a:t>Who are the most valuable customers?</a:t>
+            </a:r>
+          </a:p>
+          <a:p>
+            <a:pPr marL="342900" indent="-342900">
+              <a:buAutoNum type="arabicPeriod"/>
+            </a:pPr>
+            <a:endParaRPr lang="en-US" sz="2400" dirty="0"/>
+          </a:p>
+          <a:p>
+            <a:pPr marL="342900" indent="-342900">
+              <a:buAutoNum type="arabicPeriod"/>
+            </a:pPr>
+            <a:r>
+              <a:rPr lang="en-US" sz="2400" dirty="0"/>
+              <a:t>Which sellers generate the most revenue and provide the best customer experience?</a:t>
             </a:r>
           </a:p>
         </p:txBody>
@@ -35969,7 +39359,7 @@
           <p:cNvPr id="6" name="Date Placeholder 5">
             <a:extLst>
               <a:ext uri="{FF2B5EF4-FFF2-40B4-BE49-F238E27FC236}">
-                <a16:creationId xmlns:a16="http://schemas.microsoft.com/office/drawing/2014/main" id="{A95C0EDA-1A6C-6146-314A-0F919A3EAA49}"/>
+                <a16:creationId xmlns:a16="http://schemas.microsoft.com/office/drawing/2014/main" id="{B18E9D2C-8EEF-26C3-9D47-69FE3EF10F26}"/>
               </a:ext>
             </a:extLst>
           </p:cNvPr>
@@ -35992,7 +39382,7 @@
           <a:p>
             <a:r>
               <a:rPr lang="en-US" dirty="0"/>
-              <a:t>20XX</a:t>
+              <a:t>1nsight</a:t>
             </a:r>
           </a:p>
         </p:txBody>
@@ -36002,7 +39392,7 @@
           <p:cNvPr id="5" name="Footer Placeholder 4">
             <a:extLst>
               <a:ext uri="{FF2B5EF4-FFF2-40B4-BE49-F238E27FC236}">
-                <a16:creationId xmlns:a16="http://schemas.microsoft.com/office/drawing/2014/main" id="{B373CE98-8CD9-EE16-FF40-55B5F312E26E}"/>
+                <a16:creationId xmlns:a16="http://schemas.microsoft.com/office/drawing/2014/main" id="{AA8D12B3-FDA9-2DD9-C874-A0CB48A3ADD4}"/>
               </a:ext>
             </a:extLst>
           </p:cNvPr>
@@ -36025,7 +39415,7 @@
           <a:p>
             <a:r>
               <a:rPr lang="en-US" dirty="0"/>
-              <a:t>Pitch Deck</a:t>
+              <a:t>PROBLEM STATEMENTS</a:t>
             </a:r>
           </a:p>
         </p:txBody>
@@ -36035,7 +39425,7 @@
           <p:cNvPr id="4" name="Slide Number Placeholder 3">
             <a:extLst>
               <a:ext uri="{FF2B5EF4-FFF2-40B4-BE49-F238E27FC236}">
-                <a16:creationId xmlns:a16="http://schemas.microsoft.com/office/drawing/2014/main" id="{2EB7B7E8-8D59-A066-8A15-B0F2C4B11BF2}"/>
+                <a16:creationId xmlns:a16="http://schemas.microsoft.com/office/drawing/2014/main" id="{918DD5B3-4AEA-9731-554D-9CBEF5BB9EC4}"/>
               </a:ext>
             </a:extLst>
           </p:cNvPr>
@@ -36065,10 +39455,116 @@
           </a:p>
         </p:txBody>
       </p:sp>
+      <p:sp>
+        <p:nvSpPr>
+          <p:cNvPr id="7" name="Title 1">
+            <a:extLst>
+              <a:ext uri="{FF2B5EF4-FFF2-40B4-BE49-F238E27FC236}">
+                <a16:creationId xmlns:a16="http://schemas.microsoft.com/office/drawing/2014/main" id="{394708DC-60C7-B34A-FC5C-E291B6D9DA9F}"/>
+              </a:ext>
+            </a:extLst>
+          </p:cNvPr>
+          <p:cNvSpPr txBox="1">
+            <a:spLocks/>
+          </p:cNvSpPr>
+          <p:nvPr/>
+        </p:nvSpPr>
+        <p:spPr>
+          <a:xfrm>
+            <a:off x="401473" y="201086"/>
+            <a:ext cx="10952326" cy="929779"/>
+          </a:xfrm>
+          <a:prstGeom prst="rect">
+            <a:avLst/>
+          </a:prstGeom>
+        </p:spPr>
+        <p:txBody>
+          <a:bodyPr vert="horz" lIns="91440" tIns="45720" rIns="91440" bIns="45720" rtlCol="0" anchor="b">
+            <a:normAutofit/>
+          </a:bodyPr>
+          <a:lstStyle>
+            <a:lvl1pPr algn="l" defTabSz="914400" rtl="0" eaLnBrk="1" latinLnBrk="0" hangingPunct="1">
+              <a:lnSpc>
+                <a:spcPct val="90000"/>
+              </a:lnSpc>
+              <a:spcBef>
+                <a:spcPct val="0"/>
+              </a:spcBef>
+              <a:buNone/>
+              <a:defRPr sz="2800" kern="1200" cap="all" spc="150" baseline="0">
+                <a:solidFill>
+                  <a:schemeClr val="tx1">
+                    <a:lumMod val="75000"/>
+                    <a:lumOff val="25000"/>
+                  </a:schemeClr>
+                </a:solidFill>
+                <a:latin typeface="+mj-lt"/>
+                <a:ea typeface="+mj-ea"/>
+                <a:cs typeface="+mj-cs"/>
+              </a:defRPr>
+            </a:lvl1pPr>
+          </a:lstStyle>
+          <a:p>
+            <a:r>
+              <a:rPr lang="en-US" dirty="0"/>
+              <a:t>OLIST NEEDS TO ANSWER 3 KEY PROBLEM STATEMENTS TO ENABLE ITS NEXT PHASE OF GROWTH…</a:t>
+            </a:r>
+          </a:p>
+        </p:txBody>
+      </p:sp>
+      <p:sp>
+        <p:nvSpPr>
+          <p:cNvPr id="10" name="Rectangle 9">
+            <a:extLst>
+              <a:ext uri="{FF2B5EF4-FFF2-40B4-BE49-F238E27FC236}">
+                <a16:creationId xmlns:a16="http://schemas.microsoft.com/office/drawing/2014/main" id="{73D28616-1EE4-B440-4DF2-BBF49272F428}"/>
+              </a:ext>
+            </a:extLst>
+          </p:cNvPr>
+          <p:cNvSpPr/>
+          <p:nvPr/>
+        </p:nvSpPr>
+        <p:spPr>
+          <a:xfrm>
+            <a:off x="8335478" y="2589196"/>
+            <a:ext cx="2396690" cy="914400"/>
+          </a:xfrm>
+          <a:prstGeom prst="rect">
+            <a:avLst/>
+          </a:prstGeom>
+        </p:spPr>
+        <p:style>
+          <a:lnRef idx="2">
+            <a:schemeClr val="dk1">
+              <a:shade val="15000"/>
+            </a:schemeClr>
+          </a:lnRef>
+          <a:fillRef idx="1">
+            <a:schemeClr val="dk1"/>
+          </a:fillRef>
+          <a:effectRef idx="0">
+            <a:schemeClr val="dk1"/>
+          </a:effectRef>
+          <a:fontRef idx="minor">
+            <a:schemeClr val="lt1"/>
+          </a:fontRef>
+        </p:style>
+        <p:txBody>
+          <a:bodyPr rtlCol="0" anchor="ctr"/>
+          <a:lstStyle/>
+          <a:p>
+            <a:pPr algn="ctr"/>
+            <a:r>
+              <a:rPr lang="en-US" dirty="0"/>
+              <a:t>INSERT GRAPHIC OF A BRAZILIAN E-COMERCE COMPANY OLIST HERE</a:t>
+            </a:r>
+          </a:p>
+        </p:txBody>
+      </p:sp>
     </p:spTree>
     <p:extLst>
       <p:ext uri="{BB962C8B-B14F-4D97-AF65-F5344CB8AC3E}">
-        <p14:creationId xmlns:p14="http://schemas.microsoft.com/office/powerpoint/2010/main" val="583794120"/>
+        <p14:creationId xmlns:p14="http://schemas.microsoft.com/office/powerpoint/2010/main" val="94256970"/>
       </p:ext>
     </p:extLst>
   </p:cSld>
@@ -36086,7 +39582,7 @@
         <p:cNvPr id="1" name="">
           <a:extLst>
             <a:ext uri="{FF2B5EF4-FFF2-40B4-BE49-F238E27FC236}">
-              <a16:creationId xmlns:a16="http://schemas.microsoft.com/office/drawing/2014/main" id="{45C63BA7-2EE6-DF51-0B29-1AE9373E03E9}"/>
+              <a16:creationId xmlns:a16="http://schemas.microsoft.com/office/drawing/2014/main" id="{32BBD512-7032-960B-5CD0-C02E8802A44E}"/>
             </a:ext>
           </a:extLst>
         </p:cNvPr>
@@ -36101,91 +39597,26 @@
           <a:chExt cx="0" cy="0"/>
         </a:xfrm>
       </p:grpSpPr>
-      <p:pic>
-        <p:nvPicPr>
-          <p:cNvPr id="4" name="Picture 3">
-            <a:extLst>
-              <a:ext uri="{FF2B5EF4-FFF2-40B4-BE49-F238E27FC236}">
-                <a16:creationId xmlns:a16="http://schemas.microsoft.com/office/drawing/2014/main" id="{4A102ED6-AE59-92F0-6968-4FBE8E51913C}"/>
-              </a:ext>
-            </a:extLst>
-          </p:cNvPr>
-          <p:cNvPicPr>
-            <a:picLocks noChangeAspect="1"/>
-          </p:cNvPicPr>
-          <p:nvPr/>
-        </p:nvPicPr>
-        <p:blipFill>
-          <a:blip r:embed="rId2"/>
-          <a:stretch>
-            <a:fillRect/>
-          </a:stretch>
-        </p:blipFill>
-        <p:spPr>
-          <a:xfrm>
-            <a:off x="488698" y="564909"/>
-            <a:ext cx="10861964" cy="5311806"/>
-          </a:xfrm>
-          <a:prstGeom prst="rect">
-            <a:avLst/>
-          </a:prstGeom>
-        </p:spPr>
-      </p:pic>
       <p:sp>
         <p:nvSpPr>
           <p:cNvPr id="2" name="Title 1">
             <a:extLst>
               <a:ext uri="{FF2B5EF4-FFF2-40B4-BE49-F238E27FC236}">
-                <a16:creationId xmlns:a16="http://schemas.microsoft.com/office/drawing/2014/main" id="{100036D3-56D5-33D2-80A1-D6143031B9A0}"/>
-              </a:ext>
-            </a:extLst>
-          </p:cNvPr>
-          <p:cNvSpPr>
-            <a:spLocks noGrp="1"/>
-          </p:cNvSpPr>
-          <p:nvPr>
-            <p:ph type="title"/>
-          </p:nvPr>
-        </p:nvSpPr>
-        <p:spPr>
-          <a:xfrm>
-            <a:off x="401473" y="201086"/>
-            <a:ext cx="10952326" cy="929779"/>
-          </a:xfrm>
-        </p:spPr>
-        <p:txBody>
-          <a:bodyPr>
-            <a:normAutofit/>
-          </a:bodyPr>
-          <a:lstStyle/>
-          <a:p>
-            <a:r>
-              <a:rPr lang="en-US" dirty="0"/>
-              <a:t>A majority of items sold are fulfilled by External Sellers Instead of local sellers…</a:t>
-            </a:r>
-          </a:p>
-        </p:txBody>
-      </p:sp>
-      <p:sp>
-        <p:nvSpPr>
-          <p:cNvPr id="20" name="Date Placeholder 19">
-            <a:extLst>
-              <a:ext uri="{FF2B5EF4-FFF2-40B4-BE49-F238E27FC236}">
-                <a16:creationId xmlns:a16="http://schemas.microsoft.com/office/drawing/2014/main" id="{0377D9B0-B294-AEBC-FD3E-1FBCD51F7C62}"/>
-              </a:ext>
-            </a:extLst>
-          </p:cNvPr>
-          <p:cNvSpPr>
-            <a:spLocks noGrp="1"/>
-          </p:cNvSpPr>
-          <p:nvPr>
-            <p:ph type="dt" sz="half" idx="20"/>
-          </p:nvPr>
-        </p:nvSpPr>
-        <p:spPr>
-          <a:xfrm>
-            <a:off x="5919680" y="6356350"/>
-            <a:ext cx="947516" cy="365125"/>
+                <a16:creationId xmlns:a16="http://schemas.microsoft.com/office/drawing/2014/main" id="{665D50FD-EA90-0F43-7F93-8B4A24347FD8}"/>
+              </a:ext>
+            </a:extLst>
+          </p:cNvPr>
+          <p:cNvSpPr>
+            <a:spLocks noGrp="1"/>
+          </p:cNvSpPr>
+          <p:nvPr>
+            <p:ph type="ctrTitle"/>
+          </p:nvPr>
+        </p:nvSpPr>
+        <p:spPr>
+          <a:xfrm>
+            <a:off x="6991350" y="2571235"/>
+            <a:ext cx="4684094" cy="1715531"/>
           </a:xfrm>
         </p:spPr>
         <p:txBody>
@@ -36194,108 +39625,7 @@
           <a:p>
             <a:r>
               <a:rPr lang="en-US" dirty="0"/>
-              <a:t>20XX</a:t>
-            </a:r>
-          </a:p>
-        </p:txBody>
-      </p:sp>
-      <p:sp>
-        <p:nvSpPr>
-          <p:cNvPr id="21" name="Footer Placeholder 20">
-            <a:extLst>
-              <a:ext uri="{FF2B5EF4-FFF2-40B4-BE49-F238E27FC236}">
-                <a16:creationId xmlns:a16="http://schemas.microsoft.com/office/drawing/2014/main" id="{6772CE63-5862-2B96-C3DA-F4A2D20AC80C}"/>
-              </a:ext>
-            </a:extLst>
-          </p:cNvPr>
-          <p:cNvSpPr>
-            <a:spLocks noGrp="1"/>
-          </p:cNvSpPr>
-          <p:nvPr>
-            <p:ph type="ftr" sz="quarter" idx="21"/>
-          </p:nvPr>
-        </p:nvSpPr>
-        <p:spPr>
-          <a:xfrm>
-            <a:off x="7161955" y="6356350"/>
-            <a:ext cx="3243942" cy="365125"/>
-          </a:xfrm>
-        </p:spPr>
-        <p:txBody>
-          <a:bodyPr/>
-          <a:lstStyle/>
-          <a:p>
-            <a:r>
-              <a:rPr lang="en-US" b="1" dirty="0"/>
-              <a:t>DELIVERY PERFORMANCE</a:t>
-            </a:r>
-          </a:p>
-        </p:txBody>
-      </p:sp>
-      <p:sp>
-        <p:nvSpPr>
-          <p:cNvPr id="22" name="Slide Number Placeholder 21">
-            <a:extLst>
-              <a:ext uri="{FF2B5EF4-FFF2-40B4-BE49-F238E27FC236}">
-                <a16:creationId xmlns:a16="http://schemas.microsoft.com/office/drawing/2014/main" id="{7AA1067A-BC9F-0867-2D02-38761DD502C0}"/>
-              </a:ext>
-            </a:extLst>
-          </p:cNvPr>
-          <p:cNvSpPr>
-            <a:spLocks noGrp="1"/>
-          </p:cNvSpPr>
-          <p:nvPr>
-            <p:ph type="sldNum" sz="quarter" idx="22"/>
-          </p:nvPr>
-        </p:nvSpPr>
-        <p:spPr>
-          <a:xfrm>
-            <a:off x="10700656" y="6356350"/>
-            <a:ext cx="653143" cy="365125"/>
-          </a:xfrm>
-        </p:spPr>
-        <p:txBody>
-          <a:bodyPr/>
-          <a:lstStyle/>
-          <a:p>
-            <a:fld id="{B5CEABB6-07DC-46E8-9B57-56EC44A396E5}" type="slidenum">
-              <a:rPr lang="en-US" smtClean="0"/>
-              <a:pPr/>
-              <a:t>5</a:t>
-            </a:fld>
-            <a:endParaRPr lang="en-US" dirty="0"/>
-          </a:p>
-        </p:txBody>
-      </p:sp>
-      <p:sp>
-        <p:nvSpPr>
-          <p:cNvPr id="29" name="Text Placeholder 28">
-            <a:extLst>
-              <a:ext uri="{FF2B5EF4-FFF2-40B4-BE49-F238E27FC236}">
-                <a16:creationId xmlns:a16="http://schemas.microsoft.com/office/drawing/2014/main" id="{A8963ECA-990C-7640-80EC-8A8C30E94DAE}"/>
-              </a:ext>
-            </a:extLst>
-          </p:cNvPr>
-          <p:cNvSpPr>
-            <a:spLocks noGrp="1"/>
-          </p:cNvSpPr>
-          <p:nvPr>
-            <p:ph type="body" sz="quarter" idx="28"/>
-          </p:nvPr>
-        </p:nvSpPr>
-        <p:spPr>
-          <a:xfrm>
-            <a:off x="838201" y="5602406"/>
-            <a:ext cx="10550420" cy="753944"/>
-          </a:xfrm>
-        </p:spPr>
-        <p:txBody>
-          <a:bodyPr/>
-          <a:lstStyle/>
-          <a:p>
-            <a:r>
-              <a:rPr lang="en-SG" dirty="0"/>
-              <a:t>The Average Delivery Time for orders is significantly longer when they are fulfilled by External Sellers. There is opportunity to reduce Delivery Times by bringing orders closer to the respective markets.</a:t>
+              <a:t>KEY RECOMMENDATIONS</a:t>
             </a:r>
           </a:p>
         </p:txBody>
@@ -36303,7 +39633,7 @@
     </p:spTree>
     <p:extLst>
       <p:ext uri="{BB962C8B-B14F-4D97-AF65-F5344CB8AC3E}">
-        <p14:creationId xmlns:p14="http://schemas.microsoft.com/office/powerpoint/2010/main" val="3566629918"/>
+        <p14:creationId xmlns:p14="http://schemas.microsoft.com/office/powerpoint/2010/main" val="1214893584"/>
       </p:ext>
     </p:extLst>
   </p:cSld>
@@ -36330,56 +39660,61 @@
           <a:chExt cx="0" cy="0"/>
         </a:xfrm>
       </p:grpSpPr>
-      <p:pic>
-        <p:nvPicPr>
-          <p:cNvPr id="31" name="Picture 30">
-            <a:extLst>
-              <a:ext uri="{FF2B5EF4-FFF2-40B4-BE49-F238E27FC236}">
-                <a16:creationId xmlns:a16="http://schemas.microsoft.com/office/drawing/2014/main" id="{0CCE44BD-5945-188D-9A28-9DA7BCA38187}"/>
-              </a:ext>
-            </a:extLst>
-          </p:cNvPr>
-          <p:cNvPicPr>
-            <a:picLocks noChangeAspect="1"/>
-          </p:cNvPicPr>
-          <p:nvPr/>
-        </p:nvPicPr>
-        <p:blipFill>
-          <a:blip r:embed="rId2"/>
-          <a:stretch>
-            <a:fillRect/>
-          </a:stretch>
-        </p:blipFill>
-        <p:spPr>
-          <a:xfrm>
-            <a:off x="838201" y="566211"/>
-            <a:ext cx="10298372" cy="5036195"/>
-          </a:xfrm>
-          <a:prstGeom prst="rect">
-            <a:avLst/>
-          </a:prstGeom>
-        </p:spPr>
-      </p:pic>
-      <p:sp>
-        <p:nvSpPr>
-          <p:cNvPr id="2" name="Title 1">
-            <a:extLst>
-              <a:ext uri="{FF2B5EF4-FFF2-40B4-BE49-F238E27FC236}">
-                <a16:creationId xmlns:a16="http://schemas.microsoft.com/office/drawing/2014/main" id="{75031FE9-9059-4FE8-B4AC-9771F23A1B89}"/>
-              </a:ext>
-            </a:extLst>
-          </p:cNvPr>
-          <p:cNvSpPr>
-            <a:spLocks noGrp="1"/>
-          </p:cNvSpPr>
-          <p:nvPr>
-            <p:ph type="title"/>
-          </p:nvPr>
-        </p:nvSpPr>
-        <p:spPr>
-          <a:xfrm>
-            <a:off x="401473" y="201086"/>
-            <a:ext cx="10952326" cy="929779"/>
+      <p:sp>
+        <p:nvSpPr>
+          <p:cNvPr id="3" name="Content Placeholder 2">
+            <a:extLst>
+              <a:ext uri="{FF2B5EF4-FFF2-40B4-BE49-F238E27FC236}">
+                <a16:creationId xmlns:a16="http://schemas.microsoft.com/office/drawing/2014/main" id="{7D779DE4-CAEA-4617-897E-FEC9A2AC2D6A}"/>
+              </a:ext>
+            </a:extLst>
+          </p:cNvPr>
+          <p:cNvSpPr>
+            <a:spLocks noGrp="1"/>
+          </p:cNvSpPr>
+          <p:nvPr>
+            <p:ph type="body" sz="quarter" idx="13"/>
+          </p:nvPr>
+        </p:nvSpPr>
+        <p:spPr>
+          <a:xfrm>
+            <a:off x="847825" y="2696506"/>
+            <a:ext cx="2141764" cy="514350"/>
+          </a:xfrm>
+        </p:spPr>
+        <p:txBody>
+          <a:bodyPr vert="horz" lIns="91440" tIns="45720" rIns="91440" bIns="45720" rtlCol="0" anchor="ctr">
+            <a:normAutofit lnSpcReduction="10000"/>
+          </a:bodyPr>
+          <a:lstStyle/>
+          <a:p>
+            <a:r>
+              <a:rPr lang="en-US" dirty="0"/>
+              <a:t>DELIVERY PERFORMANCE</a:t>
+            </a:r>
+          </a:p>
+        </p:txBody>
+      </p:sp>
+      <p:sp>
+        <p:nvSpPr>
+          <p:cNvPr id="4" name="Text Placeholder 3">
+            <a:extLst>
+              <a:ext uri="{FF2B5EF4-FFF2-40B4-BE49-F238E27FC236}">
+                <a16:creationId xmlns:a16="http://schemas.microsoft.com/office/drawing/2014/main" id="{F5FF1291-56EB-4A7B-A198-1D91F9ECC5D3}"/>
+              </a:ext>
+            </a:extLst>
+          </p:cNvPr>
+          <p:cNvSpPr>
+            <a:spLocks noGrp="1"/>
+          </p:cNvSpPr>
+          <p:nvPr>
+            <p:ph type="body" sz="quarter" idx="14"/>
+          </p:nvPr>
+        </p:nvSpPr>
+        <p:spPr>
+          <a:xfrm>
+            <a:off x="1413882" y="3772831"/>
+            <a:ext cx="2141764" cy="514350"/>
           </a:xfrm>
         </p:spPr>
         <p:txBody>
@@ -36388,31 +39723,31 @@
           <a:p>
             <a:r>
               <a:rPr lang="en-US" dirty="0"/>
-              <a:t>Customer Review Scores can be significantly improved by reducing Actual Delivery Times…</a:t>
-            </a:r>
-          </a:p>
-        </p:txBody>
-      </p:sp>
-      <p:sp>
-        <p:nvSpPr>
-          <p:cNvPr id="20" name="Date Placeholder 19">
-            <a:extLst>
-              <a:ext uri="{FF2B5EF4-FFF2-40B4-BE49-F238E27FC236}">
-                <a16:creationId xmlns:a16="http://schemas.microsoft.com/office/drawing/2014/main" id="{A74D661B-510C-4CF2-BF77-3EAFB649883D}"/>
-              </a:ext>
-            </a:extLst>
-          </p:cNvPr>
-          <p:cNvSpPr>
-            <a:spLocks noGrp="1"/>
-          </p:cNvSpPr>
-          <p:nvPr>
-            <p:ph type="dt" sz="half" idx="20"/>
-          </p:nvPr>
-        </p:nvSpPr>
-        <p:spPr>
-          <a:xfrm>
-            <a:off x="5919680" y="6356350"/>
-            <a:ext cx="947516" cy="365125"/>
+              <a:t>CUSTOMER SEGMENTATION</a:t>
+            </a:r>
+          </a:p>
+        </p:txBody>
+      </p:sp>
+      <p:sp>
+        <p:nvSpPr>
+          <p:cNvPr id="5" name="Text Placeholder 4">
+            <a:extLst>
+              <a:ext uri="{FF2B5EF4-FFF2-40B4-BE49-F238E27FC236}">
+                <a16:creationId xmlns:a16="http://schemas.microsoft.com/office/drawing/2014/main" id="{6184E21C-7534-4FB5-9709-F7D1A11034F3}"/>
+              </a:ext>
+            </a:extLst>
+          </p:cNvPr>
+          <p:cNvSpPr>
+            <a:spLocks noGrp="1"/>
+          </p:cNvSpPr>
+          <p:nvPr>
+            <p:ph type="body" sz="quarter" idx="15"/>
+          </p:nvPr>
+        </p:nvSpPr>
+        <p:spPr>
+          <a:xfrm>
+            <a:off x="2020307" y="4849156"/>
+            <a:ext cx="2141764" cy="514350"/>
           </a:xfrm>
         </p:spPr>
         <p:txBody>
@@ -36421,31 +39756,31 @@
           <a:p>
             <a:r>
               <a:rPr lang="en-US" dirty="0"/>
-              <a:t>20XX</a:t>
-            </a:r>
-          </a:p>
-        </p:txBody>
-      </p:sp>
-      <p:sp>
-        <p:nvSpPr>
-          <p:cNvPr id="21" name="Footer Placeholder 20">
-            <a:extLst>
-              <a:ext uri="{FF2B5EF4-FFF2-40B4-BE49-F238E27FC236}">
-                <a16:creationId xmlns:a16="http://schemas.microsoft.com/office/drawing/2014/main" id="{7E44CAC0-3B5A-49F6-A2CB-0BC80D111A87}"/>
-              </a:ext>
-            </a:extLst>
-          </p:cNvPr>
-          <p:cNvSpPr>
-            <a:spLocks noGrp="1"/>
-          </p:cNvSpPr>
-          <p:nvPr>
-            <p:ph type="ftr" sz="quarter" idx="21"/>
-          </p:nvPr>
-        </p:nvSpPr>
-        <p:spPr>
-          <a:xfrm>
-            <a:off x="7161955" y="6356350"/>
-            <a:ext cx="3243942" cy="365125"/>
+              <a:t>SELLER SCORE CARD</a:t>
+            </a:r>
+          </a:p>
+        </p:txBody>
+      </p:sp>
+      <p:sp>
+        <p:nvSpPr>
+          <p:cNvPr id="7" name="Text Placeholder 6">
+            <a:extLst>
+              <a:ext uri="{FF2B5EF4-FFF2-40B4-BE49-F238E27FC236}">
+                <a16:creationId xmlns:a16="http://schemas.microsoft.com/office/drawing/2014/main" id="{D7EB25CA-DA83-483D-AF83-0001BDF2DE2B}"/>
+              </a:ext>
+            </a:extLst>
+          </p:cNvPr>
+          <p:cNvSpPr>
+            <a:spLocks noGrp="1"/>
+          </p:cNvSpPr>
+          <p:nvPr>
+            <p:ph type="body" sz="quarter" idx="17"/>
+          </p:nvPr>
+        </p:nvSpPr>
+        <p:spPr>
+          <a:xfrm>
+            <a:off x="5091417" y="2713592"/>
+            <a:ext cx="5539095" cy="1010842"/>
           </a:xfrm>
         </p:spPr>
         <p:txBody>
@@ -36453,32 +39788,189 @@
           <a:lstStyle/>
           <a:p>
             <a:r>
-              <a:rPr lang="en-US" b="1" dirty="0"/>
-              <a:t>DELIVERY PERFORMANCE</a:t>
-            </a:r>
-          </a:p>
-        </p:txBody>
-      </p:sp>
-      <p:sp>
-        <p:nvSpPr>
-          <p:cNvPr id="22" name="Slide Number Placeholder 21">
-            <a:extLst>
-              <a:ext uri="{FF2B5EF4-FFF2-40B4-BE49-F238E27FC236}">
-                <a16:creationId xmlns:a16="http://schemas.microsoft.com/office/drawing/2014/main" id="{5D1BD041-3428-4D62-934F-F3FF6D36F90F}"/>
-              </a:ext>
-            </a:extLst>
-          </p:cNvPr>
-          <p:cNvSpPr>
-            <a:spLocks noGrp="1"/>
-          </p:cNvSpPr>
-          <p:nvPr>
-            <p:ph type="sldNum" sz="quarter" idx="22"/>
-          </p:nvPr>
-        </p:nvSpPr>
-        <p:spPr>
-          <a:xfrm>
-            <a:off x="10700656" y="6356350"/>
-            <a:ext cx="653143" cy="365125"/>
+              <a:rPr lang="en-US" dirty="0"/>
+              <a:t>Improvements in Actual Delivery Time will result in improved Customer Review Scores that drive more repeat orders.</a:t>
+            </a:r>
+          </a:p>
+          <a:p>
+            <a:endParaRPr lang="en-US" dirty="0"/>
+          </a:p>
+        </p:txBody>
+      </p:sp>
+      <p:sp>
+        <p:nvSpPr>
+          <p:cNvPr id="8" name="Text Placeholder 7">
+            <a:extLst>
+              <a:ext uri="{FF2B5EF4-FFF2-40B4-BE49-F238E27FC236}">
+                <a16:creationId xmlns:a16="http://schemas.microsoft.com/office/drawing/2014/main" id="{B46CE8C6-E12D-4A0D-8553-7FFA31941D56}"/>
+              </a:ext>
+            </a:extLst>
+          </p:cNvPr>
+          <p:cNvSpPr>
+            <a:spLocks noGrp="1"/>
+          </p:cNvSpPr>
+          <p:nvPr>
+            <p:ph type="body" sz="quarter" idx="18"/>
+          </p:nvPr>
+        </p:nvSpPr>
+        <p:spPr>
+          <a:xfrm>
+            <a:off x="5675910" y="3801678"/>
+            <a:ext cx="5539095" cy="1010842"/>
+          </a:xfrm>
+        </p:spPr>
+        <p:txBody>
+          <a:bodyPr/>
+          <a:lstStyle/>
+          <a:p>
+            <a:r>
+              <a:rPr lang="en-US" dirty="0"/>
+              <a:t>Customers should be segmented by band (Gold / Silver / Bronze) for </a:t>
+            </a:r>
+            <a:r>
+              <a:rPr lang="en-US" dirty="0" err="1"/>
+              <a:t>Olist</a:t>
+            </a:r>
+            <a:r>
+              <a:rPr lang="en-US" dirty="0"/>
+              <a:t> to focus on customers in cities with higher total spend.</a:t>
+            </a:r>
+          </a:p>
+          <a:p>
+            <a:endParaRPr lang="en-US" dirty="0"/>
+          </a:p>
+        </p:txBody>
+      </p:sp>
+      <p:sp>
+        <p:nvSpPr>
+          <p:cNvPr id="9" name="Text Placeholder 8">
+            <a:extLst>
+              <a:ext uri="{FF2B5EF4-FFF2-40B4-BE49-F238E27FC236}">
+                <a16:creationId xmlns:a16="http://schemas.microsoft.com/office/drawing/2014/main" id="{1C7D5285-85DF-4331-A6FA-1AE847CA47AE}"/>
+              </a:ext>
+            </a:extLst>
+          </p:cNvPr>
+          <p:cNvSpPr>
+            <a:spLocks noGrp="1"/>
+          </p:cNvSpPr>
+          <p:nvPr>
+            <p:ph type="body" sz="quarter" idx="19"/>
+          </p:nvPr>
+        </p:nvSpPr>
+        <p:spPr>
+          <a:xfrm>
+            <a:off x="6266819" y="4874508"/>
+            <a:ext cx="5539095" cy="1010842"/>
+          </a:xfrm>
+        </p:spPr>
+        <p:txBody>
+          <a:bodyPr/>
+          <a:lstStyle/>
+          <a:p>
+            <a:r>
+              <a:rPr lang="en-US" dirty="0"/>
+              <a:t>Sellers may be prioritized by Total Order Value and Average Review Score to increase the quality of Sellers on the </a:t>
+            </a:r>
+            <a:r>
+              <a:rPr lang="en-US" dirty="0" err="1"/>
+              <a:t>Olist</a:t>
+            </a:r>
+            <a:r>
+              <a:rPr lang="en-US" dirty="0"/>
+              <a:t> platform.</a:t>
+            </a:r>
+          </a:p>
+          <a:p>
+            <a:endParaRPr lang="en-US" dirty="0"/>
+          </a:p>
+        </p:txBody>
+      </p:sp>
+      <p:sp>
+        <p:nvSpPr>
+          <p:cNvPr id="11" name="Date Placeholder 10">
+            <a:extLst>
+              <a:ext uri="{FF2B5EF4-FFF2-40B4-BE49-F238E27FC236}">
+                <a16:creationId xmlns:a16="http://schemas.microsoft.com/office/drawing/2014/main" id="{40BF6865-7FAE-4B56-A995-ADF1582DCC64}"/>
+              </a:ext>
+            </a:extLst>
+          </p:cNvPr>
+          <p:cNvSpPr>
+            <a:spLocks noGrp="1"/>
+          </p:cNvSpPr>
+          <p:nvPr>
+            <p:ph type="dt" sz="half" idx="10"/>
+          </p:nvPr>
+        </p:nvSpPr>
+        <p:spPr>
+          <a:xfrm>
+            <a:off x="838200" y="6356350"/>
+            <a:ext cx="2743200" cy="365125"/>
+          </a:xfrm>
+        </p:spPr>
+        <p:txBody>
+          <a:bodyPr/>
+          <a:lstStyle/>
+          <a:p>
+            <a:r>
+              <a:rPr lang="en-US" dirty="0"/>
+              <a:t>1nsight</a:t>
+            </a:r>
+          </a:p>
+        </p:txBody>
+      </p:sp>
+      <p:sp>
+        <p:nvSpPr>
+          <p:cNvPr id="12" name="Footer Placeholder 11">
+            <a:extLst>
+              <a:ext uri="{FF2B5EF4-FFF2-40B4-BE49-F238E27FC236}">
+                <a16:creationId xmlns:a16="http://schemas.microsoft.com/office/drawing/2014/main" id="{7312B71A-5E84-41DE-9754-5F6291F6DFB7}"/>
+              </a:ext>
+            </a:extLst>
+          </p:cNvPr>
+          <p:cNvSpPr>
+            <a:spLocks noGrp="1"/>
+          </p:cNvSpPr>
+          <p:nvPr>
+            <p:ph type="ftr" sz="quarter" idx="11"/>
+          </p:nvPr>
+        </p:nvSpPr>
+        <p:spPr>
+          <a:xfrm>
+            <a:off x="6155823" y="6356350"/>
+            <a:ext cx="1808712" cy="365125"/>
+          </a:xfrm>
+        </p:spPr>
+        <p:txBody>
+          <a:bodyPr/>
+          <a:lstStyle/>
+          <a:p>
+            <a:r>
+              <a:rPr lang="en-US" dirty="0"/>
+              <a:t>KEY RECOMMENDATIONS</a:t>
+            </a:r>
+          </a:p>
+        </p:txBody>
+      </p:sp>
+      <p:sp>
+        <p:nvSpPr>
+          <p:cNvPr id="13" name="Slide Number Placeholder 12">
+            <a:extLst>
+              <a:ext uri="{FF2B5EF4-FFF2-40B4-BE49-F238E27FC236}">
+                <a16:creationId xmlns:a16="http://schemas.microsoft.com/office/drawing/2014/main" id="{E3984D70-BD95-4E1F-9725-902B5D74DED6}"/>
+              </a:ext>
+            </a:extLst>
+          </p:cNvPr>
+          <p:cNvSpPr>
+            <a:spLocks noGrp="1"/>
+          </p:cNvSpPr>
+          <p:nvPr>
+            <p:ph type="sldNum" sz="quarter" idx="12"/>
+          </p:nvPr>
+        </p:nvSpPr>
+        <p:spPr>
+          <a:xfrm>
+            <a:off x="10810874" y="6356350"/>
+            <a:ext cx="542925" cy="365125"/>
           </a:xfrm>
         </p:spPr>
         <p:txBody>
@@ -36496,49 +39988,395 @@
       </p:sp>
       <p:sp>
         <p:nvSpPr>
-          <p:cNvPr id="29" name="Text Placeholder 28">
-            <a:extLst>
-              <a:ext uri="{FF2B5EF4-FFF2-40B4-BE49-F238E27FC236}">
-                <a16:creationId xmlns:a16="http://schemas.microsoft.com/office/drawing/2014/main" id="{751FB17E-9A26-76C5-FB3D-2ED2297C28C4}"/>
-              </a:ext>
-            </a:extLst>
-          </p:cNvPr>
-          <p:cNvSpPr>
-            <a:spLocks noGrp="1"/>
-          </p:cNvSpPr>
-          <p:nvPr>
-            <p:ph type="body" sz="quarter" idx="28"/>
-          </p:nvPr>
-        </p:nvSpPr>
-        <p:spPr>
-          <a:xfrm>
-            <a:off x="838201" y="5602406"/>
-            <a:ext cx="10550420" cy="753944"/>
-          </a:xfrm>
-        </p:spPr>
-        <p:txBody>
-          <a:bodyPr/>
+          <p:cNvPr id="15" name="Title 1">
+            <a:extLst>
+              <a:ext uri="{FF2B5EF4-FFF2-40B4-BE49-F238E27FC236}">
+                <a16:creationId xmlns:a16="http://schemas.microsoft.com/office/drawing/2014/main" id="{0D4907C1-57A5-F349-7974-0397E2E752C2}"/>
+              </a:ext>
+            </a:extLst>
+          </p:cNvPr>
+          <p:cNvSpPr txBox="1">
+            <a:spLocks/>
+          </p:cNvSpPr>
+          <p:nvPr/>
+        </p:nvSpPr>
+        <p:spPr>
+          <a:xfrm>
+            <a:off x="401473" y="201086"/>
+            <a:ext cx="10952326" cy="929779"/>
+          </a:xfrm>
+          <a:prstGeom prst="rect">
+            <a:avLst/>
+          </a:prstGeom>
+        </p:spPr>
+        <p:txBody>
+          <a:bodyPr vert="horz" lIns="91440" tIns="45720" rIns="91440" bIns="45720" rtlCol="0" anchor="b">
+            <a:normAutofit/>
+          </a:bodyPr>
+          <a:lstStyle>
+            <a:lvl1pPr algn="l" defTabSz="914400" rtl="0" eaLnBrk="1" latinLnBrk="0" hangingPunct="1">
+              <a:lnSpc>
+                <a:spcPct val="90000"/>
+              </a:lnSpc>
+              <a:spcBef>
+                <a:spcPct val="0"/>
+              </a:spcBef>
+              <a:buNone/>
+              <a:defRPr sz="2800" kern="1200" cap="all" spc="150" baseline="0">
+                <a:solidFill>
+                  <a:schemeClr val="tx1">
+                    <a:lumMod val="75000"/>
+                    <a:lumOff val="25000"/>
+                  </a:schemeClr>
+                </a:solidFill>
+                <a:latin typeface="+mj-lt"/>
+                <a:ea typeface="+mj-ea"/>
+                <a:cs typeface="+mj-cs"/>
+              </a:defRPr>
+            </a:lvl1pPr>
+          </a:lstStyle>
+          <a:p>
+            <a:r>
+              <a:rPr lang="en-US" dirty="0"/>
+              <a:t>1nsight’s KEY RECOMMENDATIONS CENTRE ON Customers, Sellers, and the </a:t>
+            </a:r>
+            <a:r>
+              <a:rPr lang="en-US" dirty="0" err="1"/>
+              <a:t>Olist</a:t>
+            </a:r>
+            <a:r>
+              <a:rPr lang="en-US" dirty="0"/>
+              <a:t> EXPERIENCE…</a:t>
+            </a:r>
+          </a:p>
+        </p:txBody>
+      </p:sp>
+      <p:sp>
+        <p:nvSpPr>
+          <p:cNvPr id="16" name="Rectangle 15">
+            <a:extLst>
+              <a:ext uri="{FF2B5EF4-FFF2-40B4-BE49-F238E27FC236}">
+                <a16:creationId xmlns:a16="http://schemas.microsoft.com/office/drawing/2014/main" id="{CFB373D5-11AA-CDF3-97D8-B9FB894EEF58}"/>
+              </a:ext>
+            </a:extLst>
+          </p:cNvPr>
+          <p:cNvSpPr/>
+          <p:nvPr/>
+        </p:nvSpPr>
+        <p:spPr>
+          <a:xfrm>
+            <a:off x="1411076" y="2211030"/>
+            <a:ext cx="4340647" cy="345969"/>
+          </a:xfrm>
+          <a:prstGeom prst="rect">
+            <a:avLst/>
+          </a:prstGeom>
+          <a:solidFill>
+            <a:schemeClr val="accent1">
+              <a:lumMod val="75000"/>
+            </a:schemeClr>
+          </a:solidFill>
+          <a:effectLst>
+            <a:outerShdw blurRad="50800" dist="38100" dir="10800000" algn="r" rotWithShape="0">
+              <a:prstClr val="black">
+                <a:alpha val="40000"/>
+              </a:prstClr>
+            </a:outerShdw>
+          </a:effectLst>
+        </p:spPr>
+        <p:style>
+          <a:lnRef idx="2">
+            <a:schemeClr val="accent5">
+              <a:shade val="15000"/>
+            </a:schemeClr>
+          </a:lnRef>
+          <a:fillRef idx="1">
+            <a:schemeClr val="accent5"/>
+          </a:fillRef>
+          <a:effectRef idx="0">
+            <a:schemeClr val="accent5"/>
+          </a:effectRef>
+          <a:fontRef idx="minor">
+            <a:schemeClr val="lt1"/>
+          </a:fontRef>
+        </p:style>
+        <p:txBody>
+          <a:bodyPr rtlCol="0" anchor="ctr"/>
           <a:lstStyle/>
           <a:p>
-            <a:r>
-              <a:rPr lang="en-SG" dirty="0"/>
-              <a:t>Customer Review Scores are negatively-correlated with the Actual Delivery Time, which varies from city to city. Rio De Janeiro is the most sensitive to reductions in Delivery Time, followed by </a:t>
-            </a:r>
-            <a:r>
-              <a:rPr lang="en-SG" dirty="0" err="1"/>
-              <a:t>Brasillia</a:t>
-            </a:r>
-            <a:r>
-              <a:rPr lang="en-SG" dirty="0"/>
-              <a:t>, Belo Horizonte, </a:t>
-            </a:r>
-            <a:r>
-              <a:rPr lang="en-SG" dirty="0" err="1"/>
-              <a:t>Curibata</a:t>
-            </a:r>
-            <a:r>
-              <a:rPr lang="en-SG" dirty="0"/>
-              <a:t>, and Sao Paulo.</a:t>
+            <a:pPr algn="ctr"/>
+            <a:r>
+              <a:rPr lang="en-US" b="1" dirty="0"/>
+              <a:t>IMPROVING CUSTOMER SATISFACTION</a:t>
+            </a:r>
+          </a:p>
+        </p:txBody>
+      </p:sp>
+      <p:sp>
+        <p:nvSpPr>
+          <p:cNvPr id="18" name="Rectangle 17">
+            <a:extLst>
+              <a:ext uri="{FF2B5EF4-FFF2-40B4-BE49-F238E27FC236}">
+                <a16:creationId xmlns:a16="http://schemas.microsoft.com/office/drawing/2014/main" id="{78BC0966-6DC9-5204-3B8D-8378358317BF}"/>
+              </a:ext>
+            </a:extLst>
+          </p:cNvPr>
+          <p:cNvSpPr/>
+          <p:nvPr/>
+        </p:nvSpPr>
+        <p:spPr>
+          <a:xfrm>
+            <a:off x="1918707" y="3359986"/>
+            <a:ext cx="4340647" cy="345969"/>
+          </a:xfrm>
+          <a:prstGeom prst="rect">
+            <a:avLst/>
+          </a:prstGeom>
+          <a:solidFill>
+            <a:schemeClr val="accent1">
+              <a:lumMod val="50000"/>
+            </a:schemeClr>
+          </a:solidFill>
+          <a:effectLst>
+            <a:outerShdw blurRad="50800" dist="38100" dir="10800000" algn="r" rotWithShape="0">
+              <a:prstClr val="black">
+                <a:alpha val="40000"/>
+              </a:prstClr>
+            </a:outerShdw>
+          </a:effectLst>
+        </p:spPr>
+        <p:style>
+          <a:lnRef idx="2">
+            <a:schemeClr val="accent5">
+              <a:shade val="15000"/>
+            </a:schemeClr>
+          </a:lnRef>
+          <a:fillRef idx="1">
+            <a:schemeClr val="accent5"/>
+          </a:fillRef>
+          <a:effectRef idx="0">
+            <a:schemeClr val="accent5"/>
+          </a:effectRef>
+          <a:fontRef idx="minor">
+            <a:schemeClr val="lt1"/>
+          </a:fontRef>
+        </p:style>
+        <p:txBody>
+          <a:bodyPr rtlCol="0" anchor="ctr"/>
+          <a:lstStyle/>
+          <a:p>
+            <a:pPr algn="ctr"/>
+            <a:r>
+              <a:rPr lang="en-US" b="1" dirty="0"/>
+              <a:t>INCREASING SELLER REVENUE</a:t>
+            </a:r>
+          </a:p>
+        </p:txBody>
+      </p:sp>
+      <p:sp>
+        <p:nvSpPr>
+          <p:cNvPr id="19" name="Rectangle 18">
+            <a:extLst>
+              <a:ext uri="{FF2B5EF4-FFF2-40B4-BE49-F238E27FC236}">
+                <a16:creationId xmlns:a16="http://schemas.microsoft.com/office/drawing/2014/main" id="{B5E593F2-7D31-D7CB-801E-B144F1FF8136}"/>
+              </a:ext>
+            </a:extLst>
+          </p:cNvPr>
+          <p:cNvSpPr/>
+          <p:nvPr/>
+        </p:nvSpPr>
+        <p:spPr>
+          <a:xfrm>
+            <a:off x="2645916" y="4470355"/>
+            <a:ext cx="4340647" cy="345969"/>
+          </a:xfrm>
+          <a:prstGeom prst="rect">
+            <a:avLst/>
+          </a:prstGeom>
+          <a:solidFill>
+            <a:schemeClr val="accent1">
+              <a:lumMod val="25000"/>
+            </a:schemeClr>
+          </a:solidFill>
+          <a:effectLst>
+            <a:outerShdw blurRad="50800" dist="38100" dir="10800000" algn="r" rotWithShape="0">
+              <a:prstClr val="black">
+                <a:alpha val="40000"/>
+              </a:prstClr>
+            </a:outerShdw>
+          </a:effectLst>
+        </p:spPr>
+        <p:style>
+          <a:lnRef idx="2">
+            <a:schemeClr val="accent5">
+              <a:shade val="15000"/>
+            </a:schemeClr>
+          </a:lnRef>
+          <a:fillRef idx="1">
+            <a:schemeClr val="accent5"/>
+          </a:fillRef>
+          <a:effectRef idx="0">
+            <a:schemeClr val="accent5"/>
+          </a:effectRef>
+          <a:fontRef idx="minor">
+            <a:schemeClr val="lt1"/>
+          </a:fontRef>
+        </p:style>
+        <p:txBody>
+          <a:bodyPr rtlCol="0" anchor="ctr"/>
+          <a:lstStyle/>
+          <a:p>
+            <a:pPr algn="ctr"/>
+            <a:r>
+              <a:rPr lang="en-US" b="1" dirty="0"/>
+              <a:t>ENHANCING PLATFORM QUALITY</a:t>
+            </a:r>
+          </a:p>
+        </p:txBody>
+      </p:sp>
+      <p:sp>
+        <p:nvSpPr>
+          <p:cNvPr id="20" name="Rectangle 19">
+            <a:extLst>
+              <a:ext uri="{FF2B5EF4-FFF2-40B4-BE49-F238E27FC236}">
+                <a16:creationId xmlns:a16="http://schemas.microsoft.com/office/drawing/2014/main" id="{AFEB78D8-F9B3-CFE8-73C3-44899BC78B3D}"/>
+              </a:ext>
+            </a:extLst>
+          </p:cNvPr>
+          <p:cNvSpPr/>
+          <p:nvPr/>
+        </p:nvSpPr>
+        <p:spPr>
+          <a:xfrm>
+            <a:off x="142840" y="2029782"/>
+            <a:ext cx="1060318" cy="527217"/>
+          </a:xfrm>
+          <a:prstGeom prst="rect">
+            <a:avLst/>
+          </a:prstGeom>
+        </p:spPr>
+        <p:style>
+          <a:lnRef idx="2">
+            <a:schemeClr val="dk1">
+              <a:shade val="15000"/>
+            </a:schemeClr>
+          </a:lnRef>
+          <a:fillRef idx="1">
+            <a:schemeClr val="dk1"/>
+          </a:fillRef>
+          <a:effectRef idx="0">
+            <a:schemeClr val="dk1"/>
+          </a:effectRef>
+          <a:fontRef idx="minor">
+            <a:schemeClr val="lt1"/>
+          </a:fontRef>
+        </p:style>
+        <p:txBody>
+          <a:bodyPr rtlCol="0" anchor="ctr"/>
+          <a:lstStyle/>
+          <a:p>
+            <a:pPr algn="ctr"/>
+            <a:r>
+              <a:rPr lang="en-US" sz="1400" dirty="0"/>
+              <a:t>1. Customer Graphic</a:t>
+            </a:r>
+          </a:p>
+        </p:txBody>
+      </p:sp>
+      <p:sp>
+        <p:nvSpPr>
+          <p:cNvPr id="21" name="Rectangle 20">
+            <a:extLst>
+              <a:ext uri="{FF2B5EF4-FFF2-40B4-BE49-F238E27FC236}">
+                <a16:creationId xmlns:a16="http://schemas.microsoft.com/office/drawing/2014/main" id="{BDDA42CB-87D1-34D1-F726-9CE8FE1DC589}"/>
+              </a:ext>
+            </a:extLst>
+          </p:cNvPr>
+          <p:cNvSpPr/>
+          <p:nvPr/>
+        </p:nvSpPr>
+        <p:spPr>
+          <a:xfrm>
+            <a:off x="501170" y="3303827"/>
+            <a:ext cx="1060318" cy="527217"/>
+          </a:xfrm>
+          <a:prstGeom prst="rect">
+            <a:avLst/>
+          </a:prstGeom>
+        </p:spPr>
+        <p:style>
+          <a:lnRef idx="2">
+            <a:schemeClr val="dk1">
+              <a:shade val="15000"/>
+            </a:schemeClr>
+          </a:lnRef>
+          <a:fillRef idx="1">
+            <a:schemeClr val="dk1"/>
+          </a:fillRef>
+          <a:effectRef idx="0">
+            <a:schemeClr val="dk1"/>
+          </a:effectRef>
+          <a:fontRef idx="minor">
+            <a:schemeClr val="lt1"/>
+          </a:fontRef>
+        </p:style>
+        <p:txBody>
+          <a:bodyPr rtlCol="0" anchor="ctr"/>
+          <a:lstStyle/>
+          <a:p>
+            <a:pPr algn="ctr"/>
+            <a:r>
+              <a:rPr lang="en-US" sz="1400" dirty="0"/>
+              <a:t>2. Seller Graphic</a:t>
+            </a:r>
+          </a:p>
+        </p:txBody>
+      </p:sp>
+      <p:sp>
+        <p:nvSpPr>
+          <p:cNvPr id="22" name="Rectangle 21">
+            <a:extLst>
+              <a:ext uri="{FF2B5EF4-FFF2-40B4-BE49-F238E27FC236}">
+                <a16:creationId xmlns:a16="http://schemas.microsoft.com/office/drawing/2014/main" id="{CF95B5DB-509F-9C56-57FE-C869C2FCEAD7}"/>
+              </a:ext>
+            </a:extLst>
+          </p:cNvPr>
+          <p:cNvSpPr/>
+          <p:nvPr/>
+        </p:nvSpPr>
+        <p:spPr>
+          <a:xfrm>
+            <a:off x="1055625" y="4400974"/>
+            <a:ext cx="1060318" cy="527217"/>
+          </a:xfrm>
+          <a:prstGeom prst="rect">
+            <a:avLst/>
+          </a:prstGeom>
+        </p:spPr>
+        <p:style>
+          <a:lnRef idx="2">
+            <a:schemeClr val="dk1">
+              <a:shade val="15000"/>
+            </a:schemeClr>
+          </a:lnRef>
+          <a:fillRef idx="1">
+            <a:schemeClr val="dk1"/>
+          </a:fillRef>
+          <a:effectRef idx="0">
+            <a:schemeClr val="dk1"/>
+          </a:effectRef>
+          <a:fontRef idx="minor">
+            <a:schemeClr val="lt1"/>
+          </a:fontRef>
+        </p:style>
+        <p:txBody>
+          <a:bodyPr rtlCol="0" anchor="ctr"/>
+          <a:lstStyle/>
+          <a:p>
+            <a:pPr algn="ctr"/>
+            <a:r>
+              <a:rPr lang="en-US" sz="1400" dirty="0"/>
+              <a:t>3. Platform Graphic</a:t>
             </a:r>
           </a:p>
         </p:txBody>
@@ -36546,7 +40384,7 @@
     </p:spTree>
     <p:extLst>
       <p:ext uri="{BB962C8B-B14F-4D97-AF65-F5344CB8AC3E}">
-        <p14:creationId xmlns:p14="http://schemas.microsoft.com/office/powerpoint/2010/main" val="1844941827"/>
+        <p14:creationId xmlns:p14="http://schemas.microsoft.com/office/powerpoint/2010/main" val="1738561688"/>
       </p:ext>
     </p:extLst>
   </p:cSld>
@@ -36564,7 +40402,7 @@
         <p:cNvPr id="1" name="">
           <a:extLst>
             <a:ext uri="{FF2B5EF4-FFF2-40B4-BE49-F238E27FC236}">
-              <a16:creationId xmlns:a16="http://schemas.microsoft.com/office/drawing/2014/main" id="{1E97480F-E86E-80FD-6BF2-C57429CFCBDC}"/>
+              <a16:creationId xmlns:a16="http://schemas.microsoft.com/office/drawing/2014/main" id="{DA56D724-4509-D2E2-2701-AC3AAA379510}"/>
             </a:ext>
           </a:extLst>
         </p:cNvPr>
@@ -36579,56 +40417,26 @@
           <a:chExt cx="0" cy="0"/>
         </a:xfrm>
       </p:grpSpPr>
-      <p:pic>
-        <p:nvPicPr>
-          <p:cNvPr id="4" name="Picture 3">
-            <a:extLst>
-              <a:ext uri="{FF2B5EF4-FFF2-40B4-BE49-F238E27FC236}">
-                <a16:creationId xmlns:a16="http://schemas.microsoft.com/office/drawing/2014/main" id="{695EB976-4B76-EE79-92CC-4334A0956045}"/>
-              </a:ext>
-            </a:extLst>
-          </p:cNvPr>
-          <p:cNvPicPr>
-            <a:picLocks noChangeAspect="1"/>
-          </p:cNvPicPr>
-          <p:nvPr/>
-        </p:nvPicPr>
-        <p:blipFill>
-          <a:blip r:embed="rId3"/>
-          <a:stretch>
-            <a:fillRect/>
-          </a:stretch>
-        </p:blipFill>
-        <p:spPr>
-          <a:xfrm>
-            <a:off x="1303989" y="1028759"/>
-            <a:ext cx="9147293" cy="4573647"/>
-          </a:xfrm>
-          <a:prstGeom prst="rect">
-            <a:avLst/>
-          </a:prstGeom>
-        </p:spPr>
-      </p:pic>
       <p:sp>
         <p:nvSpPr>
           <p:cNvPr id="2" name="Title 1">
             <a:extLst>
               <a:ext uri="{FF2B5EF4-FFF2-40B4-BE49-F238E27FC236}">
-                <a16:creationId xmlns:a16="http://schemas.microsoft.com/office/drawing/2014/main" id="{3C09E37F-F394-15D9-D9F9-F97FFD05A591}"/>
-              </a:ext>
-            </a:extLst>
-          </p:cNvPr>
-          <p:cNvSpPr>
-            <a:spLocks noGrp="1"/>
-          </p:cNvSpPr>
-          <p:nvPr>
-            <p:ph type="title"/>
-          </p:nvPr>
-        </p:nvSpPr>
-        <p:spPr>
-          <a:xfrm>
-            <a:off x="401473" y="201086"/>
-            <a:ext cx="10952326" cy="929779"/>
+                <a16:creationId xmlns:a16="http://schemas.microsoft.com/office/drawing/2014/main" id="{5C65CE63-C3B8-1C58-C693-22307F947C0F}"/>
+              </a:ext>
+            </a:extLst>
+          </p:cNvPr>
+          <p:cNvSpPr>
+            <a:spLocks noGrp="1"/>
+          </p:cNvSpPr>
+          <p:nvPr>
+            <p:ph type="ctrTitle"/>
+          </p:nvPr>
+        </p:nvSpPr>
+        <p:spPr>
+          <a:xfrm>
+            <a:off x="6991350" y="2571235"/>
+            <a:ext cx="4684094" cy="1715531"/>
           </a:xfrm>
         </p:spPr>
         <p:txBody>
@@ -36637,141 +40445,7 @@
           <a:p>
             <a:r>
               <a:rPr lang="en-US" dirty="0"/>
-              <a:t>Delivery Time Improvements will be targeted at The top 3 products in sales Revenue for the Top 3 cities…</a:t>
-            </a:r>
-          </a:p>
-        </p:txBody>
-      </p:sp>
-      <p:sp>
-        <p:nvSpPr>
-          <p:cNvPr id="20" name="Date Placeholder 19">
-            <a:extLst>
-              <a:ext uri="{FF2B5EF4-FFF2-40B4-BE49-F238E27FC236}">
-                <a16:creationId xmlns:a16="http://schemas.microsoft.com/office/drawing/2014/main" id="{903BE9C1-75BD-DCC1-5F1F-A7B1D21AC9BC}"/>
-              </a:ext>
-            </a:extLst>
-          </p:cNvPr>
-          <p:cNvSpPr>
-            <a:spLocks noGrp="1"/>
-          </p:cNvSpPr>
-          <p:nvPr>
-            <p:ph type="dt" sz="half" idx="20"/>
-          </p:nvPr>
-        </p:nvSpPr>
-        <p:spPr>
-          <a:xfrm>
-            <a:off x="5919680" y="6356350"/>
-            <a:ext cx="947516" cy="365125"/>
-          </a:xfrm>
-        </p:spPr>
-        <p:txBody>
-          <a:bodyPr/>
-          <a:lstStyle/>
-          <a:p>
-            <a:r>
-              <a:rPr lang="en-US" dirty="0"/>
-              <a:t>20XX</a:t>
-            </a:r>
-          </a:p>
-        </p:txBody>
-      </p:sp>
-      <p:sp>
-        <p:nvSpPr>
-          <p:cNvPr id="21" name="Footer Placeholder 20">
-            <a:extLst>
-              <a:ext uri="{FF2B5EF4-FFF2-40B4-BE49-F238E27FC236}">
-                <a16:creationId xmlns:a16="http://schemas.microsoft.com/office/drawing/2014/main" id="{3A269342-48E3-0527-DBA1-F22F5369124D}"/>
-              </a:ext>
-            </a:extLst>
-          </p:cNvPr>
-          <p:cNvSpPr>
-            <a:spLocks noGrp="1"/>
-          </p:cNvSpPr>
-          <p:nvPr>
-            <p:ph type="ftr" sz="quarter" idx="21"/>
-          </p:nvPr>
-        </p:nvSpPr>
-        <p:spPr>
-          <a:xfrm>
-            <a:off x="7161955" y="6356350"/>
-            <a:ext cx="3243942" cy="365125"/>
-          </a:xfrm>
-        </p:spPr>
-        <p:txBody>
-          <a:bodyPr/>
-          <a:lstStyle/>
-          <a:p>
-            <a:r>
-              <a:rPr lang="en-US" b="1" dirty="0"/>
-              <a:t>DELIVERY PERFORMANCE</a:t>
-            </a:r>
-          </a:p>
-        </p:txBody>
-      </p:sp>
-      <p:sp>
-        <p:nvSpPr>
-          <p:cNvPr id="22" name="Slide Number Placeholder 21">
-            <a:extLst>
-              <a:ext uri="{FF2B5EF4-FFF2-40B4-BE49-F238E27FC236}">
-                <a16:creationId xmlns:a16="http://schemas.microsoft.com/office/drawing/2014/main" id="{AF957BB8-6392-8507-797F-A21B1341F0BF}"/>
-              </a:ext>
-            </a:extLst>
-          </p:cNvPr>
-          <p:cNvSpPr>
-            <a:spLocks noGrp="1"/>
-          </p:cNvSpPr>
-          <p:nvPr>
-            <p:ph type="sldNum" sz="quarter" idx="22"/>
-          </p:nvPr>
-        </p:nvSpPr>
-        <p:spPr>
-          <a:xfrm>
-            <a:off x="10700656" y="6356350"/>
-            <a:ext cx="653143" cy="365125"/>
-          </a:xfrm>
-        </p:spPr>
-        <p:txBody>
-          <a:bodyPr/>
-          <a:lstStyle/>
-          <a:p>
-            <a:fld id="{B5CEABB6-07DC-46E8-9B57-56EC44A396E5}" type="slidenum">
-              <a:rPr lang="en-US" smtClean="0"/>
-              <a:pPr/>
-              <a:t>7</a:t>
-            </a:fld>
-            <a:endParaRPr lang="en-US" dirty="0"/>
-          </a:p>
-        </p:txBody>
-      </p:sp>
-      <p:sp>
-        <p:nvSpPr>
-          <p:cNvPr id="29" name="Text Placeholder 28">
-            <a:extLst>
-              <a:ext uri="{FF2B5EF4-FFF2-40B4-BE49-F238E27FC236}">
-                <a16:creationId xmlns:a16="http://schemas.microsoft.com/office/drawing/2014/main" id="{C74FF9E0-07F8-CBD4-B784-75250CA0A946}"/>
-              </a:ext>
-            </a:extLst>
-          </p:cNvPr>
-          <p:cNvSpPr>
-            <a:spLocks noGrp="1"/>
-          </p:cNvSpPr>
-          <p:nvPr>
-            <p:ph type="body" sz="quarter" idx="28"/>
-          </p:nvPr>
-        </p:nvSpPr>
-        <p:spPr>
-          <a:xfrm>
-            <a:off x="838201" y="5602406"/>
-            <a:ext cx="10550420" cy="753944"/>
-          </a:xfrm>
-        </p:spPr>
-        <p:txBody>
-          <a:bodyPr/>
-          <a:lstStyle/>
-          <a:p>
-            <a:r>
-              <a:rPr lang="en-SG" dirty="0"/>
-              <a:t>The product categories that had the highest sales in the top 3 cities were Health and Beauty, Bedroom and Bathroom Accessories, and Watches and Gifts (??)</a:t>
+              <a:t>TECHNICAL OVERVIEW</a:t>
             </a:r>
           </a:p>
         </p:txBody>
@@ -36779,7 +40453,7 @@
     </p:spTree>
     <p:extLst>
       <p:ext uri="{BB962C8B-B14F-4D97-AF65-F5344CB8AC3E}">
-        <p14:creationId xmlns:p14="http://schemas.microsoft.com/office/powerpoint/2010/main" val="3899709938"/>
+        <p14:creationId xmlns:p14="http://schemas.microsoft.com/office/powerpoint/2010/main" val="1634829421"/>
       </p:ext>
     </p:extLst>
   </p:cSld>
@@ -36797,7 +40471,7 @@
         <p:cNvPr id="1" name="">
           <a:extLst>
             <a:ext uri="{FF2B5EF4-FFF2-40B4-BE49-F238E27FC236}">
-              <a16:creationId xmlns:a16="http://schemas.microsoft.com/office/drawing/2014/main" id="{75EF1B6B-C88F-6E6B-F678-21F2E45EFA79}"/>
+              <a16:creationId xmlns:a16="http://schemas.microsoft.com/office/drawing/2014/main" id="{D77CE486-DB28-396C-AE2D-BA6CB931E470}"/>
             </a:ext>
           </a:extLst>
         </p:cNvPr>
@@ -36817,7 +40491,10 @@
           <p:cNvPr id="2" name="Title 1">
             <a:extLst>
               <a:ext uri="{FF2B5EF4-FFF2-40B4-BE49-F238E27FC236}">
-                <a16:creationId xmlns:a16="http://schemas.microsoft.com/office/drawing/2014/main" id="{A99285B8-BA11-2B0B-2E85-CB32783D605F}"/>
+                <a16:creationId xmlns:a16="http://schemas.microsoft.com/office/drawing/2014/main" id="{095F3347-3EB1-4456-9BE9-287B96B456E2}"/>
+              </a:ext>
+              <a:ext uri="{C183D7F6-B498-43B3-948B-1728B52AA6E4}">
+                <adec:decorative xmlns:adec="http://schemas.microsoft.com/office/drawing/2017/decorative" val="0"/>
               </a:ext>
             </a:extLst>
           </p:cNvPr>
@@ -36830,8 +40507,8 @@
         </p:nvSpPr>
         <p:spPr>
           <a:xfrm>
-            <a:off x="401473" y="201086"/>
-            <a:ext cx="10952326" cy="929779"/>
+            <a:off x="1333499" y="1020445"/>
+            <a:ext cx="3171825" cy="1325563"/>
           </a:xfrm>
         </p:spPr>
         <p:txBody>
@@ -36840,31 +40517,94 @@
           <a:p>
             <a:r>
               <a:rPr lang="en-US" dirty="0"/>
-              <a:t>SLIDES ON CUSTOMER SEGMENTATION HERE…</a:t>
-            </a:r>
-          </a:p>
-        </p:txBody>
-      </p:sp>
-      <p:sp>
-        <p:nvSpPr>
-          <p:cNvPr id="20" name="Date Placeholder 19">
-            <a:extLst>
-              <a:ext uri="{FF2B5EF4-FFF2-40B4-BE49-F238E27FC236}">
-                <a16:creationId xmlns:a16="http://schemas.microsoft.com/office/drawing/2014/main" id="{D5C6FB3E-895B-7308-6A03-35DFEAD7ED7F}"/>
-              </a:ext>
-            </a:extLst>
-          </p:cNvPr>
-          <p:cNvSpPr>
-            <a:spLocks noGrp="1"/>
-          </p:cNvSpPr>
-          <p:nvPr>
-            <p:ph type="dt" sz="half" idx="20"/>
-          </p:nvPr>
-        </p:nvSpPr>
-        <p:spPr>
-          <a:xfrm>
-            <a:off x="5919680" y="6356350"/>
-            <a:ext cx="947516" cy="365125"/>
+              <a:t>Technical Overview</a:t>
+            </a:r>
+          </a:p>
+        </p:txBody>
+      </p:sp>
+      <p:sp>
+        <p:nvSpPr>
+          <p:cNvPr id="3" name="Subtitle 2">
+            <a:extLst>
+              <a:ext uri="{FF2B5EF4-FFF2-40B4-BE49-F238E27FC236}">
+                <a16:creationId xmlns:a16="http://schemas.microsoft.com/office/drawing/2014/main" id="{E6ED3EF8-DCF4-2DC5-2E0B-E374E066EAE3}"/>
+              </a:ext>
+              <a:ext uri="{C183D7F6-B498-43B3-948B-1728B52AA6E4}">
+                <adec:decorative xmlns:adec="http://schemas.microsoft.com/office/drawing/2017/decorative" val="0"/>
+              </a:ext>
+            </a:extLst>
+          </p:cNvPr>
+          <p:cNvSpPr>
+            <a:spLocks noGrp="1"/>
+          </p:cNvSpPr>
+          <p:nvPr>
+            <p:ph idx="1"/>
+          </p:nvPr>
+        </p:nvSpPr>
+        <p:spPr>
+          <a:xfrm>
+            <a:off x="1333499" y="2924175"/>
+            <a:ext cx="3171825" cy="2519363"/>
+          </a:xfrm>
+        </p:spPr>
+        <p:txBody>
+          <a:bodyPr>
+            <a:normAutofit/>
+          </a:bodyPr>
+          <a:lstStyle/>
+          <a:p>
+            <a:r>
+              <a:rPr lang="en-US" dirty="0"/>
+              <a:t>The next 2-3 slides should include some info on:</a:t>
+            </a:r>
+            <a:br>
+              <a:rPr lang="en-US" dirty="0"/>
+            </a:br>
+            <a:r>
+              <a:rPr lang="en-US" dirty="0"/>
+              <a:t>1) Architecture</a:t>
+            </a:r>
+          </a:p>
+          <a:p>
+            <a:r>
+              <a:rPr lang="en-US" dirty="0"/>
+              <a:t>2) Database Warehouse Design (Star Schema and Dimension Tables)</a:t>
+            </a:r>
+          </a:p>
+          <a:p>
+            <a:r>
+              <a:rPr lang="en-US" dirty="0"/>
+              <a:t>3) ELT Pipeline</a:t>
+            </a:r>
+          </a:p>
+          <a:p>
+            <a:r>
+              <a:rPr lang="en-US" dirty="0"/>
+              <a:t>4) Data Quality Testing</a:t>
+            </a:r>
+          </a:p>
+        </p:txBody>
+      </p:sp>
+      <p:sp>
+        <p:nvSpPr>
+          <p:cNvPr id="6" name="Date Placeholder 5">
+            <a:extLst>
+              <a:ext uri="{FF2B5EF4-FFF2-40B4-BE49-F238E27FC236}">
+                <a16:creationId xmlns:a16="http://schemas.microsoft.com/office/drawing/2014/main" id="{A95C0EDA-1A6C-6146-314A-0F919A3EAA49}"/>
+              </a:ext>
+            </a:extLst>
+          </p:cNvPr>
+          <p:cNvSpPr>
+            <a:spLocks noGrp="1"/>
+          </p:cNvSpPr>
+          <p:nvPr>
+            <p:ph type="dt" sz="half" idx="10"/>
+          </p:nvPr>
+        </p:nvSpPr>
+        <p:spPr>
+          <a:xfrm>
+            <a:off x="1333500" y="6356350"/>
+            <a:ext cx="985157" cy="365125"/>
           </a:xfrm>
         </p:spPr>
         <p:txBody>
@@ -36873,31 +40613,31 @@
           <a:p>
             <a:r>
               <a:rPr lang="en-US" dirty="0"/>
-              <a:t>20XX</a:t>
-            </a:r>
-          </a:p>
-        </p:txBody>
-      </p:sp>
-      <p:sp>
-        <p:nvSpPr>
-          <p:cNvPr id="21" name="Footer Placeholder 20">
-            <a:extLst>
-              <a:ext uri="{FF2B5EF4-FFF2-40B4-BE49-F238E27FC236}">
-                <a16:creationId xmlns:a16="http://schemas.microsoft.com/office/drawing/2014/main" id="{D5EDAE41-5210-7C00-D05D-7A14C95E2E27}"/>
-              </a:ext>
-            </a:extLst>
-          </p:cNvPr>
-          <p:cNvSpPr>
-            <a:spLocks noGrp="1"/>
-          </p:cNvSpPr>
-          <p:nvPr>
-            <p:ph type="ftr" sz="quarter" idx="21"/>
-          </p:nvPr>
-        </p:nvSpPr>
-        <p:spPr>
-          <a:xfrm>
-            <a:off x="7161955" y="6356350"/>
-            <a:ext cx="3243942" cy="365125"/>
+              <a:t>1nsight</a:t>
+            </a:r>
+          </a:p>
+        </p:txBody>
+      </p:sp>
+      <p:sp>
+        <p:nvSpPr>
+          <p:cNvPr id="5" name="Footer Placeholder 4">
+            <a:extLst>
+              <a:ext uri="{FF2B5EF4-FFF2-40B4-BE49-F238E27FC236}">
+                <a16:creationId xmlns:a16="http://schemas.microsoft.com/office/drawing/2014/main" id="{B373CE98-8CD9-EE16-FF40-55B5F312E26E}"/>
+              </a:ext>
+            </a:extLst>
+          </p:cNvPr>
+          <p:cNvSpPr>
+            <a:spLocks noGrp="1"/>
+          </p:cNvSpPr>
+          <p:nvPr>
+            <p:ph type="ftr" sz="quarter" idx="11"/>
+          </p:nvPr>
+        </p:nvSpPr>
+        <p:spPr>
+          <a:xfrm>
+            <a:off x="2669886" y="6356349"/>
+            <a:ext cx="2482842" cy="365125"/>
           </a:xfrm>
         </p:spPr>
         <p:txBody>
@@ -36905,39 +40645,39 @@
           <a:lstStyle/>
           <a:p>
             <a:r>
-              <a:rPr lang="en-US" b="1" dirty="0"/>
-              <a:t>CUSTOMER SEGMENTATION</a:t>
-            </a:r>
-          </a:p>
-        </p:txBody>
-      </p:sp>
-      <p:sp>
-        <p:nvSpPr>
-          <p:cNvPr id="22" name="Slide Number Placeholder 21">
-            <a:extLst>
-              <a:ext uri="{FF2B5EF4-FFF2-40B4-BE49-F238E27FC236}">
-                <a16:creationId xmlns:a16="http://schemas.microsoft.com/office/drawing/2014/main" id="{7B2AEE4B-1877-7FF7-BF6F-0DEF356E0BB4}"/>
-              </a:ext>
-            </a:extLst>
-          </p:cNvPr>
-          <p:cNvSpPr>
-            <a:spLocks noGrp="1"/>
-          </p:cNvSpPr>
-          <p:nvPr>
-            <p:ph type="sldNum" sz="quarter" idx="22"/>
-          </p:nvPr>
-        </p:nvSpPr>
-        <p:spPr>
-          <a:xfrm>
-            <a:off x="10700656" y="6356350"/>
-            <a:ext cx="653143" cy="365125"/>
+              <a:rPr lang="en-US" dirty="0"/>
+              <a:t>Pitch Deck</a:t>
+            </a:r>
+          </a:p>
+        </p:txBody>
+      </p:sp>
+      <p:sp>
+        <p:nvSpPr>
+          <p:cNvPr id="4" name="Slide Number Placeholder 3">
+            <a:extLst>
+              <a:ext uri="{FF2B5EF4-FFF2-40B4-BE49-F238E27FC236}">
+                <a16:creationId xmlns:a16="http://schemas.microsoft.com/office/drawing/2014/main" id="{2EB7B7E8-8D59-A066-8A15-B0F2C4B11BF2}"/>
+              </a:ext>
+            </a:extLst>
+          </p:cNvPr>
+          <p:cNvSpPr>
+            <a:spLocks noGrp="1"/>
+          </p:cNvSpPr>
+          <p:nvPr>
+            <p:ph type="sldNum" sz="quarter" idx="12"/>
+          </p:nvPr>
+        </p:nvSpPr>
+        <p:spPr>
+          <a:xfrm>
+            <a:off x="5536305" y="6356350"/>
+            <a:ext cx="987552" cy="365125"/>
           </a:xfrm>
         </p:spPr>
         <p:txBody>
           <a:bodyPr/>
           <a:lstStyle/>
           <a:p>
-            <a:fld id="{B5CEABB6-07DC-46E8-9B57-56EC44A396E5}" type="slidenum">
+            <a:fld id="{19B51A1E-902D-48AF-9020-955120F399B6}" type="slidenum">
               <a:rPr lang="en-US" smtClean="0"/>
               <a:pPr/>
               <a:t>8</a:t>
@@ -36946,44 +40686,10 @@
           </a:p>
         </p:txBody>
       </p:sp>
-      <p:sp>
-        <p:nvSpPr>
-          <p:cNvPr id="29" name="Text Placeholder 28">
-            <a:extLst>
-              <a:ext uri="{FF2B5EF4-FFF2-40B4-BE49-F238E27FC236}">
-                <a16:creationId xmlns:a16="http://schemas.microsoft.com/office/drawing/2014/main" id="{FB50434A-AD39-65C4-8EDE-29571A3AC279}"/>
-              </a:ext>
-            </a:extLst>
-          </p:cNvPr>
-          <p:cNvSpPr>
-            <a:spLocks noGrp="1"/>
-          </p:cNvSpPr>
-          <p:nvPr>
-            <p:ph type="body" sz="quarter" idx="28"/>
-          </p:nvPr>
-        </p:nvSpPr>
-        <p:spPr>
-          <a:xfrm>
-            <a:off x="838201" y="5602406"/>
-            <a:ext cx="10550420" cy="753944"/>
-          </a:xfrm>
-        </p:spPr>
-        <p:txBody>
-          <a:bodyPr/>
-          <a:lstStyle/>
-          <a:p>
-            <a:r>
-              <a:rPr lang="en-SG" dirty="0" err="1"/>
-              <a:t>xxxx</a:t>
-            </a:r>
-            <a:endParaRPr lang="en-SG" dirty="0"/>
-          </a:p>
-        </p:txBody>
-      </p:sp>
     </p:spTree>
     <p:extLst>
       <p:ext uri="{BB962C8B-B14F-4D97-AF65-F5344CB8AC3E}">
-        <p14:creationId xmlns:p14="http://schemas.microsoft.com/office/powerpoint/2010/main" val="78925653"/>
+        <p14:creationId xmlns:p14="http://schemas.microsoft.com/office/powerpoint/2010/main" val="583794120"/>
       </p:ext>
     </p:extLst>
   </p:cSld>
@@ -37001,7 +40707,7 @@
         <p:cNvPr id="1" name="">
           <a:extLst>
             <a:ext uri="{FF2B5EF4-FFF2-40B4-BE49-F238E27FC236}">
-              <a16:creationId xmlns:a16="http://schemas.microsoft.com/office/drawing/2014/main" id="{AB6058AC-DE82-4F1F-3CFF-09C7194F796F}"/>
+              <a16:creationId xmlns:a16="http://schemas.microsoft.com/office/drawing/2014/main" id="{2C6D3F18-9649-FE0C-2E05-BE0AD13F3734}"/>
             </a:ext>
           </a:extLst>
         </p:cNvPr>
@@ -37021,7 +40727,7 @@
           <p:cNvPr id="2" name="Title 1">
             <a:extLst>
               <a:ext uri="{FF2B5EF4-FFF2-40B4-BE49-F238E27FC236}">
-                <a16:creationId xmlns:a16="http://schemas.microsoft.com/office/drawing/2014/main" id="{1FCE6382-DCDD-9225-F5FD-2E470D0F9E93}"/>
+                <a16:creationId xmlns:a16="http://schemas.microsoft.com/office/drawing/2014/main" id="{88404C2C-E566-933E-410A-5AB4393EA482}"/>
               </a:ext>
             </a:extLst>
           </p:cNvPr>
@@ -37039,155 +40745,1121 @@
           </a:xfrm>
         </p:spPr>
         <p:txBody>
+          <a:bodyPr>
+            <a:normAutofit/>
+          </a:bodyPr>
+          <a:lstStyle/>
+          <a:p>
+            <a:r>
+              <a:rPr lang="en-US" dirty="0" err="1"/>
+              <a:t>BIGQuery</a:t>
+            </a:r>
+            <a:r>
+              <a:rPr lang="en-US" dirty="0"/>
+              <a:t> and DBT Were used for the ELT process to provide a single source of truth for analytics…</a:t>
+            </a:r>
+          </a:p>
+        </p:txBody>
+      </p:sp>
+      <p:sp>
+        <p:nvSpPr>
+          <p:cNvPr id="29" name="Text Placeholder 28">
+            <a:extLst>
+              <a:ext uri="{FF2B5EF4-FFF2-40B4-BE49-F238E27FC236}">
+                <a16:creationId xmlns:a16="http://schemas.microsoft.com/office/drawing/2014/main" id="{03D2009F-8756-AAA5-5F9F-643E97AFE5A3}"/>
+              </a:ext>
+            </a:extLst>
+          </p:cNvPr>
+          <p:cNvSpPr>
+            <a:spLocks noGrp="1"/>
+          </p:cNvSpPr>
+          <p:nvPr>
+            <p:ph type="body" sz="quarter" idx="28"/>
+          </p:nvPr>
+        </p:nvSpPr>
+        <p:spPr>
+          <a:xfrm>
+            <a:off x="838201" y="5602406"/>
+            <a:ext cx="10550420" cy="753944"/>
+          </a:xfrm>
+        </p:spPr>
+        <p:txBody>
           <a:bodyPr/>
           <a:lstStyle/>
           <a:p>
             <a:r>
-              <a:rPr lang="en-US" dirty="0"/>
-              <a:t>SLIDES ON SELLER SCORE CARD HERE…</a:t>
-            </a:r>
-          </a:p>
-        </p:txBody>
-      </p:sp>
-      <p:sp>
-        <p:nvSpPr>
-          <p:cNvPr id="20" name="Date Placeholder 19">
-            <a:extLst>
-              <a:ext uri="{FF2B5EF4-FFF2-40B4-BE49-F238E27FC236}">
-                <a16:creationId xmlns:a16="http://schemas.microsoft.com/office/drawing/2014/main" id="{1271E6A4-CE62-B474-03BE-412B4FD667B7}"/>
-              </a:ext>
-            </a:extLst>
-          </p:cNvPr>
-          <p:cNvSpPr>
-            <a:spLocks noGrp="1"/>
-          </p:cNvSpPr>
-          <p:nvPr>
-            <p:ph type="dt" sz="half" idx="20"/>
-          </p:nvPr>
-        </p:nvSpPr>
-        <p:spPr>
-          <a:xfrm>
-            <a:off x="5919680" y="6356350"/>
-            <a:ext cx="947516" cy="365125"/>
-          </a:xfrm>
+              <a:rPr lang="en-SG" dirty="0"/>
+              <a:t>Google </a:t>
+            </a:r>
+            <a:r>
+              <a:rPr lang="en-SG" dirty="0" err="1"/>
+              <a:t>BigQuery</a:t>
+            </a:r>
+            <a:r>
+              <a:rPr lang="en-SG" dirty="0"/>
+              <a:t> was selected to allow data scientists who are working remotely to update, access, transform, and analyse data to deliver insights.</a:t>
+            </a:r>
+          </a:p>
+        </p:txBody>
+      </p:sp>
+      <p:sp>
+        <p:nvSpPr>
+          <p:cNvPr id="3" name="Flowchart: Magnetic Disk 2">
+            <a:extLst>
+              <a:ext uri="{FF2B5EF4-FFF2-40B4-BE49-F238E27FC236}">
+                <a16:creationId xmlns:a16="http://schemas.microsoft.com/office/drawing/2014/main" id="{310EFDC9-E6EC-B856-B94A-250F1F036FB0}"/>
+              </a:ext>
+            </a:extLst>
+          </p:cNvPr>
+          <p:cNvSpPr/>
+          <p:nvPr/>
+        </p:nvSpPr>
+        <p:spPr>
+          <a:xfrm>
+            <a:off x="664946" y="1865570"/>
+            <a:ext cx="1230182" cy="753944"/>
+          </a:xfrm>
+          <a:prstGeom prst="flowChartMagneticDisk">
+            <a:avLst/>
+          </a:prstGeom>
+        </p:spPr>
+        <p:style>
+          <a:lnRef idx="2">
+            <a:schemeClr val="accent1">
+              <a:shade val="15000"/>
+            </a:schemeClr>
+          </a:lnRef>
+          <a:fillRef idx="1">
+            <a:schemeClr val="accent1"/>
+          </a:fillRef>
+          <a:effectRef idx="0">
+            <a:schemeClr val="accent1"/>
+          </a:effectRef>
+          <a:fontRef idx="minor">
+            <a:schemeClr val="lt1"/>
+          </a:fontRef>
+        </p:style>
+        <p:txBody>
+          <a:bodyPr rtlCol="0" anchor="ctr"/>
+          <a:lstStyle/>
+          <a:p>
+            <a:pPr algn="ctr"/>
+            <a:r>
+              <a:rPr lang="en-US" sz="1600" b="1" dirty="0" err="1">
+                <a:solidFill>
+                  <a:schemeClr val="tx1"/>
+                </a:solidFill>
+              </a:rPr>
+              <a:t>Olist</a:t>
+            </a:r>
+            <a:r>
+              <a:rPr lang="en-US" sz="1600" b="1" dirty="0">
+                <a:solidFill>
+                  <a:schemeClr val="tx1"/>
+                </a:solidFill>
+              </a:rPr>
+              <a:t> CSV Files</a:t>
+            </a:r>
+          </a:p>
+        </p:txBody>
+      </p:sp>
+      <p:sp>
+        <p:nvSpPr>
+          <p:cNvPr id="5" name="Flowchart: Magnetic Disk 4">
+            <a:extLst>
+              <a:ext uri="{FF2B5EF4-FFF2-40B4-BE49-F238E27FC236}">
+                <a16:creationId xmlns:a16="http://schemas.microsoft.com/office/drawing/2014/main" id="{D12450AB-2ADC-F7E8-9D6C-47C106A2A81B}"/>
+              </a:ext>
+            </a:extLst>
+          </p:cNvPr>
+          <p:cNvSpPr/>
+          <p:nvPr/>
+        </p:nvSpPr>
+        <p:spPr>
+          <a:xfrm>
+            <a:off x="3857410" y="1865570"/>
+            <a:ext cx="1230182" cy="753944"/>
+          </a:xfrm>
+          <a:prstGeom prst="flowChartMagneticDisk">
+            <a:avLst/>
+          </a:prstGeom>
+        </p:spPr>
+        <p:style>
+          <a:lnRef idx="2">
+            <a:schemeClr val="accent1">
+              <a:shade val="15000"/>
+            </a:schemeClr>
+          </a:lnRef>
+          <a:fillRef idx="1">
+            <a:schemeClr val="accent1"/>
+          </a:fillRef>
+          <a:effectRef idx="0">
+            <a:schemeClr val="accent1"/>
+          </a:effectRef>
+          <a:fontRef idx="minor">
+            <a:schemeClr val="lt1"/>
+          </a:fontRef>
+        </p:style>
+        <p:txBody>
+          <a:bodyPr rtlCol="0" anchor="ctr"/>
+          <a:lstStyle/>
+          <a:p>
+            <a:pPr algn="ctr"/>
+            <a:r>
+              <a:rPr lang="en-US" sz="1600" b="1" dirty="0">
+                <a:solidFill>
+                  <a:schemeClr val="tx1"/>
+                </a:solidFill>
+              </a:rPr>
+              <a:t>Google </a:t>
+            </a:r>
+            <a:r>
+              <a:rPr lang="en-US" sz="1600" b="1" dirty="0" err="1">
+                <a:solidFill>
+                  <a:schemeClr val="tx1"/>
+                </a:solidFill>
+              </a:rPr>
+              <a:t>BigQuery</a:t>
+            </a:r>
+            <a:endParaRPr lang="en-US" sz="1600" b="1" dirty="0">
+              <a:solidFill>
+                <a:schemeClr val="tx1"/>
+              </a:solidFill>
+            </a:endParaRPr>
+          </a:p>
+        </p:txBody>
+      </p:sp>
+      <p:sp>
+        <p:nvSpPr>
+          <p:cNvPr id="6" name="Arrow: Right 5">
+            <a:extLst>
+              <a:ext uri="{FF2B5EF4-FFF2-40B4-BE49-F238E27FC236}">
+                <a16:creationId xmlns:a16="http://schemas.microsoft.com/office/drawing/2014/main" id="{92A2326E-B827-9DB8-0AA9-AFC4322FD61C}"/>
+              </a:ext>
+            </a:extLst>
+          </p:cNvPr>
+          <p:cNvSpPr/>
+          <p:nvPr/>
+        </p:nvSpPr>
+        <p:spPr>
+          <a:xfrm>
+            <a:off x="2387065" y="2000226"/>
+            <a:ext cx="978408" cy="484632"/>
+          </a:xfrm>
+          <a:prstGeom prst="rightArrow">
+            <a:avLst/>
+          </a:prstGeom>
+          <a:gradFill flip="none" rotWithShape="1">
+            <a:gsLst>
+              <a:gs pos="0">
+                <a:schemeClr val="accent5">
+                  <a:shade val="30000"/>
+                  <a:satMod val="115000"/>
+                </a:schemeClr>
+              </a:gs>
+              <a:gs pos="50000">
+                <a:schemeClr val="accent5">
+                  <a:shade val="67500"/>
+                  <a:satMod val="115000"/>
+                </a:schemeClr>
+              </a:gs>
+              <a:gs pos="100000">
+                <a:schemeClr val="accent5">
+                  <a:shade val="100000"/>
+                  <a:satMod val="115000"/>
+                </a:schemeClr>
+              </a:gs>
+            </a:gsLst>
+            <a:lin ang="5400000" scaled="1"/>
+            <a:tileRect/>
+          </a:gradFill>
+          <a:ln>
+            <a:solidFill>
+              <a:schemeClr val="tx1"/>
+            </a:solidFill>
+          </a:ln>
+        </p:spPr>
+        <p:style>
+          <a:lnRef idx="2">
+            <a:schemeClr val="accent5">
+              <a:shade val="15000"/>
+            </a:schemeClr>
+          </a:lnRef>
+          <a:fillRef idx="1">
+            <a:schemeClr val="accent5"/>
+          </a:fillRef>
+          <a:effectRef idx="0">
+            <a:schemeClr val="accent5"/>
+          </a:effectRef>
+          <a:fontRef idx="minor">
+            <a:schemeClr val="lt1"/>
+          </a:fontRef>
+        </p:style>
+        <p:txBody>
+          <a:bodyPr rtlCol="0" anchor="ctr"/>
+          <a:lstStyle/>
+          <a:p>
+            <a:pPr algn="ctr"/>
+            <a:endParaRPr lang="en-US"/>
+          </a:p>
+        </p:txBody>
+      </p:sp>
+      <p:sp>
+        <p:nvSpPr>
+          <p:cNvPr id="7" name="TextBox 6">
+            <a:extLst>
+              <a:ext uri="{FF2B5EF4-FFF2-40B4-BE49-F238E27FC236}">
+                <a16:creationId xmlns:a16="http://schemas.microsoft.com/office/drawing/2014/main" id="{13EF7C5E-4B19-DCD3-DAD0-045435663AEC}"/>
+              </a:ext>
+            </a:extLst>
+          </p:cNvPr>
+          <p:cNvSpPr txBox="1"/>
+          <p:nvPr/>
+        </p:nvSpPr>
+        <p:spPr>
+          <a:xfrm>
+            <a:off x="698050" y="2718169"/>
+            <a:ext cx="1163973" cy="307777"/>
+          </a:xfrm>
+          <a:prstGeom prst="rect">
+            <a:avLst/>
+          </a:prstGeom>
+          <a:solidFill>
+            <a:schemeClr val="bg1"/>
+          </a:solidFill>
+        </p:spPr>
+        <p:txBody>
+          <a:bodyPr wrap="none" rtlCol="0">
+            <a:spAutoFit/>
+          </a:bodyPr>
+          <a:lstStyle/>
+          <a:p>
+            <a:pPr algn="ctr"/>
+            <a:r>
+              <a:rPr lang="en-US" sz="1400" i="1" dirty="0"/>
+              <a:t>Local Storage</a:t>
+            </a:r>
+          </a:p>
+        </p:txBody>
+      </p:sp>
+      <p:sp>
+        <p:nvSpPr>
+          <p:cNvPr id="8" name="TextBox 7">
+            <a:extLst>
+              <a:ext uri="{FF2B5EF4-FFF2-40B4-BE49-F238E27FC236}">
+                <a16:creationId xmlns:a16="http://schemas.microsoft.com/office/drawing/2014/main" id="{B11C4913-4B13-DB8B-CE04-150EBD42B9A5}"/>
+              </a:ext>
+            </a:extLst>
+          </p:cNvPr>
+          <p:cNvSpPr txBox="1"/>
+          <p:nvPr/>
+        </p:nvSpPr>
+        <p:spPr>
+          <a:xfrm>
+            <a:off x="3871503" y="2718168"/>
+            <a:ext cx="1201997" cy="307777"/>
+          </a:xfrm>
+          <a:prstGeom prst="rect">
+            <a:avLst/>
+          </a:prstGeom>
+          <a:solidFill>
+            <a:schemeClr val="bg1"/>
+          </a:solidFill>
+        </p:spPr>
+        <p:txBody>
+          <a:bodyPr wrap="none" rtlCol="0">
+            <a:spAutoFit/>
+          </a:bodyPr>
+          <a:lstStyle/>
+          <a:p>
+            <a:pPr algn="ctr"/>
+            <a:r>
+              <a:rPr lang="en-US" sz="1400" i="1" dirty="0"/>
+              <a:t>Cloud Storage</a:t>
+            </a:r>
+          </a:p>
+        </p:txBody>
+      </p:sp>
+      <p:sp>
+        <p:nvSpPr>
+          <p:cNvPr id="9" name="Flowchart: Magnetic Disk 8">
+            <a:extLst>
+              <a:ext uri="{FF2B5EF4-FFF2-40B4-BE49-F238E27FC236}">
+                <a16:creationId xmlns:a16="http://schemas.microsoft.com/office/drawing/2014/main" id="{D7F17238-FE3C-61DB-E59C-7876E4B1D609}"/>
+              </a:ext>
+            </a:extLst>
+          </p:cNvPr>
+          <p:cNvSpPr/>
+          <p:nvPr/>
+        </p:nvSpPr>
+        <p:spPr>
+          <a:xfrm>
+            <a:off x="7049874" y="1865570"/>
+            <a:ext cx="1230182" cy="753944"/>
+          </a:xfrm>
+          <a:prstGeom prst="flowChartMagneticDisk">
+            <a:avLst/>
+          </a:prstGeom>
+        </p:spPr>
+        <p:style>
+          <a:lnRef idx="2">
+            <a:schemeClr val="accent1">
+              <a:shade val="15000"/>
+            </a:schemeClr>
+          </a:lnRef>
+          <a:fillRef idx="1">
+            <a:schemeClr val="accent1"/>
+          </a:fillRef>
+          <a:effectRef idx="0">
+            <a:schemeClr val="accent1"/>
+          </a:effectRef>
+          <a:fontRef idx="minor">
+            <a:schemeClr val="lt1"/>
+          </a:fontRef>
+        </p:style>
+        <p:txBody>
+          <a:bodyPr rtlCol="0" anchor="ctr"/>
+          <a:lstStyle/>
+          <a:p>
+            <a:pPr algn="ctr"/>
+            <a:r>
+              <a:rPr lang="en-US" sz="1600" b="1" dirty="0">
+                <a:solidFill>
+                  <a:schemeClr val="tx1"/>
+                </a:solidFill>
+              </a:rPr>
+              <a:t>DBT Transform</a:t>
+            </a:r>
+          </a:p>
+        </p:txBody>
+      </p:sp>
+      <p:sp>
+        <p:nvSpPr>
+          <p:cNvPr id="10" name="Arrow: Right 9">
+            <a:extLst>
+              <a:ext uri="{FF2B5EF4-FFF2-40B4-BE49-F238E27FC236}">
+                <a16:creationId xmlns:a16="http://schemas.microsoft.com/office/drawing/2014/main" id="{0D25397F-E1E2-FCBD-22D0-1AADEC1AAEA7}"/>
+              </a:ext>
+            </a:extLst>
+          </p:cNvPr>
+          <p:cNvSpPr/>
+          <p:nvPr/>
+        </p:nvSpPr>
+        <p:spPr>
+          <a:xfrm>
+            <a:off x="5579529" y="2000226"/>
+            <a:ext cx="978408" cy="484632"/>
+          </a:xfrm>
+          <a:prstGeom prst="rightArrow">
+            <a:avLst/>
+          </a:prstGeom>
+          <a:gradFill flip="none" rotWithShape="1">
+            <a:gsLst>
+              <a:gs pos="0">
+                <a:schemeClr val="accent5">
+                  <a:shade val="30000"/>
+                  <a:satMod val="115000"/>
+                </a:schemeClr>
+              </a:gs>
+              <a:gs pos="50000">
+                <a:schemeClr val="accent5">
+                  <a:shade val="67500"/>
+                  <a:satMod val="115000"/>
+                </a:schemeClr>
+              </a:gs>
+              <a:gs pos="100000">
+                <a:schemeClr val="accent5">
+                  <a:shade val="100000"/>
+                  <a:satMod val="115000"/>
+                </a:schemeClr>
+              </a:gs>
+            </a:gsLst>
+            <a:lin ang="5400000" scaled="1"/>
+            <a:tileRect/>
+          </a:gradFill>
+          <a:ln>
+            <a:solidFill>
+              <a:schemeClr val="tx1"/>
+            </a:solidFill>
+          </a:ln>
+        </p:spPr>
+        <p:style>
+          <a:lnRef idx="2">
+            <a:schemeClr val="accent5">
+              <a:shade val="15000"/>
+            </a:schemeClr>
+          </a:lnRef>
+          <a:fillRef idx="1">
+            <a:schemeClr val="accent5"/>
+          </a:fillRef>
+          <a:effectRef idx="0">
+            <a:schemeClr val="accent5"/>
+          </a:effectRef>
+          <a:fontRef idx="minor">
+            <a:schemeClr val="lt1"/>
+          </a:fontRef>
+        </p:style>
+        <p:txBody>
+          <a:bodyPr rtlCol="0" anchor="ctr"/>
+          <a:lstStyle/>
+          <a:p>
+            <a:pPr algn="ctr"/>
+            <a:endParaRPr lang="en-US"/>
+          </a:p>
+        </p:txBody>
+      </p:sp>
+      <p:sp>
+        <p:nvSpPr>
+          <p:cNvPr id="11" name="Flowchart: Multidocument 10">
+            <a:extLst>
+              <a:ext uri="{FF2B5EF4-FFF2-40B4-BE49-F238E27FC236}">
+                <a16:creationId xmlns:a16="http://schemas.microsoft.com/office/drawing/2014/main" id="{C0BBD2FC-F5F8-6F43-9BA7-03ABDDE76D1F}"/>
+              </a:ext>
+            </a:extLst>
+          </p:cNvPr>
+          <p:cNvSpPr/>
+          <p:nvPr/>
+        </p:nvSpPr>
+        <p:spPr>
+          <a:xfrm>
+            <a:off x="10242338" y="1777652"/>
+            <a:ext cx="1230182" cy="929779"/>
+          </a:xfrm>
+          <a:prstGeom prst="flowChartMultidocument">
+            <a:avLst/>
+          </a:prstGeom>
+        </p:spPr>
+        <p:style>
+          <a:lnRef idx="2">
+            <a:schemeClr val="accent1">
+              <a:shade val="15000"/>
+            </a:schemeClr>
+          </a:lnRef>
+          <a:fillRef idx="1">
+            <a:schemeClr val="accent1"/>
+          </a:fillRef>
+          <a:effectRef idx="0">
+            <a:schemeClr val="accent1"/>
+          </a:effectRef>
+          <a:fontRef idx="minor">
+            <a:schemeClr val="lt1"/>
+          </a:fontRef>
+        </p:style>
+        <p:txBody>
+          <a:bodyPr rtlCol="0" anchor="ctr"/>
+          <a:lstStyle/>
+          <a:p>
+            <a:pPr algn="ctr"/>
+            <a:r>
+              <a:rPr lang="en-US" b="1" dirty="0">
+                <a:solidFill>
+                  <a:schemeClr val="tx1"/>
+                </a:solidFill>
+              </a:rPr>
+              <a:t>Analytics</a:t>
+            </a:r>
+          </a:p>
+        </p:txBody>
+      </p:sp>
+      <p:sp>
+        <p:nvSpPr>
+          <p:cNvPr id="12" name="Arrow: Right 11">
+            <a:extLst>
+              <a:ext uri="{FF2B5EF4-FFF2-40B4-BE49-F238E27FC236}">
+                <a16:creationId xmlns:a16="http://schemas.microsoft.com/office/drawing/2014/main" id="{4CF01148-35BA-0E07-D36C-8329DB2300C2}"/>
+              </a:ext>
+            </a:extLst>
+          </p:cNvPr>
+          <p:cNvSpPr/>
+          <p:nvPr/>
+        </p:nvSpPr>
+        <p:spPr>
+          <a:xfrm>
+            <a:off x="8771993" y="2010962"/>
+            <a:ext cx="978408" cy="484632"/>
+          </a:xfrm>
+          <a:prstGeom prst="rightArrow">
+            <a:avLst/>
+          </a:prstGeom>
+          <a:gradFill flip="none" rotWithShape="1">
+            <a:gsLst>
+              <a:gs pos="0">
+                <a:schemeClr val="accent5">
+                  <a:shade val="30000"/>
+                  <a:satMod val="115000"/>
+                </a:schemeClr>
+              </a:gs>
+              <a:gs pos="50000">
+                <a:schemeClr val="accent5">
+                  <a:shade val="67500"/>
+                  <a:satMod val="115000"/>
+                </a:schemeClr>
+              </a:gs>
+              <a:gs pos="100000">
+                <a:schemeClr val="accent5">
+                  <a:shade val="100000"/>
+                  <a:satMod val="115000"/>
+                </a:schemeClr>
+              </a:gs>
+            </a:gsLst>
+            <a:lin ang="5400000" scaled="1"/>
+            <a:tileRect/>
+          </a:gradFill>
+          <a:ln>
+            <a:solidFill>
+              <a:schemeClr val="tx1"/>
+            </a:solidFill>
+          </a:ln>
+        </p:spPr>
+        <p:style>
+          <a:lnRef idx="2">
+            <a:schemeClr val="accent5">
+              <a:shade val="15000"/>
+            </a:schemeClr>
+          </a:lnRef>
+          <a:fillRef idx="1">
+            <a:schemeClr val="accent5"/>
+          </a:fillRef>
+          <a:effectRef idx="0">
+            <a:schemeClr val="accent5"/>
+          </a:effectRef>
+          <a:fontRef idx="minor">
+            <a:schemeClr val="lt1"/>
+          </a:fontRef>
+        </p:style>
+        <p:txBody>
+          <a:bodyPr rtlCol="0" anchor="ctr"/>
+          <a:lstStyle/>
+          <a:p>
+            <a:pPr algn="ctr"/>
+            <a:endParaRPr lang="en-US"/>
+          </a:p>
+        </p:txBody>
+      </p:sp>
+      <p:sp>
+        <p:nvSpPr>
+          <p:cNvPr id="13" name="TextBox 12">
+            <a:extLst>
+              <a:ext uri="{FF2B5EF4-FFF2-40B4-BE49-F238E27FC236}">
+                <a16:creationId xmlns:a16="http://schemas.microsoft.com/office/drawing/2014/main" id="{1313ACE0-4D09-E7B5-9398-665023834E93}"/>
+              </a:ext>
+            </a:extLst>
+          </p:cNvPr>
+          <p:cNvSpPr txBox="1"/>
+          <p:nvPr/>
+        </p:nvSpPr>
+        <p:spPr>
+          <a:xfrm>
+            <a:off x="623093" y="1215957"/>
+            <a:ext cx="1313886" cy="369332"/>
+          </a:xfrm>
+          <a:prstGeom prst="rect">
+            <a:avLst/>
+          </a:prstGeom>
+          <a:solidFill>
+            <a:schemeClr val="bg1"/>
+          </a:solidFill>
+          <a:ln>
+            <a:solidFill>
+              <a:schemeClr val="tx1"/>
+            </a:solidFill>
+          </a:ln>
+        </p:spPr>
+        <p:txBody>
+          <a:bodyPr wrap="none" rtlCol="0">
+            <a:spAutoFit/>
+          </a:bodyPr>
+          <a:lstStyle/>
+          <a:p>
+            <a:r>
+              <a:rPr lang="en-US" b="1" dirty="0"/>
+              <a:t>ELT Pipeline</a:t>
+            </a:r>
+          </a:p>
+        </p:txBody>
+      </p:sp>
+      <p:sp>
+        <p:nvSpPr>
+          <p:cNvPr id="14" name="TextBox 13">
+            <a:extLst>
+              <a:ext uri="{FF2B5EF4-FFF2-40B4-BE49-F238E27FC236}">
+                <a16:creationId xmlns:a16="http://schemas.microsoft.com/office/drawing/2014/main" id="{F7359FBE-96E1-04CF-4AEA-C89527C0E257}"/>
+              </a:ext>
+            </a:extLst>
+          </p:cNvPr>
+          <p:cNvSpPr txBox="1"/>
+          <p:nvPr/>
+        </p:nvSpPr>
+        <p:spPr>
+          <a:xfrm>
+            <a:off x="10482232" y="2718168"/>
+            <a:ext cx="750398" cy="307777"/>
+          </a:xfrm>
+          <a:prstGeom prst="rect">
+            <a:avLst/>
+          </a:prstGeom>
+          <a:solidFill>
+            <a:schemeClr val="bg1"/>
+          </a:solidFill>
+        </p:spPr>
+        <p:txBody>
+          <a:bodyPr wrap="none" rtlCol="0">
+            <a:spAutoFit/>
+          </a:bodyPr>
+          <a:lstStyle/>
+          <a:p>
+            <a:pPr algn="ctr"/>
+            <a:r>
+              <a:rPr lang="en-US" sz="1400" i="1" dirty="0"/>
+              <a:t>Insights</a:t>
+            </a:r>
+          </a:p>
+        </p:txBody>
+      </p:sp>
+      <p:sp>
+        <p:nvSpPr>
+          <p:cNvPr id="15" name="Rectangle 14">
+            <a:extLst>
+              <a:ext uri="{FF2B5EF4-FFF2-40B4-BE49-F238E27FC236}">
+                <a16:creationId xmlns:a16="http://schemas.microsoft.com/office/drawing/2014/main" id="{CAAE5E88-43B3-7326-0471-84E0B59275F5}"/>
+              </a:ext>
+            </a:extLst>
+          </p:cNvPr>
+          <p:cNvSpPr/>
+          <p:nvPr/>
+        </p:nvSpPr>
+        <p:spPr>
+          <a:xfrm>
+            <a:off x="4199822" y="3779889"/>
+            <a:ext cx="3105752" cy="914400"/>
+          </a:xfrm>
+          <a:prstGeom prst="rect">
+            <a:avLst/>
+          </a:prstGeom>
+        </p:spPr>
+        <p:style>
+          <a:lnRef idx="2">
+            <a:schemeClr val="accent1">
+              <a:shade val="15000"/>
+            </a:schemeClr>
+          </a:lnRef>
+          <a:fillRef idx="1">
+            <a:schemeClr val="accent1"/>
+          </a:fillRef>
+          <a:effectRef idx="0">
+            <a:schemeClr val="accent1"/>
+          </a:effectRef>
+          <a:fontRef idx="minor">
+            <a:schemeClr val="lt1"/>
+          </a:fontRef>
+        </p:style>
+        <p:txBody>
+          <a:bodyPr rtlCol="0" anchor="ctr"/>
+          <a:lstStyle/>
+          <a:p>
+            <a:pPr algn="ctr"/>
+            <a:r>
+              <a:rPr lang="en-US" dirty="0">
+                <a:solidFill>
+                  <a:schemeClr val="tx1"/>
+                </a:solidFill>
+              </a:rPr>
+              <a:t>Insert Fact and Dimension Tables Here</a:t>
+            </a:r>
+          </a:p>
+        </p:txBody>
+      </p:sp>
+      <p:sp>
+        <p:nvSpPr>
+          <p:cNvPr id="16" name="Date Placeholder 10">
+            <a:extLst>
+              <a:ext uri="{FF2B5EF4-FFF2-40B4-BE49-F238E27FC236}">
+                <a16:creationId xmlns:a16="http://schemas.microsoft.com/office/drawing/2014/main" id="{862DD052-5165-0D10-A759-3D8071F0867D}"/>
+              </a:ext>
+            </a:extLst>
+          </p:cNvPr>
+          <p:cNvSpPr txBox="1">
+            <a:spLocks/>
+          </p:cNvSpPr>
+          <p:nvPr/>
+        </p:nvSpPr>
+        <p:spPr>
+          <a:xfrm>
+            <a:off x="838200" y="6356350"/>
+            <a:ext cx="2743200" cy="365125"/>
+          </a:xfrm>
+          <a:prstGeom prst="rect">
+            <a:avLst/>
+          </a:prstGeom>
         </p:spPr>
         <p:txBody>
           <a:bodyPr/>
-          <a:lstStyle/>
-          <a:p>
-            <a:r>
-              <a:rPr lang="en-US" dirty="0"/>
-              <a:t>20XX</a:t>
-            </a:r>
-          </a:p>
-        </p:txBody>
-      </p:sp>
-      <p:sp>
-        <p:nvSpPr>
-          <p:cNvPr id="21" name="Footer Placeholder 20">
-            <a:extLst>
-              <a:ext uri="{FF2B5EF4-FFF2-40B4-BE49-F238E27FC236}">
-                <a16:creationId xmlns:a16="http://schemas.microsoft.com/office/drawing/2014/main" id="{21523579-E95F-C9DC-C9C9-819A5E32A448}"/>
-              </a:ext>
-            </a:extLst>
-          </p:cNvPr>
-          <p:cNvSpPr>
-            <a:spLocks noGrp="1"/>
-          </p:cNvSpPr>
-          <p:nvPr>
-            <p:ph type="ftr" sz="quarter" idx="21"/>
-          </p:nvPr>
-        </p:nvSpPr>
-        <p:spPr>
-          <a:xfrm>
-            <a:off x="7161955" y="6356350"/>
-            <a:ext cx="3243942" cy="365125"/>
-          </a:xfrm>
+          <a:lstStyle>
+            <a:defPPr>
+              <a:defRPr lang="en-US"/>
+            </a:defPPr>
+            <a:lvl1pPr marL="0" algn="l" defTabSz="914400" rtl="0" eaLnBrk="1" latinLnBrk="0" hangingPunct="1">
+              <a:defRPr sz="1800" kern="1200">
+                <a:solidFill>
+                  <a:schemeClr val="tx1"/>
+                </a:solidFill>
+                <a:latin typeface="+mn-lt"/>
+                <a:ea typeface="+mn-ea"/>
+                <a:cs typeface="+mn-cs"/>
+              </a:defRPr>
+            </a:lvl1pPr>
+            <a:lvl2pPr marL="457200" algn="l" defTabSz="914400" rtl="0" eaLnBrk="1" latinLnBrk="0" hangingPunct="1">
+              <a:defRPr sz="1800" kern="1200">
+                <a:solidFill>
+                  <a:schemeClr val="tx1"/>
+                </a:solidFill>
+                <a:latin typeface="+mn-lt"/>
+                <a:ea typeface="+mn-ea"/>
+                <a:cs typeface="+mn-cs"/>
+              </a:defRPr>
+            </a:lvl2pPr>
+            <a:lvl3pPr marL="914400" algn="l" defTabSz="914400" rtl="0" eaLnBrk="1" latinLnBrk="0" hangingPunct="1">
+              <a:defRPr sz="1800" kern="1200">
+                <a:solidFill>
+                  <a:schemeClr val="tx1"/>
+                </a:solidFill>
+                <a:latin typeface="+mn-lt"/>
+                <a:ea typeface="+mn-ea"/>
+                <a:cs typeface="+mn-cs"/>
+              </a:defRPr>
+            </a:lvl3pPr>
+            <a:lvl4pPr marL="1371600" algn="l" defTabSz="914400" rtl="0" eaLnBrk="1" latinLnBrk="0" hangingPunct="1">
+              <a:defRPr sz="1800" kern="1200">
+                <a:solidFill>
+                  <a:schemeClr val="tx1"/>
+                </a:solidFill>
+                <a:latin typeface="+mn-lt"/>
+                <a:ea typeface="+mn-ea"/>
+                <a:cs typeface="+mn-cs"/>
+              </a:defRPr>
+            </a:lvl4pPr>
+            <a:lvl5pPr marL="1828800" algn="l" defTabSz="914400" rtl="0" eaLnBrk="1" latinLnBrk="0" hangingPunct="1">
+              <a:defRPr sz="1800" kern="1200">
+                <a:solidFill>
+                  <a:schemeClr val="tx1"/>
+                </a:solidFill>
+                <a:latin typeface="+mn-lt"/>
+                <a:ea typeface="+mn-ea"/>
+                <a:cs typeface="+mn-cs"/>
+              </a:defRPr>
+            </a:lvl5pPr>
+            <a:lvl6pPr marL="2286000" algn="l" defTabSz="914400" rtl="0" eaLnBrk="1" latinLnBrk="0" hangingPunct="1">
+              <a:defRPr sz="1800" kern="1200">
+                <a:solidFill>
+                  <a:schemeClr val="tx1"/>
+                </a:solidFill>
+                <a:latin typeface="+mn-lt"/>
+                <a:ea typeface="+mn-ea"/>
+                <a:cs typeface="+mn-cs"/>
+              </a:defRPr>
+            </a:lvl6pPr>
+            <a:lvl7pPr marL="2743200" algn="l" defTabSz="914400" rtl="0" eaLnBrk="1" latinLnBrk="0" hangingPunct="1">
+              <a:defRPr sz="1800" kern="1200">
+                <a:solidFill>
+                  <a:schemeClr val="tx1"/>
+                </a:solidFill>
+                <a:latin typeface="+mn-lt"/>
+                <a:ea typeface="+mn-ea"/>
+                <a:cs typeface="+mn-cs"/>
+              </a:defRPr>
+            </a:lvl7pPr>
+            <a:lvl8pPr marL="3200400" algn="l" defTabSz="914400" rtl="0" eaLnBrk="1" latinLnBrk="0" hangingPunct="1">
+              <a:defRPr sz="1800" kern="1200">
+                <a:solidFill>
+                  <a:schemeClr val="tx1"/>
+                </a:solidFill>
+                <a:latin typeface="+mn-lt"/>
+                <a:ea typeface="+mn-ea"/>
+                <a:cs typeface="+mn-cs"/>
+              </a:defRPr>
+            </a:lvl8pPr>
+            <a:lvl9pPr marL="3657600" algn="l" defTabSz="914400" rtl="0" eaLnBrk="1" latinLnBrk="0" hangingPunct="1">
+              <a:defRPr sz="1800" kern="1200">
+                <a:solidFill>
+                  <a:schemeClr val="tx1"/>
+                </a:solidFill>
+                <a:latin typeface="+mn-lt"/>
+                <a:ea typeface="+mn-ea"/>
+                <a:cs typeface="+mn-cs"/>
+              </a:defRPr>
+            </a:lvl9pPr>
+          </a:lstStyle>
+          <a:p>
+            <a:r>
+              <a:rPr lang="en-US" sz="900" dirty="0"/>
+              <a:t>1nsight</a:t>
+            </a:r>
+          </a:p>
+        </p:txBody>
+      </p:sp>
+      <p:sp>
+        <p:nvSpPr>
+          <p:cNvPr id="17" name="Footer Placeholder 11">
+            <a:extLst>
+              <a:ext uri="{FF2B5EF4-FFF2-40B4-BE49-F238E27FC236}">
+                <a16:creationId xmlns:a16="http://schemas.microsoft.com/office/drawing/2014/main" id="{216C3656-5A5B-4EB3-D2F4-00A0240B565A}"/>
+              </a:ext>
+            </a:extLst>
+          </p:cNvPr>
+          <p:cNvSpPr txBox="1">
+            <a:spLocks/>
+          </p:cNvSpPr>
+          <p:nvPr/>
+        </p:nvSpPr>
+        <p:spPr>
+          <a:xfrm>
+            <a:off x="6155823" y="6356350"/>
+            <a:ext cx="1808712" cy="365125"/>
+          </a:xfrm>
+          <a:prstGeom prst="rect">
+            <a:avLst/>
+          </a:prstGeom>
         </p:spPr>
         <p:txBody>
           <a:bodyPr/>
-          <a:lstStyle/>
-          <a:p>
-            <a:r>
-              <a:rPr lang="en-US" b="1" dirty="0"/>
-              <a:t>SELLER SCORE CARD</a:t>
-            </a:r>
-          </a:p>
-        </p:txBody>
-      </p:sp>
-      <p:sp>
-        <p:nvSpPr>
-          <p:cNvPr id="22" name="Slide Number Placeholder 21">
-            <a:extLst>
-              <a:ext uri="{FF2B5EF4-FFF2-40B4-BE49-F238E27FC236}">
-                <a16:creationId xmlns:a16="http://schemas.microsoft.com/office/drawing/2014/main" id="{427B2B58-ABF9-731D-B604-A70F443860EC}"/>
-              </a:ext>
-            </a:extLst>
-          </p:cNvPr>
-          <p:cNvSpPr>
-            <a:spLocks noGrp="1"/>
-          </p:cNvSpPr>
-          <p:nvPr>
-            <p:ph type="sldNum" sz="quarter" idx="22"/>
-          </p:nvPr>
-        </p:nvSpPr>
-        <p:spPr>
-          <a:xfrm>
-            <a:off x="10700656" y="6356350"/>
-            <a:ext cx="653143" cy="365125"/>
-          </a:xfrm>
+          <a:lstStyle>
+            <a:defPPr>
+              <a:defRPr lang="en-US"/>
+            </a:defPPr>
+            <a:lvl1pPr marL="0" algn="l" defTabSz="914400" rtl="0" eaLnBrk="1" latinLnBrk="0" hangingPunct="1">
+              <a:defRPr sz="1800" kern="1200">
+                <a:solidFill>
+                  <a:schemeClr val="tx1"/>
+                </a:solidFill>
+                <a:latin typeface="+mn-lt"/>
+                <a:ea typeface="+mn-ea"/>
+                <a:cs typeface="+mn-cs"/>
+              </a:defRPr>
+            </a:lvl1pPr>
+            <a:lvl2pPr marL="457200" algn="l" defTabSz="914400" rtl="0" eaLnBrk="1" latinLnBrk="0" hangingPunct="1">
+              <a:defRPr sz="1800" kern="1200">
+                <a:solidFill>
+                  <a:schemeClr val="tx1"/>
+                </a:solidFill>
+                <a:latin typeface="+mn-lt"/>
+                <a:ea typeface="+mn-ea"/>
+                <a:cs typeface="+mn-cs"/>
+              </a:defRPr>
+            </a:lvl2pPr>
+            <a:lvl3pPr marL="914400" algn="l" defTabSz="914400" rtl="0" eaLnBrk="1" latinLnBrk="0" hangingPunct="1">
+              <a:defRPr sz="1800" kern="1200">
+                <a:solidFill>
+                  <a:schemeClr val="tx1"/>
+                </a:solidFill>
+                <a:latin typeface="+mn-lt"/>
+                <a:ea typeface="+mn-ea"/>
+                <a:cs typeface="+mn-cs"/>
+              </a:defRPr>
+            </a:lvl3pPr>
+            <a:lvl4pPr marL="1371600" algn="l" defTabSz="914400" rtl="0" eaLnBrk="1" latinLnBrk="0" hangingPunct="1">
+              <a:defRPr sz="1800" kern="1200">
+                <a:solidFill>
+                  <a:schemeClr val="tx1"/>
+                </a:solidFill>
+                <a:latin typeface="+mn-lt"/>
+                <a:ea typeface="+mn-ea"/>
+                <a:cs typeface="+mn-cs"/>
+              </a:defRPr>
+            </a:lvl4pPr>
+            <a:lvl5pPr marL="1828800" algn="l" defTabSz="914400" rtl="0" eaLnBrk="1" latinLnBrk="0" hangingPunct="1">
+              <a:defRPr sz="1800" kern="1200">
+                <a:solidFill>
+                  <a:schemeClr val="tx1"/>
+                </a:solidFill>
+                <a:latin typeface="+mn-lt"/>
+                <a:ea typeface="+mn-ea"/>
+                <a:cs typeface="+mn-cs"/>
+              </a:defRPr>
+            </a:lvl5pPr>
+            <a:lvl6pPr marL="2286000" algn="l" defTabSz="914400" rtl="0" eaLnBrk="1" latinLnBrk="0" hangingPunct="1">
+              <a:defRPr sz="1800" kern="1200">
+                <a:solidFill>
+                  <a:schemeClr val="tx1"/>
+                </a:solidFill>
+                <a:latin typeface="+mn-lt"/>
+                <a:ea typeface="+mn-ea"/>
+                <a:cs typeface="+mn-cs"/>
+              </a:defRPr>
+            </a:lvl6pPr>
+            <a:lvl7pPr marL="2743200" algn="l" defTabSz="914400" rtl="0" eaLnBrk="1" latinLnBrk="0" hangingPunct="1">
+              <a:defRPr sz="1800" kern="1200">
+                <a:solidFill>
+                  <a:schemeClr val="tx1"/>
+                </a:solidFill>
+                <a:latin typeface="+mn-lt"/>
+                <a:ea typeface="+mn-ea"/>
+                <a:cs typeface="+mn-cs"/>
+              </a:defRPr>
+            </a:lvl7pPr>
+            <a:lvl8pPr marL="3200400" algn="l" defTabSz="914400" rtl="0" eaLnBrk="1" latinLnBrk="0" hangingPunct="1">
+              <a:defRPr sz="1800" kern="1200">
+                <a:solidFill>
+                  <a:schemeClr val="tx1"/>
+                </a:solidFill>
+                <a:latin typeface="+mn-lt"/>
+                <a:ea typeface="+mn-ea"/>
+                <a:cs typeface="+mn-cs"/>
+              </a:defRPr>
+            </a:lvl8pPr>
+            <a:lvl9pPr marL="3657600" algn="l" defTabSz="914400" rtl="0" eaLnBrk="1" latinLnBrk="0" hangingPunct="1">
+              <a:defRPr sz="1800" kern="1200">
+                <a:solidFill>
+                  <a:schemeClr val="tx1"/>
+                </a:solidFill>
+                <a:latin typeface="+mn-lt"/>
+                <a:ea typeface="+mn-ea"/>
+                <a:cs typeface="+mn-cs"/>
+              </a:defRPr>
+            </a:lvl9pPr>
+          </a:lstStyle>
+          <a:p>
+            <a:r>
+              <a:rPr lang="en-US" sz="900"/>
+              <a:t>KEY RECOMMENDATIONS</a:t>
+            </a:r>
+            <a:endParaRPr lang="en-US" sz="900" dirty="0"/>
+          </a:p>
+        </p:txBody>
+      </p:sp>
+      <p:sp>
+        <p:nvSpPr>
+          <p:cNvPr id="18" name="Slide Number Placeholder 12">
+            <a:extLst>
+              <a:ext uri="{FF2B5EF4-FFF2-40B4-BE49-F238E27FC236}">
+                <a16:creationId xmlns:a16="http://schemas.microsoft.com/office/drawing/2014/main" id="{030ABEA4-1F3F-D208-C5F3-F24FA5C6895E}"/>
+              </a:ext>
+            </a:extLst>
+          </p:cNvPr>
+          <p:cNvSpPr txBox="1">
+            <a:spLocks/>
+          </p:cNvSpPr>
+          <p:nvPr/>
+        </p:nvSpPr>
+        <p:spPr>
+          <a:xfrm>
+            <a:off x="10810874" y="6356350"/>
+            <a:ext cx="542925" cy="365125"/>
+          </a:xfrm>
+          <a:prstGeom prst="rect">
+            <a:avLst/>
+          </a:prstGeom>
         </p:spPr>
         <p:txBody>
           <a:bodyPr/>
-          <a:lstStyle/>
+          <a:lstStyle>
+            <a:defPPr>
+              <a:defRPr lang="en-US"/>
+            </a:defPPr>
+            <a:lvl1pPr marL="0" algn="l" defTabSz="914400" rtl="0" eaLnBrk="1" latinLnBrk="0" hangingPunct="1">
+              <a:defRPr sz="1800" kern="1200">
+                <a:solidFill>
+                  <a:schemeClr val="tx1"/>
+                </a:solidFill>
+                <a:latin typeface="+mn-lt"/>
+                <a:ea typeface="+mn-ea"/>
+                <a:cs typeface="+mn-cs"/>
+              </a:defRPr>
+            </a:lvl1pPr>
+            <a:lvl2pPr marL="457200" algn="l" defTabSz="914400" rtl="0" eaLnBrk="1" latinLnBrk="0" hangingPunct="1">
+              <a:defRPr sz="1800" kern="1200">
+                <a:solidFill>
+                  <a:schemeClr val="tx1"/>
+                </a:solidFill>
+                <a:latin typeface="+mn-lt"/>
+                <a:ea typeface="+mn-ea"/>
+                <a:cs typeface="+mn-cs"/>
+              </a:defRPr>
+            </a:lvl2pPr>
+            <a:lvl3pPr marL="914400" algn="l" defTabSz="914400" rtl="0" eaLnBrk="1" latinLnBrk="0" hangingPunct="1">
+              <a:defRPr sz="1800" kern="1200">
+                <a:solidFill>
+                  <a:schemeClr val="tx1"/>
+                </a:solidFill>
+                <a:latin typeface="+mn-lt"/>
+                <a:ea typeface="+mn-ea"/>
+                <a:cs typeface="+mn-cs"/>
+              </a:defRPr>
+            </a:lvl3pPr>
+            <a:lvl4pPr marL="1371600" algn="l" defTabSz="914400" rtl="0" eaLnBrk="1" latinLnBrk="0" hangingPunct="1">
+              <a:defRPr sz="1800" kern="1200">
+                <a:solidFill>
+                  <a:schemeClr val="tx1"/>
+                </a:solidFill>
+                <a:latin typeface="+mn-lt"/>
+                <a:ea typeface="+mn-ea"/>
+                <a:cs typeface="+mn-cs"/>
+              </a:defRPr>
+            </a:lvl4pPr>
+            <a:lvl5pPr marL="1828800" algn="l" defTabSz="914400" rtl="0" eaLnBrk="1" latinLnBrk="0" hangingPunct="1">
+              <a:defRPr sz="1800" kern="1200">
+                <a:solidFill>
+                  <a:schemeClr val="tx1"/>
+                </a:solidFill>
+                <a:latin typeface="+mn-lt"/>
+                <a:ea typeface="+mn-ea"/>
+                <a:cs typeface="+mn-cs"/>
+              </a:defRPr>
+            </a:lvl5pPr>
+            <a:lvl6pPr marL="2286000" algn="l" defTabSz="914400" rtl="0" eaLnBrk="1" latinLnBrk="0" hangingPunct="1">
+              <a:defRPr sz="1800" kern="1200">
+                <a:solidFill>
+                  <a:schemeClr val="tx1"/>
+                </a:solidFill>
+                <a:latin typeface="+mn-lt"/>
+                <a:ea typeface="+mn-ea"/>
+                <a:cs typeface="+mn-cs"/>
+              </a:defRPr>
+            </a:lvl6pPr>
+            <a:lvl7pPr marL="2743200" algn="l" defTabSz="914400" rtl="0" eaLnBrk="1" latinLnBrk="0" hangingPunct="1">
+              <a:defRPr sz="1800" kern="1200">
+                <a:solidFill>
+                  <a:schemeClr val="tx1"/>
+                </a:solidFill>
+                <a:latin typeface="+mn-lt"/>
+                <a:ea typeface="+mn-ea"/>
+                <a:cs typeface="+mn-cs"/>
+              </a:defRPr>
+            </a:lvl7pPr>
+            <a:lvl8pPr marL="3200400" algn="l" defTabSz="914400" rtl="0" eaLnBrk="1" latinLnBrk="0" hangingPunct="1">
+              <a:defRPr sz="1800" kern="1200">
+                <a:solidFill>
+                  <a:schemeClr val="tx1"/>
+                </a:solidFill>
+                <a:latin typeface="+mn-lt"/>
+                <a:ea typeface="+mn-ea"/>
+                <a:cs typeface="+mn-cs"/>
+              </a:defRPr>
+            </a:lvl8pPr>
+            <a:lvl9pPr marL="3657600" algn="l" defTabSz="914400" rtl="0" eaLnBrk="1" latinLnBrk="0" hangingPunct="1">
+              <a:defRPr sz="1800" kern="1200">
+                <a:solidFill>
+                  <a:schemeClr val="tx1"/>
+                </a:solidFill>
+                <a:latin typeface="+mn-lt"/>
+                <a:ea typeface="+mn-ea"/>
+                <a:cs typeface="+mn-cs"/>
+              </a:defRPr>
+            </a:lvl9pPr>
+          </a:lstStyle>
           <a:p>
             <a:fld id="{B5CEABB6-07DC-46E8-9B57-56EC44A396E5}" type="slidenum">
-              <a:rPr lang="en-US" smtClean="0"/>
+              <a:rPr lang="en-US" sz="900" smtClean="0"/>
               <a:pPr/>
               <a:t>9</a:t>
             </a:fld>
-            <a:endParaRPr lang="en-US" dirty="0"/>
-          </a:p>
-        </p:txBody>
-      </p:sp>
-      <p:sp>
-        <p:nvSpPr>
-          <p:cNvPr id="29" name="Text Placeholder 28">
-            <a:extLst>
-              <a:ext uri="{FF2B5EF4-FFF2-40B4-BE49-F238E27FC236}">
-                <a16:creationId xmlns:a16="http://schemas.microsoft.com/office/drawing/2014/main" id="{E8F1E9A8-0CE1-FC59-8CBC-2D4550205CAC}"/>
-              </a:ext>
-            </a:extLst>
-          </p:cNvPr>
-          <p:cNvSpPr>
-            <a:spLocks noGrp="1"/>
-          </p:cNvSpPr>
-          <p:nvPr>
-            <p:ph type="body" sz="quarter" idx="28"/>
-          </p:nvPr>
-        </p:nvSpPr>
-        <p:spPr>
-          <a:xfrm>
-            <a:off x="838201" y="5602406"/>
-            <a:ext cx="10550420" cy="753944"/>
-          </a:xfrm>
-        </p:spPr>
-        <p:txBody>
-          <a:bodyPr/>
-          <a:lstStyle/>
-          <a:p>
-            <a:r>
-              <a:rPr lang="en-SG" dirty="0" err="1"/>
-              <a:t>xxxx</a:t>
-            </a:r>
-            <a:endParaRPr lang="en-SG" dirty="0"/>
+            <a:endParaRPr lang="en-US" sz="900" dirty="0"/>
           </a:p>
         </p:txBody>
       </p:sp>
     </p:spTree>
     <p:extLst>
       <p:ext uri="{BB962C8B-B14F-4D97-AF65-F5344CB8AC3E}">
-        <p14:creationId xmlns:p14="http://schemas.microsoft.com/office/powerpoint/2010/main" val="300223189"/>
+        <p14:creationId xmlns:p14="http://schemas.microsoft.com/office/powerpoint/2010/main" val="758995014"/>
       </p:ext>
     </p:extLst>
   </p:cSld>
@@ -38009,15 +42681,6 @@
 </file>
 
 <file path=customXml/item2.xml><?xml version="1.0" encoding="utf-8"?>
-<?mso-contentType ?>
-<FormTemplates xmlns="http://schemas.microsoft.com/sharepoint/v3/contenttype/forms">
-  <Display>DocumentLibraryForm</Display>
-  <Edit>DocumentLibraryForm</Edit>
-  <New>DocumentLibraryForm</New>
-</FormTemplates>
-</file>
-
-<file path=customXml/item3.xml><?xml version="1.0" encoding="utf-8"?>
 <ct:contentTypeSchema xmlns:ct="http://schemas.microsoft.com/office/2006/metadata/contentType" xmlns:ma="http://schemas.microsoft.com/office/2006/metadata/properties/metaAttributes" ct:_="" ma:_="" ma:contentTypeName="Document" ma:contentTypeID="0x01010079F111ED35F8CC479449609E8A0923A6" ma:contentTypeVersion="27" ma:contentTypeDescription="Create a new document." ma:contentTypeScope="" ma:versionID="c6f9a84f66a9c8b9a21755b9ffafb945">
   <xsd:schema xmlns:xsd="http://www.w3.org/2001/XMLSchema" xmlns:xs="http://www.w3.org/2001/XMLSchema" xmlns:p="http://schemas.microsoft.com/office/2006/metadata/properties" xmlns:ns1="http://schemas.microsoft.com/sharepoint/v3" xmlns:ns2="71af3243-3dd4-4a8d-8c0d-dd76da1f02a5" xmlns:ns3="16c05727-aa75-4e4a-9b5f-8a80a1165891" xmlns:ns4="230e9df3-be65-4c73-a93b-d1236ebd677e" targetNamespace="http://schemas.microsoft.com/office/2006/metadata/properties" ma:root="true" ma:fieldsID="27df39e3e7036dff54f89ddd5805ce72" ns1:_="" ns2:_="" ns3:_="" ns4:_="">
     <xsd:import namespace="http://schemas.microsoft.com/sharepoint/v3"/>
@@ -38323,6 +42986,15 @@
 </ct:contentTypeSchema>
 </file>
 
+<file path=customXml/item3.xml><?xml version="1.0" encoding="utf-8"?>
+<?mso-contentType ?>
+<FormTemplates xmlns="http://schemas.microsoft.com/sharepoint/v3/contenttype/forms">
+  <Display>DocumentLibraryForm</Display>
+  <Edit>DocumentLibraryForm</Edit>
+  <New>DocumentLibraryForm</New>
+</FormTemplates>
+</file>
+
 <file path=customXml/itemProps1.xml><?xml version="1.0" encoding="utf-8"?>
 <ds:datastoreItem xmlns:ds="http://schemas.openxmlformats.org/officeDocument/2006/customXml" ds:itemID="{BEFFFA3F-0FB5-4ED3-8906-A15B16577F44}">
   <ds:schemaRefs>
@@ -38336,14 +43008,6 @@
 </file>
 
 <file path=customXml/itemProps2.xml><?xml version="1.0" encoding="utf-8"?>
-<ds:datastoreItem xmlns:ds="http://schemas.openxmlformats.org/officeDocument/2006/customXml" ds:itemID="{6966C46A-DC57-4209-80CD-9FE6C93151FF}">
-  <ds:schemaRefs>
-    <ds:schemaRef ds:uri="http://schemas.microsoft.com/sharepoint/v3/contenttype/forms"/>
-  </ds:schemaRefs>
-</ds:datastoreItem>
-</file>
-
-<file path=customXml/itemProps3.xml><?xml version="1.0" encoding="utf-8"?>
 <ds:datastoreItem xmlns:ds="http://schemas.openxmlformats.org/officeDocument/2006/customXml" ds:itemID="{4E18436D-DA32-4E27-AC64-8FFEDA5218F9}">
   <ds:schemaRefs>
     <ds:schemaRef ds:uri="http://schemas.microsoft.com/office/2006/metadata/contentType"/>
@@ -38364,6 +43028,14 @@
 </ds:datastoreItem>
 </file>
 
+<file path=customXml/itemProps3.xml><?xml version="1.0" encoding="utf-8"?>
+<ds:datastoreItem xmlns:ds="http://schemas.openxmlformats.org/officeDocument/2006/customXml" ds:itemID="{6966C46A-DC57-4209-80CD-9FE6C93151FF}">
+  <ds:schemaRefs>
+    <ds:schemaRef ds:uri="http://schemas.microsoft.com/sharepoint/v3/contenttype/forms"/>
+  </ds:schemaRefs>
+</ds:datastoreItem>
+</file>
+
 <file path=docMetadata/LabelInfo.xml><?xml version="1.0" encoding="utf-8"?>
 <clbl:labelList xmlns:clbl="http://schemas.microsoft.com/office/2020/mipLabelMetadata"/>
 </file>